--- a/output/presentations/05-tools-mcp.pptx
+++ b/output/presentations/05-tools-mcp.pptx
@@ -2,22 +2,24 @@
 <file path=ppt/presentation.xml><?xml version="1.0" encoding="utf-8"?>
 <p:presentation xmlns:p="http://schemas.openxmlformats.org/presentationml/2006/main">
   <p:sldMasterIdLst>
-    <p:sldMasterId xmlns:r="http://schemas.openxmlformats.org/officeDocument/2006/relationships" id="2147483648" r:id="Rae23f40a1599477e"/>
+    <p:sldMasterId xmlns:r="http://schemas.openxmlformats.org/officeDocument/2006/relationships" id="2147483648" r:id="R63cc3f1afa524b49"/>
   </p:sldMasterIdLst>
   <p:notesMasterIdLst>
-    <p:notesMasterId xmlns:r="http://schemas.openxmlformats.org/officeDocument/2006/relationships" r:id="R2e5210e804c74a15"/>
+    <p:notesMasterId xmlns:r="http://schemas.openxmlformats.org/officeDocument/2006/relationships" r:id="Rb3f9a5f9b8a04e29"/>
   </p:notesMasterIdLst>
   <p:sldIdLst>
-    <p:sldId xmlns:r="http://schemas.openxmlformats.org/officeDocument/2006/relationships" id="256" r:id="Red137a07b71d4dad"/>
-    <p:sldId xmlns:r="http://schemas.openxmlformats.org/officeDocument/2006/relationships" id="257" r:id="R6c55db13477a4ff8"/>
-    <p:sldId xmlns:r="http://schemas.openxmlformats.org/officeDocument/2006/relationships" id="258" r:id="R85be371ec3fa4664"/>
-    <p:sldId xmlns:r="http://schemas.openxmlformats.org/officeDocument/2006/relationships" id="259" r:id="Ra71b6b7b3da24505"/>
-    <p:sldId xmlns:r="http://schemas.openxmlformats.org/officeDocument/2006/relationships" id="260" r:id="Rcc8cf4ed93364fd9"/>
-    <p:sldId xmlns:r="http://schemas.openxmlformats.org/officeDocument/2006/relationships" id="261" r:id="R59e12546ba1c439f"/>
-    <p:sldId xmlns:r="http://schemas.openxmlformats.org/officeDocument/2006/relationships" id="262" r:id="Rbc2faf3d01e1400e"/>
-    <p:sldId xmlns:r="http://schemas.openxmlformats.org/officeDocument/2006/relationships" id="263" r:id="Reaa7b798ac93408d"/>
-    <p:sldId xmlns:r="http://schemas.openxmlformats.org/officeDocument/2006/relationships" id="264" r:id="R2caedb48ba084020"/>
-    <p:sldId xmlns:r="http://schemas.openxmlformats.org/officeDocument/2006/relationships" id="265" r:id="R4ef7b956b2764651"/>
+    <p:sldId xmlns:r="http://schemas.openxmlformats.org/officeDocument/2006/relationships" id="256" r:id="Rb4ddf0650bbe4f72"/>
+    <p:sldId xmlns:r="http://schemas.openxmlformats.org/officeDocument/2006/relationships" id="257" r:id="R5b83c4ee0cfa4e2e"/>
+    <p:sldId xmlns:r="http://schemas.openxmlformats.org/officeDocument/2006/relationships" id="258" r:id="R84ff464361564c7b"/>
+    <p:sldId xmlns:r="http://schemas.openxmlformats.org/officeDocument/2006/relationships" id="259" r:id="R5ae2ce722a0b46ac"/>
+    <p:sldId xmlns:r="http://schemas.openxmlformats.org/officeDocument/2006/relationships" id="260" r:id="R7ee80c8ea3f24306"/>
+    <p:sldId xmlns:r="http://schemas.openxmlformats.org/officeDocument/2006/relationships" id="261" r:id="R6d5d93875c0e413a"/>
+    <p:sldId xmlns:r="http://schemas.openxmlformats.org/officeDocument/2006/relationships" id="262" r:id="R2efa5b29ac6547b2"/>
+    <p:sldId xmlns:r="http://schemas.openxmlformats.org/officeDocument/2006/relationships" id="263" r:id="R5a21eb59c8114153"/>
+    <p:sldId xmlns:r="http://schemas.openxmlformats.org/officeDocument/2006/relationships" id="264" r:id="R4560486e87d64b59"/>
+    <p:sldId xmlns:r="http://schemas.openxmlformats.org/officeDocument/2006/relationships" id="265" r:id="Rca6977e617c44b78"/>
+    <p:sldId xmlns:r="http://schemas.openxmlformats.org/officeDocument/2006/relationships" id="266" r:id="Rde8f401a4d20473d"/>
+    <p:sldId xmlns:r="http://schemas.openxmlformats.org/officeDocument/2006/relationships" id="267" r:id="R6077a2b4a1af4128"/>
   </p:sldIdLst>
   <p:sldSz cx="12192000" cy="6858000"/>
   <p:notesSz cx="6858000" cy="9144000"/>
@@ -461,12 +463,62 @@
           </a:p>
           <a:p xmlns:a="http://schemas.openxmlformats.org/drawingml/2006/main">
             <a:r>
+              <a:t>Edition: 2026-09-09</a:t>
+            </a:r>
+          </a:p>
+          <a:p xmlns:a="http://schemas.openxmlformats.org/drawingml/2006/main">
+            <a:r>
+              <a:t/>
+            </a:r>
+          </a:p>
+          <a:p xmlns:a="http://schemas.openxmlformats.org/drawingml/2006/main">
+            <a:r>
               <a:t>[Sources]</a:t>
             </a:r>
           </a:p>
           <a:p xmlns:a="http://schemas.openxmlformats.org/drawingml/2006/main">
             <a:r>
-              <a:t>- Supplied source presentation: 05-tools-mcp.pdf</a:t>
+              <a:t>- Original source presentation: 05-tools-mcp.pdf</a:t>
+            </a:r>
+          </a:p>
+          <a:p xmlns:a="http://schemas.openxmlformats.org/drawingml/2006/main">
+            <a:r>
+              <a:t>- S1: Gemini function calling. Google documentation, accessed, 2026-09-09. https://ai.google.dev/gemini-api/docs/function-calling Check model support and preserve complete model content when returning function responses.</a:t>
+            </a:r>
+          </a:p>
+          <a:p xmlns:a="http://schemas.openxmlformats.org/drawingml/2006/main">
+            <a:r>
+              <a:t>- S2: OpenAI Agents SDK model integration. SDK documentation, accessed, 2026-09-09. https://openai.github.io/openai-agents-python/models/ The course uses local tools with a Gemini Chat Completions compatibility endpoint.</a:t>
+            </a:r>
+          </a:p>
+          <a:p xmlns:a="http://schemas.openxmlformats.org/drawingml/2006/main">
+            <a:r>
+              <a:t>- S5: MCP roots specification 2025-11-25. Versioned protocol specification, 2025-11-25. https://modelcontextprotocol.io/specification/2025-11-25/client/roots The course uses this historical protocol baseline. Implementations enforce access controls.</a:t>
+            </a:r>
+          </a:p>
+          <a:p xmlns:a="http://schemas.openxmlformats.org/drawingml/2006/main">
+            <a:r>
+              <a:t/>
+            </a:r>
+          </a:p>
+          <a:p xmlns:a="http://schemas.openxmlformats.org/drawingml/2006/main">
+            <a:r>
+              <a:t>[Assessed practice]</a:t>
+            </a:r>
+          </a:p>
+          <a:p xmlns:a="http://schemas.openxmlformats.org/drawingml/2006/main">
+            <a:r>
+              <a:t>Complete Lab 5's dispatch policy. For the MCP 2025-11-25 baseline, explain why a roots response cannot substitute for filesystem access controls.</a:t>
+            </a:r>
+          </a:p>
+          <a:p xmlns:a="http://schemas.openxmlformats.org/drawingml/2006/main">
+            <a:r>
+              <a:t>Acceptance: Reject booleans in numeric fields, nonfinite values, and oversized input. Name the component that enforces each permission.</a:t>
+            </a:r>
+          </a:p>
+          <a:p xmlns:a="http://schemas.openxmlformats.org/drawingml/2006/main">
+            <a:r>
+              <a:t>Lab: labs/05_gemini_bounded_tools.ipynb</a:t>
             </a:r>
           </a:p>
         </p:txBody>
@@ -536,6 +588,141 @@
           <a:lstStyle xmlns:a="http://schemas.openxmlformats.org/drawingml/2006/main"/>
           <a:p xmlns:a="http://schemas.openxmlformats.org/drawingml/2006/main">
             <a:r>
+              <a:t>Use as retrieval practice. Ask for an answer that defines, compares, traces, and evaluates.</a:t>
+            </a:r>
+          </a:p>
+          <a:p xmlns:a="http://schemas.openxmlformats.org/drawingml/2006/main">
+            <a:r>
+              <a:t/>
+            </a:r>
+          </a:p>
+          <a:p xmlns:a="http://schemas.openxmlformats.org/drawingml/2006/main">
+            <a:r>
+              <a:t>Edition: 2026-09-09</a:t>
+            </a:r>
+          </a:p>
+          <a:p xmlns:a="http://schemas.openxmlformats.org/drawingml/2006/main">
+            <a:r>
+              <a:t/>
+            </a:r>
+          </a:p>
+          <a:p xmlns:a="http://schemas.openxmlformats.org/drawingml/2006/main">
+            <a:r>
+              <a:t>[Sources]</a:t>
+            </a:r>
+          </a:p>
+          <a:p xmlns:a="http://schemas.openxmlformats.org/drawingml/2006/main">
+            <a:r>
+              <a:t>- Original source presentation: 05-tools-mcp.pdf</a:t>
+            </a:r>
+          </a:p>
+          <a:p xmlns:a="http://schemas.openxmlformats.org/drawingml/2006/main">
+            <a:r>
+              <a:t>- S1: Gemini function calling. Google documentation, accessed, 2026-09-09. https://ai.google.dev/gemini-api/docs/function-calling Check model support and preserve complete model content when returning function responses.</a:t>
+            </a:r>
+          </a:p>
+          <a:p xmlns:a="http://schemas.openxmlformats.org/drawingml/2006/main">
+            <a:r>
+              <a:t>- S2: OpenAI Agents SDK model integration. SDK documentation, accessed, 2026-09-09. https://openai.github.io/openai-agents-python/models/ The course uses local tools with a Gemini Chat Completions compatibility endpoint.</a:t>
+            </a:r>
+          </a:p>
+          <a:p xmlns:a="http://schemas.openxmlformats.org/drawingml/2006/main">
+            <a:r>
+              <a:t>- S5: MCP roots specification 2025-11-25. Versioned protocol specification, 2025-11-25. https://modelcontextprotocol.io/specification/2025-11-25/client/roots The course uses this historical protocol baseline. Implementations enforce access controls.</a:t>
+            </a:r>
+          </a:p>
+          <a:p xmlns:a="http://schemas.openxmlformats.org/drawingml/2006/main">
+            <a:r>
+              <a:t/>
+            </a:r>
+          </a:p>
+          <a:p xmlns:a="http://schemas.openxmlformats.org/drawingml/2006/main">
+            <a:r>
+              <a:t>[Assessed practice]</a:t>
+            </a:r>
+          </a:p>
+          <a:p xmlns:a="http://schemas.openxmlformats.org/drawingml/2006/main">
+            <a:r>
+              <a:t>Complete Lab 5's dispatch policy. For the MCP 2025-11-25 baseline, explain why a roots response cannot substitute for filesystem access controls.</a:t>
+            </a:r>
+          </a:p>
+          <a:p xmlns:a="http://schemas.openxmlformats.org/drawingml/2006/main">
+            <a:r>
+              <a:t>Acceptance: Reject booleans in numeric fields, nonfinite values, and oversized input. Name the component that enforces each permission.</a:t>
+            </a:r>
+          </a:p>
+          <a:p xmlns:a="http://schemas.openxmlformats.org/drawingml/2006/main">
+            <a:r>
+              <a:t>Lab: labs/05_gemini_bounded_tools.ipynb</a:t>
+            </a:r>
+          </a:p>
+        </p:txBody>
+      </p:sp>
+      <p:sp>
+        <p:nvSpPr>
+          <p:cNvPr id="4" name="Slide Number Placeholder 3"/>
+          <p:cNvSpPr>
+            <a:spLocks xmlns:a="http://schemas.openxmlformats.org/drawingml/2006/main" noGrp="1"/>
+          </p:cNvSpPr>
+          <p:nvPr>
+            <p:ph type="sldNum" idx="5"/>
+          </p:nvPr>
+        </p:nvSpPr>
+        <p:spPr/>
+        <p:txBody>
+          <a:bodyPr xmlns:a="http://schemas.openxmlformats.org/drawingml/2006/main"/>
+          <a:lstStyle xmlns:a="http://schemas.openxmlformats.org/drawingml/2006/main"/>
+          <a:p xmlns:a="http://schemas.openxmlformats.org/drawingml/2006/main"/>
+        </p:txBody>
+      </p:sp>
+    </p:spTree>
+  </p:cSld>
+  <p:clrMapOvr>
+    <a:masterClrMapping xmlns:a="http://schemas.openxmlformats.org/drawingml/2006/main"/>
+  </p:clrMapOvr>
+</p:notes>
+</file>
+
+<file path=ppt/notesSlides/notesSlide11.xml><?xml version="1.0" encoding="utf-8"?>
+<p:notes xmlns:p="http://schemas.openxmlformats.org/presentationml/2006/main">
+  <p:cSld>
+    <p:spTree>
+      <p:nvGrpSpPr>
+        <p:cNvPr id="1" name=""/>
+        <p:cNvGrpSpPr/>
+        <p:nvPr/>
+      </p:nvGrpSpPr>
+      <p:grpSpPr>
+        <a:xfrm xmlns:a="http://schemas.openxmlformats.org/drawingml/2006/main"/>
+      </p:grpSpPr>
+      <p:sp>
+        <p:nvSpPr>
+          <p:cNvPr id="2" name="Slide Image Placeholder 1"/>
+          <p:cNvSpPr>
+            <a:spLocks xmlns:a="http://schemas.openxmlformats.org/drawingml/2006/main" noGrp="1"/>
+          </p:cNvSpPr>
+          <p:nvPr>
+            <p:ph type="sldImg" idx="0"/>
+          </p:nvPr>
+        </p:nvSpPr>
+        <p:spPr/>
+      </p:sp>
+      <p:sp>
+        <p:nvSpPr>
+          <p:cNvPr id="3" name="Notes Placeholder 2"/>
+          <p:cNvSpPr>
+            <a:spLocks xmlns:a="http://schemas.openxmlformats.org/drawingml/2006/main" noGrp="1"/>
+          </p:cNvSpPr>
+          <p:nvPr>
+            <p:ph type="body" idx="1"/>
+          </p:nvPr>
+        </p:nvSpPr>
+        <p:spPr/>
+        <p:txBody>
+          <a:bodyPr xmlns:a="http://schemas.openxmlformats.org/drawingml/2006/main"/>
+          <a:lstStyle xmlns:a="http://schemas.openxmlformats.org/drawingml/2006/main"/>
+          <a:p xmlns:a="http://schemas.openxmlformats.org/drawingml/2006/main">
+            <a:r>
               <a:t>Close by restating the four durable ideas and linking forward to the next chapter.</a:t>
             </a:r>
           </a:p>
@@ -546,12 +733,197 @@
           </a:p>
           <a:p xmlns:a="http://schemas.openxmlformats.org/drawingml/2006/main">
             <a:r>
+              <a:t>Edition: 2026-09-09</a:t>
+            </a:r>
+          </a:p>
+          <a:p xmlns:a="http://schemas.openxmlformats.org/drawingml/2006/main">
+            <a:r>
+              <a:t/>
+            </a:r>
+          </a:p>
+          <a:p xmlns:a="http://schemas.openxmlformats.org/drawingml/2006/main">
+            <a:r>
               <a:t>[Sources]</a:t>
             </a:r>
           </a:p>
           <a:p xmlns:a="http://schemas.openxmlformats.org/drawingml/2006/main">
             <a:r>
-              <a:t>- Supplied source presentation: 05-tools-mcp.pdf</a:t>
+              <a:t>- Original source presentation: 05-tools-mcp.pdf</a:t>
+            </a:r>
+          </a:p>
+          <a:p xmlns:a="http://schemas.openxmlformats.org/drawingml/2006/main">
+            <a:r>
+              <a:t>- S1: Gemini function calling. Google documentation, accessed, 2026-09-09. https://ai.google.dev/gemini-api/docs/function-calling Check model support and preserve complete model content when returning function responses.</a:t>
+            </a:r>
+          </a:p>
+          <a:p xmlns:a="http://schemas.openxmlformats.org/drawingml/2006/main">
+            <a:r>
+              <a:t>- S2: OpenAI Agents SDK model integration. SDK documentation, accessed, 2026-09-09. https://openai.github.io/openai-agents-python/models/ The course uses local tools with a Gemini Chat Completions compatibility endpoint.</a:t>
+            </a:r>
+          </a:p>
+          <a:p xmlns:a="http://schemas.openxmlformats.org/drawingml/2006/main">
+            <a:r>
+              <a:t>- S5: MCP roots specification 2025-11-25. Versioned protocol specification, 2025-11-25. https://modelcontextprotocol.io/specification/2025-11-25/client/roots The course uses this historical protocol baseline. Implementations enforce access controls.</a:t>
+            </a:r>
+          </a:p>
+          <a:p xmlns:a="http://schemas.openxmlformats.org/drawingml/2006/main">
+            <a:r>
+              <a:t/>
+            </a:r>
+          </a:p>
+          <a:p xmlns:a="http://schemas.openxmlformats.org/drawingml/2006/main">
+            <a:r>
+              <a:t>[Assessed practice]</a:t>
+            </a:r>
+          </a:p>
+          <a:p xmlns:a="http://schemas.openxmlformats.org/drawingml/2006/main">
+            <a:r>
+              <a:t>Complete Lab 5's dispatch policy. For the MCP 2025-11-25 baseline, explain why a roots response cannot substitute for filesystem access controls.</a:t>
+            </a:r>
+          </a:p>
+          <a:p xmlns:a="http://schemas.openxmlformats.org/drawingml/2006/main">
+            <a:r>
+              <a:t>Acceptance: Reject booleans in numeric fields, nonfinite values, and oversized input. Name the component that enforces each permission.</a:t>
+            </a:r>
+          </a:p>
+          <a:p xmlns:a="http://schemas.openxmlformats.org/drawingml/2006/main">
+            <a:r>
+              <a:t>Lab: labs/05_gemini_bounded_tools.ipynb</a:t>
+            </a:r>
+          </a:p>
+        </p:txBody>
+      </p:sp>
+      <p:sp>
+        <p:nvSpPr>
+          <p:cNvPr id="4" name="Slide Number Placeholder 3"/>
+          <p:cNvSpPr>
+            <a:spLocks xmlns:a="http://schemas.openxmlformats.org/drawingml/2006/main" noGrp="1"/>
+          </p:cNvSpPr>
+          <p:nvPr>
+            <p:ph type="sldNum" idx="5"/>
+          </p:nvPr>
+        </p:nvSpPr>
+        <p:spPr/>
+        <p:txBody>
+          <a:bodyPr xmlns:a="http://schemas.openxmlformats.org/drawingml/2006/main"/>
+          <a:lstStyle xmlns:a="http://schemas.openxmlformats.org/drawingml/2006/main"/>
+          <a:p xmlns:a="http://schemas.openxmlformats.org/drawingml/2006/main"/>
+        </p:txBody>
+      </p:sp>
+    </p:spTree>
+  </p:cSld>
+  <p:clrMapOvr>
+    <a:masterClrMapping xmlns:a="http://schemas.openxmlformats.org/drawingml/2006/main"/>
+  </p:clrMapOvr>
+</p:notes>
+</file>
+
+<file path=ppt/notesSlides/notesSlide12.xml><?xml version="1.0" encoding="utf-8"?>
+<p:notes xmlns:p="http://schemas.openxmlformats.org/presentationml/2006/main">
+  <p:cSld>
+    <p:spTree>
+      <p:nvGrpSpPr>
+        <p:cNvPr id="1" name=""/>
+        <p:cNvGrpSpPr/>
+        <p:nvPr/>
+      </p:nvGrpSpPr>
+      <p:grpSpPr>
+        <a:xfrm xmlns:a="http://schemas.openxmlformats.org/drawingml/2006/main"/>
+      </p:grpSpPr>
+      <p:sp>
+        <p:nvSpPr>
+          <p:cNvPr id="2" name="Slide Image Placeholder 1"/>
+          <p:cNvSpPr>
+            <a:spLocks xmlns:a="http://schemas.openxmlformats.org/drawingml/2006/main" noGrp="1"/>
+          </p:cNvSpPr>
+          <p:nvPr>
+            <p:ph type="sldImg" idx="0"/>
+          </p:nvPr>
+        </p:nvSpPr>
+        <p:spPr/>
+      </p:sp>
+      <p:sp>
+        <p:nvSpPr>
+          <p:cNvPr id="3" name="Notes Placeholder 2"/>
+          <p:cNvSpPr>
+            <a:spLocks xmlns:a="http://schemas.openxmlformats.org/drawingml/2006/main" noGrp="1"/>
+          </p:cNvSpPr>
+          <p:nvPr>
+            <p:ph type="body" idx="1"/>
+          </p:nvPr>
+        </p:nvSpPr>
+        <p:spPr/>
+        <p:txBody>
+          <a:bodyPr xmlns:a="http://schemas.openxmlformats.org/drawingml/2006/main"/>
+          <a:lstStyle xmlns:a="http://schemas.openxmlformats.org/drawingml/2006/main"/>
+          <a:p xmlns:a="http://schemas.openxmlformats.org/drawingml/2006/main">
+            <a:r>
+              <a:t>Assess the submitted evidence with the stated acceptance check. Reading links and limitations follow.</a:t>
+            </a:r>
+          </a:p>
+          <a:p xmlns:a="http://schemas.openxmlformats.org/drawingml/2006/main">
+            <a:r>
+              <a:t/>
+            </a:r>
+          </a:p>
+          <a:p xmlns:a="http://schemas.openxmlformats.org/drawingml/2006/main">
+            <a:r>
+              <a:t>Edition: 2026-09-09</a:t>
+            </a:r>
+          </a:p>
+          <a:p xmlns:a="http://schemas.openxmlformats.org/drawingml/2006/main">
+            <a:r>
+              <a:t/>
+            </a:r>
+          </a:p>
+          <a:p xmlns:a="http://schemas.openxmlformats.org/drawingml/2006/main">
+            <a:r>
+              <a:t>[Sources]</a:t>
+            </a:r>
+          </a:p>
+          <a:p xmlns:a="http://schemas.openxmlformats.org/drawingml/2006/main">
+            <a:r>
+              <a:t>- Original source presentation: 05-tools-mcp.pdf</a:t>
+            </a:r>
+          </a:p>
+          <a:p xmlns:a="http://schemas.openxmlformats.org/drawingml/2006/main">
+            <a:r>
+              <a:t>- S1: Gemini function calling. Google documentation, accessed, 2026-09-09. https://ai.google.dev/gemini-api/docs/function-calling Check model support and preserve complete model content when returning function responses.</a:t>
+            </a:r>
+          </a:p>
+          <a:p xmlns:a="http://schemas.openxmlformats.org/drawingml/2006/main">
+            <a:r>
+              <a:t>- S2: OpenAI Agents SDK model integration. SDK documentation, accessed, 2026-09-09. https://openai.github.io/openai-agents-python/models/ The course uses local tools with a Gemini Chat Completions compatibility endpoint.</a:t>
+            </a:r>
+          </a:p>
+          <a:p xmlns:a="http://schemas.openxmlformats.org/drawingml/2006/main">
+            <a:r>
+              <a:t>- S5: MCP roots specification 2025-11-25. Versioned protocol specification, 2025-11-25. https://modelcontextprotocol.io/specification/2025-11-25/client/roots The course uses this historical protocol baseline. Implementations enforce access controls.</a:t>
+            </a:r>
+          </a:p>
+          <a:p xmlns:a="http://schemas.openxmlformats.org/drawingml/2006/main">
+            <a:r>
+              <a:t/>
+            </a:r>
+          </a:p>
+          <a:p xmlns:a="http://schemas.openxmlformats.org/drawingml/2006/main">
+            <a:r>
+              <a:t>[Assessed practice]</a:t>
+            </a:r>
+          </a:p>
+          <a:p xmlns:a="http://schemas.openxmlformats.org/drawingml/2006/main">
+            <a:r>
+              <a:t>Complete Lab 5's dispatch policy. For the MCP 2025-11-25 baseline, explain why a roots response cannot substitute for filesystem access controls.</a:t>
+            </a:r>
+          </a:p>
+          <a:p xmlns:a="http://schemas.openxmlformats.org/drawingml/2006/main">
+            <a:r>
+              <a:t>Acceptance: Reject booleans in numeric fields, nonfinite values, and oversized input. Name the component that enforces each permission.</a:t>
+            </a:r>
+          </a:p>
+          <a:p xmlns:a="http://schemas.openxmlformats.org/drawingml/2006/main">
+            <a:r>
+              <a:t>Lab: labs/05_gemini_bounded_tools.ipynb</a:t>
             </a:r>
           </a:p>
         </p:txBody>
@@ -631,12 +1003,62 @@
           </a:p>
           <a:p xmlns:a="http://schemas.openxmlformats.org/drawingml/2006/main">
             <a:r>
+              <a:t>Edition: 2026-09-09</a:t>
+            </a:r>
+          </a:p>
+          <a:p xmlns:a="http://schemas.openxmlformats.org/drawingml/2006/main">
+            <a:r>
+              <a:t/>
+            </a:r>
+          </a:p>
+          <a:p xmlns:a="http://schemas.openxmlformats.org/drawingml/2006/main">
+            <a:r>
               <a:t>[Sources]</a:t>
             </a:r>
           </a:p>
           <a:p xmlns:a="http://schemas.openxmlformats.org/drawingml/2006/main">
             <a:r>
-              <a:t>- Supplied source presentation: 05-tools-mcp.pdf</a:t>
+              <a:t>- Original source presentation: 05-tools-mcp.pdf</a:t>
+            </a:r>
+          </a:p>
+          <a:p xmlns:a="http://schemas.openxmlformats.org/drawingml/2006/main">
+            <a:r>
+              <a:t>- S1: Gemini function calling. Google documentation, accessed, 2026-09-09. https://ai.google.dev/gemini-api/docs/function-calling Check model support and preserve complete model content when returning function responses.</a:t>
+            </a:r>
+          </a:p>
+          <a:p xmlns:a="http://schemas.openxmlformats.org/drawingml/2006/main">
+            <a:r>
+              <a:t>- S2: OpenAI Agents SDK model integration. SDK documentation, accessed, 2026-09-09. https://openai.github.io/openai-agents-python/models/ The course uses local tools with a Gemini Chat Completions compatibility endpoint.</a:t>
+            </a:r>
+          </a:p>
+          <a:p xmlns:a="http://schemas.openxmlformats.org/drawingml/2006/main">
+            <a:r>
+              <a:t>- S5: MCP roots specification 2025-11-25. Versioned protocol specification, 2025-11-25. https://modelcontextprotocol.io/specification/2025-11-25/client/roots The course uses this historical protocol baseline. Implementations enforce access controls.</a:t>
+            </a:r>
+          </a:p>
+          <a:p xmlns:a="http://schemas.openxmlformats.org/drawingml/2006/main">
+            <a:r>
+              <a:t/>
+            </a:r>
+          </a:p>
+          <a:p xmlns:a="http://schemas.openxmlformats.org/drawingml/2006/main">
+            <a:r>
+              <a:t>[Assessed practice]</a:t>
+            </a:r>
+          </a:p>
+          <a:p xmlns:a="http://schemas.openxmlformats.org/drawingml/2006/main">
+            <a:r>
+              <a:t>Complete Lab 5's dispatch policy. For the MCP 2025-11-25 baseline, explain why a roots response cannot substitute for filesystem access controls.</a:t>
+            </a:r>
+          </a:p>
+          <a:p xmlns:a="http://schemas.openxmlformats.org/drawingml/2006/main">
+            <a:r>
+              <a:t>Acceptance: Reject booleans in numeric fields, nonfinite values, and oversized input. Name the component that enforces each permission.</a:t>
+            </a:r>
+          </a:p>
+          <a:p xmlns:a="http://schemas.openxmlformats.org/drawingml/2006/main">
+            <a:r>
+              <a:t>Lab: labs/05_gemini_bounded_tools.ipynb</a:t>
             </a:r>
           </a:p>
         </p:txBody>
@@ -716,12 +1138,62 @@
           </a:p>
           <a:p xmlns:a="http://schemas.openxmlformats.org/drawingml/2006/main">
             <a:r>
+              <a:t>Edition: 2026-09-09</a:t>
+            </a:r>
+          </a:p>
+          <a:p xmlns:a="http://schemas.openxmlformats.org/drawingml/2006/main">
+            <a:r>
+              <a:t/>
+            </a:r>
+          </a:p>
+          <a:p xmlns:a="http://schemas.openxmlformats.org/drawingml/2006/main">
+            <a:r>
               <a:t>[Sources]</a:t>
             </a:r>
           </a:p>
           <a:p xmlns:a="http://schemas.openxmlformats.org/drawingml/2006/main">
             <a:r>
-              <a:t>- Supplied source presentation: 05-tools-mcp.pdf</a:t>
+              <a:t>- Original source presentation: 05-tools-mcp.pdf</a:t>
+            </a:r>
+          </a:p>
+          <a:p xmlns:a="http://schemas.openxmlformats.org/drawingml/2006/main">
+            <a:r>
+              <a:t>- S1: Gemini function calling. Google documentation, accessed, 2026-09-09. https://ai.google.dev/gemini-api/docs/function-calling Check model support and preserve complete model content when returning function responses.</a:t>
+            </a:r>
+          </a:p>
+          <a:p xmlns:a="http://schemas.openxmlformats.org/drawingml/2006/main">
+            <a:r>
+              <a:t>- S2: OpenAI Agents SDK model integration. SDK documentation, accessed, 2026-09-09. https://openai.github.io/openai-agents-python/models/ The course uses local tools with a Gemini Chat Completions compatibility endpoint.</a:t>
+            </a:r>
+          </a:p>
+          <a:p xmlns:a="http://schemas.openxmlformats.org/drawingml/2006/main">
+            <a:r>
+              <a:t>- S5: MCP roots specification 2025-11-25. Versioned protocol specification, 2025-11-25. https://modelcontextprotocol.io/specification/2025-11-25/client/roots The course uses this historical protocol baseline. Implementations enforce access controls.</a:t>
+            </a:r>
+          </a:p>
+          <a:p xmlns:a="http://schemas.openxmlformats.org/drawingml/2006/main">
+            <a:r>
+              <a:t/>
+            </a:r>
+          </a:p>
+          <a:p xmlns:a="http://schemas.openxmlformats.org/drawingml/2006/main">
+            <a:r>
+              <a:t>[Assessed practice]</a:t>
+            </a:r>
+          </a:p>
+          <a:p xmlns:a="http://schemas.openxmlformats.org/drawingml/2006/main">
+            <a:r>
+              <a:t>Complete Lab 5's dispatch policy. For the MCP 2025-11-25 baseline, explain why a roots response cannot substitute for filesystem access controls.</a:t>
+            </a:r>
+          </a:p>
+          <a:p xmlns:a="http://schemas.openxmlformats.org/drawingml/2006/main">
+            <a:r>
+              <a:t>Acceptance: Reject booleans in numeric fields, nonfinite values, and oversized input. Name the component that enforces each permission.</a:t>
+            </a:r>
+          </a:p>
+          <a:p xmlns:a="http://schemas.openxmlformats.org/drawingml/2006/main">
+            <a:r>
+              <a:t>Lab: labs/05_gemini_bounded_tools.ipynb</a:t>
             </a:r>
           </a:p>
         </p:txBody>
@@ -801,12 +1273,62 @@
           </a:p>
           <a:p xmlns:a="http://schemas.openxmlformats.org/drawingml/2006/main">
             <a:r>
+              <a:t>Edition: 2026-09-09</a:t>
+            </a:r>
+          </a:p>
+          <a:p xmlns:a="http://schemas.openxmlformats.org/drawingml/2006/main">
+            <a:r>
+              <a:t/>
+            </a:r>
+          </a:p>
+          <a:p xmlns:a="http://schemas.openxmlformats.org/drawingml/2006/main">
+            <a:r>
               <a:t>[Sources]</a:t>
             </a:r>
           </a:p>
           <a:p xmlns:a="http://schemas.openxmlformats.org/drawingml/2006/main">
             <a:r>
-              <a:t>- Supplied source presentation: 05-tools-mcp.pdf</a:t>
+              <a:t>- Original source presentation: 05-tools-mcp.pdf</a:t>
+            </a:r>
+          </a:p>
+          <a:p xmlns:a="http://schemas.openxmlformats.org/drawingml/2006/main">
+            <a:r>
+              <a:t>- S1: Gemini function calling. Google documentation, accessed, 2026-09-09. https://ai.google.dev/gemini-api/docs/function-calling Check model support and preserve complete model content when returning function responses.</a:t>
+            </a:r>
+          </a:p>
+          <a:p xmlns:a="http://schemas.openxmlformats.org/drawingml/2006/main">
+            <a:r>
+              <a:t>- S2: OpenAI Agents SDK model integration. SDK documentation, accessed, 2026-09-09. https://openai.github.io/openai-agents-python/models/ The course uses local tools with a Gemini Chat Completions compatibility endpoint.</a:t>
+            </a:r>
+          </a:p>
+          <a:p xmlns:a="http://schemas.openxmlformats.org/drawingml/2006/main">
+            <a:r>
+              <a:t>- S5: MCP roots specification 2025-11-25. Versioned protocol specification, 2025-11-25. https://modelcontextprotocol.io/specification/2025-11-25/client/roots The course uses this historical protocol baseline. Implementations enforce access controls.</a:t>
+            </a:r>
+          </a:p>
+          <a:p xmlns:a="http://schemas.openxmlformats.org/drawingml/2006/main">
+            <a:r>
+              <a:t/>
+            </a:r>
+          </a:p>
+          <a:p xmlns:a="http://schemas.openxmlformats.org/drawingml/2006/main">
+            <a:r>
+              <a:t>[Assessed practice]</a:t>
+            </a:r>
+          </a:p>
+          <a:p xmlns:a="http://schemas.openxmlformats.org/drawingml/2006/main">
+            <a:r>
+              <a:t>Complete Lab 5's dispatch policy. For the MCP 2025-11-25 baseline, explain why a roots response cannot substitute for filesystem access controls.</a:t>
+            </a:r>
+          </a:p>
+          <a:p xmlns:a="http://schemas.openxmlformats.org/drawingml/2006/main">
+            <a:r>
+              <a:t>Acceptance: Reject booleans in numeric fields, nonfinite values, and oversized input. Name the component that enforces each permission.</a:t>
+            </a:r>
+          </a:p>
+          <a:p xmlns:a="http://schemas.openxmlformats.org/drawingml/2006/main">
+            <a:r>
+              <a:t>Lab: labs/05_gemini_bounded_tools.ipynb</a:t>
             </a:r>
           </a:p>
         </p:txBody>
@@ -886,12 +1408,62 @@
           </a:p>
           <a:p xmlns:a="http://schemas.openxmlformats.org/drawingml/2006/main">
             <a:r>
+              <a:t>Edition: 2026-09-09</a:t>
+            </a:r>
+          </a:p>
+          <a:p xmlns:a="http://schemas.openxmlformats.org/drawingml/2006/main">
+            <a:r>
+              <a:t/>
+            </a:r>
+          </a:p>
+          <a:p xmlns:a="http://schemas.openxmlformats.org/drawingml/2006/main">
+            <a:r>
               <a:t>[Sources]</a:t>
             </a:r>
           </a:p>
           <a:p xmlns:a="http://schemas.openxmlformats.org/drawingml/2006/main">
             <a:r>
-              <a:t>- Supplied source presentation: 05-tools-mcp.pdf</a:t>
+              <a:t>- Original source presentation: 05-tools-mcp.pdf</a:t>
+            </a:r>
+          </a:p>
+          <a:p xmlns:a="http://schemas.openxmlformats.org/drawingml/2006/main">
+            <a:r>
+              <a:t>- S1: Gemini function calling. Google documentation, accessed, 2026-09-09. https://ai.google.dev/gemini-api/docs/function-calling Check model support and preserve complete model content when returning function responses.</a:t>
+            </a:r>
+          </a:p>
+          <a:p xmlns:a="http://schemas.openxmlformats.org/drawingml/2006/main">
+            <a:r>
+              <a:t>- S2: OpenAI Agents SDK model integration. SDK documentation, accessed, 2026-09-09. https://openai.github.io/openai-agents-python/models/ The course uses local tools with a Gemini Chat Completions compatibility endpoint.</a:t>
+            </a:r>
+          </a:p>
+          <a:p xmlns:a="http://schemas.openxmlformats.org/drawingml/2006/main">
+            <a:r>
+              <a:t>- S5: MCP roots specification 2025-11-25. Versioned protocol specification, 2025-11-25. https://modelcontextprotocol.io/specification/2025-11-25/client/roots The course uses this historical protocol baseline. Implementations enforce access controls.</a:t>
+            </a:r>
+          </a:p>
+          <a:p xmlns:a="http://schemas.openxmlformats.org/drawingml/2006/main">
+            <a:r>
+              <a:t/>
+            </a:r>
+          </a:p>
+          <a:p xmlns:a="http://schemas.openxmlformats.org/drawingml/2006/main">
+            <a:r>
+              <a:t>[Assessed practice]</a:t>
+            </a:r>
+          </a:p>
+          <a:p xmlns:a="http://schemas.openxmlformats.org/drawingml/2006/main">
+            <a:r>
+              <a:t>Complete Lab 5's dispatch policy. For the MCP 2025-11-25 baseline, explain why a roots response cannot substitute for filesystem access controls.</a:t>
+            </a:r>
+          </a:p>
+          <a:p xmlns:a="http://schemas.openxmlformats.org/drawingml/2006/main">
+            <a:r>
+              <a:t>Acceptance: Reject booleans in numeric fields, nonfinite values, and oversized input. Name the component that enforces each permission.</a:t>
+            </a:r>
+          </a:p>
+          <a:p xmlns:a="http://schemas.openxmlformats.org/drawingml/2006/main">
+            <a:r>
+              <a:t>Lab: labs/05_gemini_bounded_tools.ipynb</a:t>
             </a:r>
           </a:p>
         </p:txBody>
@@ -971,12 +1543,62 @@
           </a:p>
           <a:p xmlns:a="http://schemas.openxmlformats.org/drawingml/2006/main">
             <a:r>
+              <a:t>Edition: 2026-09-09</a:t>
+            </a:r>
+          </a:p>
+          <a:p xmlns:a="http://schemas.openxmlformats.org/drawingml/2006/main">
+            <a:r>
+              <a:t/>
+            </a:r>
+          </a:p>
+          <a:p xmlns:a="http://schemas.openxmlformats.org/drawingml/2006/main">
+            <a:r>
               <a:t>[Sources]</a:t>
             </a:r>
           </a:p>
           <a:p xmlns:a="http://schemas.openxmlformats.org/drawingml/2006/main">
             <a:r>
-              <a:t>- Supplied source presentation: 05-tools-mcp.pdf</a:t>
+              <a:t>- Original source presentation: 05-tools-mcp.pdf</a:t>
+            </a:r>
+          </a:p>
+          <a:p xmlns:a="http://schemas.openxmlformats.org/drawingml/2006/main">
+            <a:r>
+              <a:t>- S1: Gemini function calling. Google documentation, accessed, 2026-09-09. https://ai.google.dev/gemini-api/docs/function-calling Check model support and preserve complete model content when returning function responses.</a:t>
+            </a:r>
+          </a:p>
+          <a:p xmlns:a="http://schemas.openxmlformats.org/drawingml/2006/main">
+            <a:r>
+              <a:t>- S2: OpenAI Agents SDK model integration. SDK documentation, accessed, 2026-09-09. https://openai.github.io/openai-agents-python/models/ The course uses local tools with a Gemini Chat Completions compatibility endpoint.</a:t>
+            </a:r>
+          </a:p>
+          <a:p xmlns:a="http://schemas.openxmlformats.org/drawingml/2006/main">
+            <a:r>
+              <a:t>- S5: MCP roots specification 2025-11-25. Versioned protocol specification, 2025-11-25. https://modelcontextprotocol.io/specification/2025-11-25/client/roots The course uses this historical protocol baseline. Implementations enforce access controls.</a:t>
+            </a:r>
+          </a:p>
+          <a:p xmlns:a="http://schemas.openxmlformats.org/drawingml/2006/main">
+            <a:r>
+              <a:t/>
+            </a:r>
+          </a:p>
+          <a:p xmlns:a="http://schemas.openxmlformats.org/drawingml/2006/main">
+            <a:r>
+              <a:t>[Assessed practice]</a:t>
+            </a:r>
+          </a:p>
+          <a:p xmlns:a="http://schemas.openxmlformats.org/drawingml/2006/main">
+            <a:r>
+              <a:t>Complete Lab 5's dispatch policy. For the MCP 2025-11-25 baseline, explain why a roots response cannot substitute for filesystem access controls.</a:t>
+            </a:r>
+          </a:p>
+          <a:p xmlns:a="http://schemas.openxmlformats.org/drawingml/2006/main">
+            <a:r>
+              <a:t>Acceptance: Reject booleans in numeric fields, nonfinite values, and oversized input. Name the component that enforces each permission.</a:t>
+            </a:r>
+          </a:p>
+          <a:p xmlns:a="http://schemas.openxmlformats.org/drawingml/2006/main">
+            <a:r>
+              <a:t>Lab: labs/05_gemini_bounded_tools.ipynb</a:t>
             </a:r>
           </a:p>
         </p:txBody>
@@ -1056,12 +1678,62 @@
           </a:p>
           <a:p xmlns:a="http://schemas.openxmlformats.org/drawingml/2006/main">
             <a:r>
+              <a:t>Edition: 2026-09-09</a:t>
+            </a:r>
+          </a:p>
+          <a:p xmlns:a="http://schemas.openxmlformats.org/drawingml/2006/main">
+            <a:r>
+              <a:t/>
+            </a:r>
+          </a:p>
+          <a:p xmlns:a="http://schemas.openxmlformats.org/drawingml/2006/main">
+            <a:r>
               <a:t>[Sources]</a:t>
             </a:r>
           </a:p>
           <a:p xmlns:a="http://schemas.openxmlformats.org/drawingml/2006/main">
             <a:r>
-              <a:t>- Supplied source presentation: 05-tools-mcp.pdf</a:t>
+              <a:t>- Original source presentation: 05-tools-mcp.pdf</a:t>
+            </a:r>
+          </a:p>
+          <a:p xmlns:a="http://schemas.openxmlformats.org/drawingml/2006/main">
+            <a:r>
+              <a:t>- S1: Gemini function calling. Google documentation, accessed, 2026-09-09. https://ai.google.dev/gemini-api/docs/function-calling Check model support and preserve complete model content when returning function responses.</a:t>
+            </a:r>
+          </a:p>
+          <a:p xmlns:a="http://schemas.openxmlformats.org/drawingml/2006/main">
+            <a:r>
+              <a:t>- S2: OpenAI Agents SDK model integration. SDK documentation, accessed, 2026-09-09. https://openai.github.io/openai-agents-python/models/ The course uses local tools with a Gemini Chat Completions compatibility endpoint.</a:t>
+            </a:r>
+          </a:p>
+          <a:p xmlns:a="http://schemas.openxmlformats.org/drawingml/2006/main">
+            <a:r>
+              <a:t>- S5: MCP roots specification 2025-11-25. Versioned protocol specification, 2025-11-25. https://modelcontextprotocol.io/specification/2025-11-25/client/roots The course uses this historical protocol baseline. Implementations enforce access controls.</a:t>
+            </a:r>
+          </a:p>
+          <a:p xmlns:a="http://schemas.openxmlformats.org/drawingml/2006/main">
+            <a:r>
+              <a:t/>
+            </a:r>
+          </a:p>
+          <a:p xmlns:a="http://schemas.openxmlformats.org/drawingml/2006/main">
+            <a:r>
+              <a:t>[Assessed practice]</a:t>
+            </a:r>
+          </a:p>
+          <a:p xmlns:a="http://schemas.openxmlformats.org/drawingml/2006/main">
+            <a:r>
+              <a:t>Complete Lab 5's dispatch policy. For the MCP 2025-11-25 baseline, explain why a roots response cannot substitute for filesystem access controls.</a:t>
+            </a:r>
+          </a:p>
+          <a:p xmlns:a="http://schemas.openxmlformats.org/drawingml/2006/main">
+            <a:r>
+              <a:t>Acceptance: Reject booleans in numeric fields, nonfinite values, and oversized input. Name the component that enforces each permission.</a:t>
+            </a:r>
+          </a:p>
+          <a:p xmlns:a="http://schemas.openxmlformats.org/drawingml/2006/main">
+            <a:r>
+              <a:t>Lab: labs/05_gemini_bounded_tools.ipynb</a:t>
             </a:r>
           </a:p>
         </p:txBody>
@@ -1141,12 +1813,62 @@
           </a:p>
           <a:p xmlns:a="http://schemas.openxmlformats.org/drawingml/2006/main">
             <a:r>
+              <a:t>Edition: 2026-09-09</a:t>
+            </a:r>
+          </a:p>
+          <a:p xmlns:a="http://schemas.openxmlformats.org/drawingml/2006/main">
+            <a:r>
+              <a:t/>
+            </a:r>
+          </a:p>
+          <a:p xmlns:a="http://schemas.openxmlformats.org/drawingml/2006/main">
+            <a:r>
               <a:t>[Sources]</a:t>
             </a:r>
           </a:p>
           <a:p xmlns:a="http://schemas.openxmlformats.org/drawingml/2006/main">
             <a:r>
-              <a:t>- Supplied source presentation: 05-tools-mcp.pdf</a:t>
+              <a:t>- Original source presentation: 05-tools-mcp.pdf</a:t>
+            </a:r>
+          </a:p>
+          <a:p xmlns:a="http://schemas.openxmlformats.org/drawingml/2006/main">
+            <a:r>
+              <a:t>- S1: Gemini function calling. Google documentation, accessed, 2026-09-09. https://ai.google.dev/gemini-api/docs/function-calling Check model support and preserve complete model content when returning function responses.</a:t>
+            </a:r>
+          </a:p>
+          <a:p xmlns:a="http://schemas.openxmlformats.org/drawingml/2006/main">
+            <a:r>
+              <a:t>- S2: OpenAI Agents SDK model integration. SDK documentation, accessed, 2026-09-09. https://openai.github.io/openai-agents-python/models/ The course uses local tools with a Gemini Chat Completions compatibility endpoint.</a:t>
+            </a:r>
+          </a:p>
+          <a:p xmlns:a="http://schemas.openxmlformats.org/drawingml/2006/main">
+            <a:r>
+              <a:t>- S5: MCP roots specification 2025-11-25. Versioned protocol specification, 2025-11-25. https://modelcontextprotocol.io/specification/2025-11-25/client/roots The course uses this historical protocol baseline. Implementations enforce access controls.</a:t>
+            </a:r>
+          </a:p>
+          <a:p xmlns:a="http://schemas.openxmlformats.org/drawingml/2006/main">
+            <a:r>
+              <a:t/>
+            </a:r>
+          </a:p>
+          <a:p xmlns:a="http://schemas.openxmlformats.org/drawingml/2006/main">
+            <a:r>
+              <a:t>[Assessed practice]</a:t>
+            </a:r>
+          </a:p>
+          <a:p xmlns:a="http://schemas.openxmlformats.org/drawingml/2006/main">
+            <a:r>
+              <a:t>Complete Lab 5's dispatch policy. For the MCP 2025-11-25 baseline, explain why a roots response cannot substitute for filesystem access controls.</a:t>
+            </a:r>
+          </a:p>
+          <a:p xmlns:a="http://schemas.openxmlformats.org/drawingml/2006/main">
+            <a:r>
+              <a:t>Acceptance: Reject booleans in numeric fields, nonfinite values, and oversized input. Name the component that enforces each permission.</a:t>
+            </a:r>
+          </a:p>
+          <a:p xmlns:a="http://schemas.openxmlformats.org/drawingml/2006/main">
+            <a:r>
+              <a:t>Lab: labs/05_gemini_bounded_tools.ipynb</a:t>
             </a:r>
           </a:p>
         </p:txBody>
@@ -1216,7 +1938,7 @@
           <a:lstStyle xmlns:a="http://schemas.openxmlformats.org/drawingml/2006/main"/>
           <a:p xmlns:a="http://schemas.openxmlformats.org/drawingml/2006/main">
             <a:r>
-              <a:t>Use as retrieval practice. Ask for an answer that defines, compares, traces, and evaluates.</a:t>
+              <a:t>Explain the claim first, then use the numbered points as evidence and design consequences.</a:t>
             </a:r>
           </a:p>
           <a:p xmlns:a="http://schemas.openxmlformats.org/drawingml/2006/main">
@@ -1226,12 +1948,62 @@
           </a:p>
           <a:p xmlns:a="http://schemas.openxmlformats.org/drawingml/2006/main">
             <a:r>
+              <a:t>Edition: 2026-09-09</a:t>
+            </a:r>
+          </a:p>
+          <a:p xmlns:a="http://schemas.openxmlformats.org/drawingml/2006/main">
+            <a:r>
+              <a:t/>
+            </a:r>
+          </a:p>
+          <a:p xmlns:a="http://schemas.openxmlformats.org/drawingml/2006/main">
+            <a:r>
               <a:t>[Sources]</a:t>
             </a:r>
           </a:p>
           <a:p xmlns:a="http://schemas.openxmlformats.org/drawingml/2006/main">
             <a:r>
-              <a:t>- Supplied source presentation: 05-tools-mcp.pdf</a:t>
+              <a:t>- Original source presentation: 05-tools-mcp.pdf</a:t>
+            </a:r>
+          </a:p>
+          <a:p xmlns:a="http://schemas.openxmlformats.org/drawingml/2006/main">
+            <a:r>
+              <a:t>- S1: Gemini function calling. Google documentation, accessed, 2026-09-09. https://ai.google.dev/gemini-api/docs/function-calling Check model support and preserve complete model content when returning function responses.</a:t>
+            </a:r>
+          </a:p>
+          <a:p xmlns:a="http://schemas.openxmlformats.org/drawingml/2006/main">
+            <a:r>
+              <a:t>- S2: OpenAI Agents SDK model integration. SDK documentation, accessed, 2026-09-09. https://openai.github.io/openai-agents-python/models/ The course uses local tools with a Gemini Chat Completions compatibility endpoint.</a:t>
+            </a:r>
+          </a:p>
+          <a:p xmlns:a="http://schemas.openxmlformats.org/drawingml/2006/main">
+            <a:r>
+              <a:t>- S5: MCP roots specification 2025-11-25. Versioned protocol specification, 2025-11-25. https://modelcontextprotocol.io/specification/2025-11-25/client/roots The course uses this historical protocol baseline. Implementations enforce access controls.</a:t>
+            </a:r>
+          </a:p>
+          <a:p xmlns:a="http://schemas.openxmlformats.org/drawingml/2006/main">
+            <a:r>
+              <a:t/>
+            </a:r>
+          </a:p>
+          <a:p xmlns:a="http://schemas.openxmlformats.org/drawingml/2006/main">
+            <a:r>
+              <a:t>[Assessed practice]</a:t>
+            </a:r>
+          </a:p>
+          <a:p xmlns:a="http://schemas.openxmlformats.org/drawingml/2006/main">
+            <a:r>
+              <a:t>Complete Lab 5's dispatch policy. For the MCP 2025-11-25 baseline, explain why a roots response cannot substitute for filesystem access controls.</a:t>
+            </a:r>
+          </a:p>
+          <a:p xmlns:a="http://schemas.openxmlformats.org/drawingml/2006/main">
+            <a:r>
+              <a:t>Acceptance: Reject booleans in numeric fields, nonfinite values, and oversized input. Name the component that enforces each permission.</a:t>
+            </a:r>
+          </a:p>
+          <a:p xmlns:a="http://schemas.openxmlformats.org/drawingml/2006/main">
+            <a:r>
+              <a:t>Lab: labs/05_gemini_bounded_tools.ipynb</a:t>
             </a:r>
           </a:p>
         </p:txBody>
@@ -1299,7 +2071,7 @@
   </p:cSld>
   <p:clrMap bg1="lt1" tx1="dk1" bg2="lt2" tx2="dk2" accent1="accent1" accent2="accent2" accent3="accent3" accent4="accent4" accent5="accent5" accent6="accent6" hlink="hlink" folHlink="folHlink"/>
   <p:sldLayoutIdLst>
-    <p:sldLayoutId xmlns:r="http://schemas.openxmlformats.org/officeDocument/2006/relationships" id="2147483649" r:id="R24299d5a90004dfc"/>
+    <p:sldLayoutId xmlns:r="http://schemas.openxmlformats.org/officeDocument/2006/relationships" id="2147483649" r:id="Rfc407488044c4252"/>
   </p:sldLayoutIdLst>
   <p:txStyles>
     <p:titleStyle>
@@ -1850,7 +2622,7 @@
           <p:cNvPr id="8" name="title-accent">
             <a:extLst xmlns:a="http://schemas.openxmlformats.org/drawingml/2006/main">
               <a:ext uri="{FF2B5EF4-FFF2-40B4-BE49-F238E27FC236}">
-                <a16:creationId xmlns:a16="http://schemas.microsoft.com/office/drawing/2014/main" id="{D5899C54-868E-477C-BF6D-42E6B10145FE}"/>
+                <a16:creationId xmlns:a16="http://schemas.microsoft.com/office/drawing/2014/main" id="{87A3DBC9-B5AC-4421-B249-B39FC0C5283B}"/>
               </a:ext>
             </a:extLst>
           </p:cNvPr>
@@ -1883,7 +2655,7 @@
           <p:cNvPr id="2" name="course-title">
             <a:extLst xmlns:a="http://schemas.openxmlformats.org/drawingml/2006/main">
               <a:ext uri="{FF2B5EF4-FFF2-40B4-BE49-F238E27FC236}">
-                <a16:creationId xmlns:a16="http://schemas.microsoft.com/office/drawing/2014/main" id="{D92AB11D-18E8-40B0-9CFA-A5370D90C05E}"/>
+                <a16:creationId xmlns:a16="http://schemas.microsoft.com/office/drawing/2014/main" id="{7ABEC646-6430-49C0-A53D-1886931D0A97}"/>
               </a:ext>
             </a:extLst>
           </p:cNvPr>
@@ -1941,7 +2713,7 @@
           <p:cNvPr id="3" name="chapter-number">
             <a:extLst xmlns:a="http://schemas.openxmlformats.org/drawingml/2006/main">
               <a:ext uri="{FF2B5EF4-FFF2-40B4-BE49-F238E27FC236}">
-                <a16:creationId xmlns:a16="http://schemas.microsoft.com/office/drawing/2014/main" id="{926CC8ED-3955-4F76-8871-FAB8455C59FA}"/>
+                <a16:creationId xmlns:a16="http://schemas.microsoft.com/office/drawing/2014/main" id="{6DA22EA6-EAA6-4733-BD7C-230F0A772EA7}"/>
               </a:ext>
             </a:extLst>
           </p:cNvPr>
@@ -1999,7 +2771,7 @@
           <p:cNvPr id="4" name="deck-title">
             <a:extLst xmlns:a="http://schemas.openxmlformats.org/drawingml/2006/main">
               <a:ext uri="{FF2B5EF4-FFF2-40B4-BE49-F238E27FC236}">
-                <a16:creationId xmlns:a16="http://schemas.microsoft.com/office/drawing/2014/main" id="{C51F5D94-C31E-4888-9617-86D504FBDBDA}"/>
+                <a16:creationId xmlns:a16="http://schemas.microsoft.com/office/drawing/2014/main" id="{1717A8A7-C307-45D1-B829-CC19174E9E17}"/>
               </a:ext>
             </a:extLst>
           </p:cNvPr>
@@ -2057,7 +2829,7 @@
           <p:cNvPr id="5" name="deck-thesis">
             <a:extLst xmlns:a="http://schemas.openxmlformats.org/drawingml/2006/main">
               <a:ext uri="{FF2B5EF4-FFF2-40B4-BE49-F238E27FC236}">
-                <a16:creationId xmlns:a16="http://schemas.microsoft.com/office/drawing/2014/main" id="{18DCB1C6-390F-47B0-BFA6-1767A80D34B9}"/>
+                <a16:creationId xmlns:a16="http://schemas.microsoft.com/office/drawing/2014/main" id="{36E3B49B-4019-45B6-876E-CC3C8F551EBE}"/>
               </a:ext>
             </a:extLst>
           </p:cNvPr>
@@ -2115,7 +2887,7 @@
           <p:cNvPr id="6" name="title-marker">
             <a:extLst xmlns:a="http://schemas.openxmlformats.org/drawingml/2006/main">
               <a:ext uri="{FF2B5EF4-FFF2-40B4-BE49-F238E27FC236}">
-                <a16:creationId xmlns:a16="http://schemas.microsoft.com/office/drawing/2014/main" id="{7752AB6A-33ED-4AED-B2D9-2262DEB2D442}"/>
+                <a16:creationId xmlns:a16="http://schemas.microsoft.com/office/drawing/2014/main" id="{59374889-1ADE-4BED-936B-F96483754E5A}"/>
               </a:ext>
             </a:extLst>
           </p:cNvPr>
@@ -2148,7 +2920,7 @@
           <p:cNvPr id="7" name="title-marker-text">
             <a:extLst xmlns:a="http://schemas.openxmlformats.org/drawingml/2006/main">
               <a:ext uri="{FF2B5EF4-FFF2-40B4-BE49-F238E27FC236}">
-                <a16:creationId xmlns:a16="http://schemas.microsoft.com/office/drawing/2014/main" id="{614CC649-EC0D-4934-9327-01681714ABC7}"/>
+                <a16:creationId xmlns:a16="http://schemas.microsoft.com/office/drawing/2014/main" id="{4A7E9F50-5209-4824-A53A-9E6B889FF8F5}"/>
               </a:ext>
             </a:extLst>
           </p:cNvPr>
@@ -2227,7 +2999,7 @@
     </p:spTree>
     <p:extLst>
       <p:ext uri="{BB962C8B-B14F-4D97-AF65-F5344CB8AC3E}">
-        <p14:creationId xmlns:p14="http://schemas.microsoft.com/office/powerpoint/2010/main" val="647090413"/>
+        <p14:creationId xmlns:p14="http://schemas.microsoft.com/office/powerpoint/2010/main" val="2021256353"/>
       </p:ext>
     </p:extLst>
   </p:cSld>
@@ -2235,6 +3007,996 @@
 </file>
 
 <file path=ppt/slides/slide10.xml><?xml version="1.0" encoding="utf-8"?>
+<p:sld xmlns:p="http://schemas.openxmlformats.org/presentationml/2006/main">
+  <p:cSld>
+    <p:bg>
+      <p:bgPr>
+        <a:solidFill xmlns:a="http://schemas.openxmlformats.org/drawingml/2006/main">
+          <a:srgbClr val="FFFFFF"/>
+        </a:solidFill>
+      </p:bgPr>
+    </p:bg>
+    <p:spTree>
+      <p:nvGrpSpPr>
+        <p:cNvPr id="1" name=""/>
+        <p:cNvGrpSpPr/>
+        <p:nvPr/>
+      </p:nvGrpSpPr>
+      <p:grpSpPr>
+        <a:xfrm xmlns:a="http://schemas.openxmlformats.org/drawingml/2006/main"/>
+      </p:grpSpPr>
+      <p:sp>
+        <p:nvSpPr>
+          <p:cNvPr id="18" name="accent-line">
+            <a:extLst xmlns:a="http://schemas.openxmlformats.org/drawingml/2006/main">
+              <a:ext uri="{FF2B5EF4-FFF2-40B4-BE49-F238E27FC236}">
+                <a16:creationId xmlns:a16="http://schemas.microsoft.com/office/drawing/2014/main" id="{11544139-8FE8-4296-B05B-827C142AFB4F}"/>
+              </a:ext>
+            </a:extLst>
+          </p:cNvPr>
+          <p:cNvSpPr>
+            <a:spLocks xmlns:a="http://schemas.openxmlformats.org/drawingml/2006/main" noGrp="1"/>
+          </p:cNvSpPr>
+          <p:nvPr/>
+        </p:nvSpPr>
+        <p:spPr>
+          <a:xfrm xmlns:a="http://schemas.openxmlformats.org/drawingml/2006/main">
+            <a:off x="390525" y="304800"/>
+            <a:ext cx="11410950" cy="66675"/>
+          </a:xfrm>
+          <a:prstGeom xmlns:a="http://schemas.openxmlformats.org/drawingml/2006/main" prst="rect">
+            <a:avLst/>
+          </a:prstGeom>
+          <a:solidFill xmlns:a="http://schemas.openxmlformats.org/drawingml/2006/main">
+            <a:srgbClr val="73C8FF"/>
+          </a:solidFill>
+          <a:ln xmlns:a="http://schemas.openxmlformats.org/drawingml/2006/main" w="0">
+            <a:solidFill>
+              <a:srgbClr val="73C8FF"/>
+            </a:solidFill>
+            <a:prstDash val="solid"/>
+          </a:ln>
+        </p:spPr>
+      </p:sp>
+      <p:sp>
+        <p:nvSpPr>
+          <p:cNvPr id="2" name="chapter-label">
+            <a:extLst xmlns:a="http://schemas.openxmlformats.org/drawingml/2006/main">
+              <a:ext uri="{FF2B5EF4-FFF2-40B4-BE49-F238E27FC236}">
+                <a16:creationId xmlns:a16="http://schemas.microsoft.com/office/drawing/2014/main" id="{F6FB56DE-21DF-4A6B-A14B-89654B0FC5CA}"/>
+              </a:ext>
+            </a:extLst>
+          </p:cNvPr>
+          <p:cNvSpPr>
+            <a:spLocks xmlns:a="http://schemas.openxmlformats.org/drawingml/2006/main" noGrp="1"/>
+          </p:cNvSpPr>
+          <p:nvPr/>
+        </p:nvSpPr>
+        <p:spPr>
+          <a:xfrm xmlns:a="http://schemas.openxmlformats.org/drawingml/2006/main">
+            <a:off x="390525" y="466725"/>
+            <a:ext cx="4953000" cy="323850"/>
+          </a:xfrm>
+          <a:prstGeom xmlns:a="http://schemas.openxmlformats.org/drawingml/2006/main" prst="rect">
+            <a:avLst/>
+          </a:prstGeom>
+          <a:noFill xmlns:a="http://schemas.openxmlformats.org/drawingml/2006/main"/>
+          <a:ln xmlns:a="http://schemas.openxmlformats.org/drawingml/2006/main" w="0">
+            <a:noFill/>
+            <a:prstDash val="solid"/>
+          </a:ln>
+        </p:spPr>
+        <p:txBody>
+          <a:bodyPr xmlns:a="http://schemas.openxmlformats.org/drawingml/2006/main" anchor="t">
+            <a:noAutofit/>
+          </a:bodyPr>
+          <a:lstStyle xmlns:a="http://schemas.openxmlformats.org/drawingml/2006/main"/>
+          <a:p xmlns:a="http://schemas.openxmlformats.org/drawingml/2006/main">
+            <a:pPr algn="l">
+              <a:defRPr sz="1275" b="1">
+                <a:solidFill>
+                  <a:srgbClr val="5B5B57"/>
+                </a:solidFill>
+                <a:latin typeface="Helvetica Neue"/>
+                <a:ea typeface="Helvetica Neue"/>
+                <a:cs typeface="Helvetica Neue"/>
+              </a:defRPr>
+            </a:pPr>
+            <a:r>
+              <a:rPr sz="1275" b="1">
+                <a:solidFill>
+                  <a:srgbClr val="5B5B57"/>
+                </a:solidFill>
+                <a:latin typeface="Helvetica Neue"/>
+                <a:ea typeface="Helvetica Neue"/>
+                <a:cs typeface="Helvetica Neue"/>
+              </a:rPr>
+              <a:t>EXAM CHECK  /  05</a:t>
+            </a:r>
+          </a:p>
+        </p:txBody>
+      </p:sp>
+      <p:sp>
+        <p:nvSpPr>
+          <p:cNvPr id="3" name="slide-number">
+            <a:extLst xmlns:a="http://schemas.openxmlformats.org/drawingml/2006/main">
+              <a:ext uri="{FF2B5EF4-FFF2-40B4-BE49-F238E27FC236}">
+                <a16:creationId xmlns:a16="http://schemas.microsoft.com/office/drawing/2014/main" id="{D78AB776-DCA9-450D-8048-C4D8886586A8}"/>
+              </a:ext>
+            </a:extLst>
+          </p:cNvPr>
+          <p:cNvSpPr>
+            <a:spLocks xmlns:a="http://schemas.openxmlformats.org/drawingml/2006/main" noGrp="1"/>
+          </p:cNvSpPr>
+          <p:nvPr/>
+        </p:nvSpPr>
+        <p:spPr>
+          <a:xfrm xmlns:a="http://schemas.openxmlformats.org/drawingml/2006/main">
+            <a:off x="11049000" y="6286500"/>
+            <a:ext cx="742950" cy="266700"/>
+          </a:xfrm>
+          <a:prstGeom xmlns:a="http://schemas.openxmlformats.org/drawingml/2006/main" prst="rect">
+            <a:avLst/>
+          </a:prstGeom>
+          <a:noFill xmlns:a="http://schemas.openxmlformats.org/drawingml/2006/main"/>
+          <a:ln xmlns:a="http://schemas.openxmlformats.org/drawingml/2006/main" w="0">
+            <a:noFill/>
+            <a:prstDash val="solid"/>
+          </a:ln>
+        </p:spPr>
+        <p:txBody>
+          <a:bodyPr xmlns:a="http://schemas.openxmlformats.org/drawingml/2006/main" anchor="t">
+            <a:noAutofit/>
+          </a:bodyPr>
+          <a:lstStyle xmlns:a="http://schemas.openxmlformats.org/drawingml/2006/main"/>
+          <a:p xmlns:a="http://schemas.openxmlformats.org/drawingml/2006/main">
+            <a:pPr algn="r">
+              <a:defRPr sz="1200" b="0">
+                <a:solidFill>
+                  <a:srgbClr val="5B5B57"/>
+                </a:solidFill>
+                <a:latin typeface="Helvetica Neue"/>
+                <a:ea typeface="Helvetica Neue"/>
+                <a:cs typeface="Helvetica Neue"/>
+              </a:defRPr>
+            </a:pPr>
+            <a:r>
+              <a:rPr sz="1200" b="0">
+                <a:solidFill>
+                  <a:srgbClr val="5B5B57"/>
+                </a:solidFill>
+                <a:latin typeface="Helvetica Neue"/>
+                <a:ea typeface="Helvetica Neue"/>
+                <a:cs typeface="Helvetica Neue"/>
+              </a:rPr>
+              <a:t>10</a:t>
+            </a:r>
+          </a:p>
+        </p:txBody>
+      </p:sp>
+      <p:sp>
+        <p:nvSpPr>
+          <p:cNvPr id="4" name="chapter-footer">
+            <a:extLst xmlns:a="http://schemas.openxmlformats.org/drawingml/2006/main">
+              <a:ext uri="{FF2B5EF4-FFF2-40B4-BE49-F238E27FC236}">
+                <a16:creationId xmlns:a16="http://schemas.microsoft.com/office/drawing/2014/main" id="{1988831E-6869-4D6E-B6B5-DD4BCBDA50E3}"/>
+              </a:ext>
+            </a:extLst>
+          </p:cNvPr>
+          <p:cNvSpPr>
+            <a:spLocks xmlns:a="http://schemas.openxmlformats.org/drawingml/2006/main" noGrp="1"/>
+          </p:cNvSpPr>
+          <p:nvPr/>
+        </p:nvSpPr>
+        <p:spPr>
+          <a:xfrm xmlns:a="http://schemas.openxmlformats.org/drawingml/2006/main">
+            <a:off x="390525" y="6286500"/>
+            <a:ext cx="8191500" cy="266700"/>
+          </a:xfrm>
+          <a:prstGeom xmlns:a="http://schemas.openxmlformats.org/drawingml/2006/main" prst="rect">
+            <a:avLst/>
+          </a:prstGeom>
+          <a:noFill xmlns:a="http://schemas.openxmlformats.org/drawingml/2006/main"/>
+          <a:ln xmlns:a="http://schemas.openxmlformats.org/drawingml/2006/main" w="0">
+            <a:noFill/>
+            <a:prstDash val="solid"/>
+          </a:ln>
+        </p:spPr>
+        <p:txBody>
+          <a:bodyPr xmlns:a="http://schemas.openxmlformats.org/drawingml/2006/main" anchor="t">
+            <a:noAutofit/>
+          </a:bodyPr>
+          <a:lstStyle xmlns:a="http://schemas.openxmlformats.org/drawingml/2006/main"/>
+          <a:p xmlns:a="http://schemas.openxmlformats.org/drawingml/2006/main">
+            <a:pPr algn="l">
+              <a:defRPr sz="1125" b="0">
+                <a:solidFill>
+                  <a:srgbClr val="5B5B57"/>
+                </a:solidFill>
+                <a:latin typeface="Helvetica Neue"/>
+                <a:ea typeface="Helvetica Neue"/>
+                <a:cs typeface="Helvetica Neue"/>
+              </a:defRPr>
+            </a:pPr>
+            <a:r>
+              <a:rPr sz="1125" b="0">
+                <a:solidFill>
+                  <a:srgbClr val="5B5B57"/>
+                </a:solidFill>
+                <a:latin typeface="Helvetica Neue"/>
+                <a:ea typeface="Helvetica Neue"/>
+                <a:cs typeface="Helvetica Neue"/>
+              </a:rPr>
+              <a:t>Tool Use, MCP, and Frameworks</a:t>
+            </a:r>
+          </a:p>
+        </p:txBody>
+      </p:sp>
+      <p:sp>
+        <p:nvSpPr>
+          <p:cNvPr id="5" name="exam-title">
+            <a:extLst xmlns:a="http://schemas.openxmlformats.org/drawingml/2006/main">
+              <a:ext uri="{FF2B5EF4-FFF2-40B4-BE49-F238E27FC236}">
+                <a16:creationId xmlns:a16="http://schemas.microsoft.com/office/drawing/2014/main" id="{4360355A-5FC7-4F63-8D81-890C57241496}"/>
+              </a:ext>
+            </a:extLst>
+          </p:cNvPr>
+          <p:cNvSpPr>
+            <a:spLocks xmlns:a="http://schemas.openxmlformats.org/drawingml/2006/main" noGrp="1"/>
+          </p:cNvSpPr>
+          <p:nvPr/>
+        </p:nvSpPr>
+        <p:spPr>
+          <a:xfrm xmlns:a="http://schemas.openxmlformats.org/drawingml/2006/main">
+            <a:off x="390525" y="981075"/>
+            <a:ext cx="10668000" cy="781050"/>
+          </a:xfrm>
+          <a:prstGeom xmlns:a="http://schemas.openxmlformats.org/drawingml/2006/main" prst="rect">
+            <a:avLst/>
+          </a:prstGeom>
+          <a:noFill xmlns:a="http://schemas.openxmlformats.org/drawingml/2006/main"/>
+          <a:ln xmlns:a="http://schemas.openxmlformats.org/drawingml/2006/main" w="0">
+            <a:noFill/>
+            <a:prstDash val="solid"/>
+          </a:ln>
+        </p:spPr>
+        <p:txBody>
+          <a:bodyPr xmlns:a="http://schemas.openxmlformats.org/drawingml/2006/main" anchor="t">
+            <a:noAutofit/>
+          </a:bodyPr>
+          <a:lstStyle xmlns:a="http://schemas.openxmlformats.org/drawingml/2006/main"/>
+          <a:p xmlns:a="http://schemas.openxmlformats.org/drawingml/2006/main">
+            <a:pPr algn="l">
+              <a:defRPr sz="3150" b="1">
+                <a:solidFill>
+                  <a:srgbClr val="111111"/>
+                </a:solidFill>
+                <a:latin typeface="Helvetica Neue"/>
+                <a:ea typeface="Helvetica Neue"/>
+                <a:cs typeface="Helvetica Neue"/>
+              </a:defRPr>
+            </a:pPr>
+            <a:r>
+              <a:rPr sz="3150" b="1">
+                <a:solidFill>
+                  <a:srgbClr val="111111"/>
+                </a:solidFill>
+                <a:latin typeface="Helvetica Neue"/>
+                <a:ea typeface="Helvetica Neue"/>
+                <a:cs typeface="Helvetica Neue"/>
+              </a:rPr>
+              <a:t>Can you answer these without notes?</a:t>
+            </a:r>
+          </a:p>
+        </p:txBody>
+      </p:sp>
+      <p:sp>
+        <p:nvSpPr>
+          <p:cNvPr id="6" name="exam-number-1">
+            <a:extLst xmlns:a="http://schemas.openxmlformats.org/drawingml/2006/main">
+              <a:ext uri="{FF2B5EF4-FFF2-40B4-BE49-F238E27FC236}">
+                <a16:creationId xmlns:a16="http://schemas.microsoft.com/office/drawing/2014/main" id="{EA10770C-F7D0-4AE1-AEC0-6A6A5539B33A}"/>
+              </a:ext>
+            </a:extLst>
+          </p:cNvPr>
+          <p:cNvSpPr>
+            <a:spLocks xmlns:a="http://schemas.openxmlformats.org/drawingml/2006/main" noGrp="1"/>
+          </p:cNvSpPr>
+          <p:nvPr/>
+        </p:nvSpPr>
+        <p:spPr>
+          <a:xfrm xmlns:a="http://schemas.openxmlformats.org/drawingml/2006/main">
+            <a:off x="390525" y="2238375"/>
+            <a:ext cx="590550" cy="400050"/>
+          </a:xfrm>
+          <a:prstGeom xmlns:a="http://schemas.openxmlformats.org/drawingml/2006/main" prst="rect">
+            <a:avLst/>
+          </a:prstGeom>
+          <a:noFill xmlns:a="http://schemas.openxmlformats.org/drawingml/2006/main"/>
+          <a:ln xmlns:a="http://schemas.openxmlformats.org/drawingml/2006/main" w="0">
+            <a:noFill/>
+            <a:prstDash val="solid"/>
+          </a:ln>
+        </p:spPr>
+        <p:txBody>
+          <a:bodyPr xmlns:a="http://schemas.openxmlformats.org/drawingml/2006/main" anchor="t">
+            <a:noAutofit/>
+          </a:bodyPr>
+          <a:lstStyle xmlns:a="http://schemas.openxmlformats.org/drawingml/2006/main"/>
+          <a:p xmlns:a="http://schemas.openxmlformats.org/drawingml/2006/main">
+            <a:pPr algn="l">
+              <a:defRPr sz="1725" b="1">
+                <a:solidFill>
+                  <a:srgbClr val="73C8FF"/>
+                </a:solidFill>
+                <a:latin typeface="Helvetica Neue"/>
+                <a:ea typeface="Helvetica Neue"/>
+                <a:cs typeface="Helvetica Neue"/>
+              </a:defRPr>
+            </a:pPr>
+            <a:r>
+              <a:rPr sz="1725" b="1">
+                <a:solidFill>
+                  <a:srgbClr val="73C8FF"/>
+                </a:solidFill>
+                <a:latin typeface="Helvetica Neue"/>
+                <a:ea typeface="Helvetica Neue"/>
+                <a:cs typeface="Helvetica Neue"/>
+              </a:rPr>
+              <a:t>01</a:t>
+            </a:r>
+          </a:p>
+        </p:txBody>
+      </p:sp>
+      <p:sp>
+        <p:nvSpPr>
+          <p:cNvPr id="7" name="exam-question-1">
+            <a:extLst xmlns:a="http://schemas.openxmlformats.org/drawingml/2006/main">
+              <a:ext uri="{FF2B5EF4-FFF2-40B4-BE49-F238E27FC236}">
+                <a16:creationId xmlns:a16="http://schemas.microsoft.com/office/drawing/2014/main" id="{61DEF1F8-1F60-4914-88BA-1BD40A11BD41}"/>
+              </a:ext>
+            </a:extLst>
+          </p:cNvPr>
+          <p:cNvSpPr>
+            <a:spLocks xmlns:a="http://schemas.openxmlformats.org/drawingml/2006/main" noGrp="1"/>
+          </p:cNvSpPr>
+          <p:nvPr/>
+        </p:nvSpPr>
+        <p:spPr>
+          <a:xfrm xmlns:a="http://schemas.openxmlformats.org/drawingml/2006/main">
+            <a:off x="1076325" y="2238375"/>
+            <a:ext cx="4762500" cy="895350"/>
+          </a:xfrm>
+          <a:prstGeom xmlns:a="http://schemas.openxmlformats.org/drawingml/2006/main" prst="rect">
+            <a:avLst/>
+          </a:prstGeom>
+          <a:noFill xmlns:a="http://schemas.openxmlformats.org/drawingml/2006/main"/>
+          <a:ln xmlns:a="http://schemas.openxmlformats.org/drawingml/2006/main" w="0">
+            <a:noFill/>
+            <a:prstDash val="solid"/>
+          </a:ln>
+        </p:spPr>
+        <p:txBody>
+          <a:bodyPr xmlns:a="http://schemas.openxmlformats.org/drawingml/2006/main" anchor="t">
+            <a:normAutofit fontScale="100000"/>
+          </a:bodyPr>
+          <a:lstStyle xmlns:a="http://schemas.openxmlformats.org/drawingml/2006/main"/>
+          <a:p xmlns:a="http://schemas.openxmlformats.org/drawingml/2006/main">
+            <a:pPr algn="l">
+              <a:defRPr sz="1575" b="1">
+                <a:solidFill>
+                  <a:srgbClr val="111111"/>
+                </a:solidFill>
+                <a:latin typeface="Helvetica Neue"/>
+                <a:ea typeface="Helvetica Neue"/>
+                <a:cs typeface="Helvetica Neue"/>
+              </a:defRPr>
+            </a:pPr>
+            <a:r>
+              <a:rPr sz="1575" b="1">
+                <a:solidFill>
+                  <a:srgbClr val="111111"/>
+                </a:solidFill>
+                <a:latin typeface="Helvetica Neue"/>
+                <a:ea typeface="Helvetica Neue"/>
+                <a:cs typeface="Helvetica Neue"/>
+              </a:rPr>
+              <a:t>Walk through the complete function-call cycle.</a:t>
+            </a:r>
+          </a:p>
+        </p:txBody>
+      </p:sp>
+      <p:sp>
+        <p:nvSpPr>
+          <p:cNvPr id="8" name="exam-number-2">
+            <a:extLst xmlns:a="http://schemas.openxmlformats.org/drawingml/2006/main">
+              <a:ext uri="{FF2B5EF4-FFF2-40B4-BE49-F238E27FC236}">
+                <a16:creationId xmlns:a16="http://schemas.microsoft.com/office/drawing/2014/main" id="{63AEC675-02C3-46AC-824E-D2E237FA1364}"/>
+              </a:ext>
+            </a:extLst>
+          </p:cNvPr>
+          <p:cNvSpPr>
+            <a:spLocks xmlns:a="http://schemas.openxmlformats.org/drawingml/2006/main" noGrp="1"/>
+          </p:cNvSpPr>
+          <p:nvPr/>
+        </p:nvSpPr>
+        <p:spPr>
+          <a:xfrm xmlns:a="http://schemas.openxmlformats.org/drawingml/2006/main">
+            <a:off x="6191250" y="2238375"/>
+            <a:ext cx="590550" cy="400050"/>
+          </a:xfrm>
+          <a:prstGeom xmlns:a="http://schemas.openxmlformats.org/drawingml/2006/main" prst="rect">
+            <a:avLst/>
+          </a:prstGeom>
+          <a:noFill xmlns:a="http://schemas.openxmlformats.org/drawingml/2006/main"/>
+          <a:ln xmlns:a="http://schemas.openxmlformats.org/drawingml/2006/main" w="0">
+            <a:noFill/>
+            <a:prstDash val="solid"/>
+          </a:ln>
+        </p:spPr>
+        <p:txBody>
+          <a:bodyPr xmlns:a="http://schemas.openxmlformats.org/drawingml/2006/main" anchor="t">
+            <a:noAutofit/>
+          </a:bodyPr>
+          <a:lstStyle xmlns:a="http://schemas.openxmlformats.org/drawingml/2006/main"/>
+          <a:p xmlns:a="http://schemas.openxmlformats.org/drawingml/2006/main">
+            <a:pPr algn="l">
+              <a:defRPr sz="1725" b="1">
+                <a:solidFill>
+                  <a:srgbClr val="73C8FF"/>
+                </a:solidFill>
+                <a:latin typeface="Helvetica Neue"/>
+                <a:ea typeface="Helvetica Neue"/>
+                <a:cs typeface="Helvetica Neue"/>
+              </a:defRPr>
+            </a:pPr>
+            <a:r>
+              <a:rPr sz="1725" b="1">
+                <a:solidFill>
+                  <a:srgbClr val="73C8FF"/>
+                </a:solidFill>
+                <a:latin typeface="Helvetica Neue"/>
+                <a:ea typeface="Helvetica Neue"/>
+                <a:cs typeface="Helvetica Neue"/>
+              </a:rPr>
+              <a:t>02</a:t>
+            </a:r>
+          </a:p>
+        </p:txBody>
+      </p:sp>
+      <p:sp>
+        <p:nvSpPr>
+          <p:cNvPr id="9" name="exam-question-2">
+            <a:extLst xmlns:a="http://schemas.openxmlformats.org/drawingml/2006/main">
+              <a:ext uri="{FF2B5EF4-FFF2-40B4-BE49-F238E27FC236}">
+                <a16:creationId xmlns:a16="http://schemas.microsoft.com/office/drawing/2014/main" id="{9ED29A33-EB11-4522-8189-AC0542B9CDCE}"/>
+              </a:ext>
+            </a:extLst>
+          </p:cNvPr>
+          <p:cNvSpPr>
+            <a:spLocks xmlns:a="http://schemas.openxmlformats.org/drawingml/2006/main" noGrp="1"/>
+          </p:cNvSpPr>
+          <p:nvPr/>
+        </p:nvSpPr>
+        <p:spPr>
+          <a:xfrm xmlns:a="http://schemas.openxmlformats.org/drawingml/2006/main">
+            <a:off x="6877050" y="2238375"/>
+            <a:ext cx="4762500" cy="895350"/>
+          </a:xfrm>
+          <a:prstGeom xmlns:a="http://schemas.openxmlformats.org/drawingml/2006/main" prst="rect">
+            <a:avLst/>
+          </a:prstGeom>
+          <a:noFill xmlns:a="http://schemas.openxmlformats.org/drawingml/2006/main"/>
+          <a:ln xmlns:a="http://schemas.openxmlformats.org/drawingml/2006/main" w="0">
+            <a:noFill/>
+            <a:prstDash val="solid"/>
+          </a:ln>
+        </p:spPr>
+        <p:txBody>
+          <a:bodyPr xmlns:a="http://schemas.openxmlformats.org/drawingml/2006/main" anchor="t">
+            <a:normAutofit fontScale="100000"/>
+          </a:bodyPr>
+          <a:lstStyle xmlns:a="http://schemas.openxmlformats.org/drawingml/2006/main"/>
+          <a:p xmlns:a="http://schemas.openxmlformats.org/drawingml/2006/main">
+            <a:pPr algn="l">
+              <a:defRPr sz="1575" b="1">
+                <a:solidFill>
+                  <a:srgbClr val="111111"/>
+                </a:solidFill>
+                <a:latin typeface="Helvetica Neue"/>
+                <a:ea typeface="Helvetica Neue"/>
+                <a:cs typeface="Helvetica Neue"/>
+              </a:defRPr>
+            </a:pPr>
+            <a:r>
+              <a:rPr sz="1575" b="1">
+                <a:solidFill>
+                  <a:srgbClr val="111111"/>
+                </a:solidFill>
+                <a:latin typeface="Helvetica Neue"/>
+                <a:ea typeface="Helvetica Neue"/>
+                <a:cs typeface="Helvetica Neue"/>
+              </a:rPr>
+              <a:t>What makes a tool specification model-friendly?</a:t>
+            </a:r>
+          </a:p>
+        </p:txBody>
+      </p:sp>
+      <p:sp>
+        <p:nvSpPr>
+          <p:cNvPr id="10" name="exam-number-3">
+            <a:extLst xmlns:a="http://schemas.openxmlformats.org/drawingml/2006/main">
+              <a:ext uri="{FF2B5EF4-FFF2-40B4-BE49-F238E27FC236}">
+                <a16:creationId xmlns:a16="http://schemas.microsoft.com/office/drawing/2014/main" id="{04AF33E3-DC1D-42F2-9404-0D2CD66CDA8E}"/>
+              </a:ext>
+            </a:extLst>
+          </p:cNvPr>
+          <p:cNvSpPr>
+            <a:spLocks xmlns:a="http://schemas.openxmlformats.org/drawingml/2006/main" noGrp="1"/>
+          </p:cNvSpPr>
+          <p:nvPr/>
+        </p:nvSpPr>
+        <p:spPr>
+          <a:xfrm xmlns:a="http://schemas.openxmlformats.org/drawingml/2006/main">
+            <a:off x="390525" y="3495675"/>
+            <a:ext cx="590550" cy="400050"/>
+          </a:xfrm>
+          <a:prstGeom xmlns:a="http://schemas.openxmlformats.org/drawingml/2006/main" prst="rect">
+            <a:avLst/>
+          </a:prstGeom>
+          <a:noFill xmlns:a="http://schemas.openxmlformats.org/drawingml/2006/main"/>
+          <a:ln xmlns:a="http://schemas.openxmlformats.org/drawingml/2006/main" w="0">
+            <a:noFill/>
+            <a:prstDash val="solid"/>
+          </a:ln>
+        </p:spPr>
+        <p:txBody>
+          <a:bodyPr xmlns:a="http://schemas.openxmlformats.org/drawingml/2006/main" anchor="t">
+            <a:noAutofit/>
+          </a:bodyPr>
+          <a:lstStyle xmlns:a="http://schemas.openxmlformats.org/drawingml/2006/main"/>
+          <a:p xmlns:a="http://schemas.openxmlformats.org/drawingml/2006/main">
+            <a:pPr algn="l">
+              <a:defRPr sz="1725" b="1">
+                <a:solidFill>
+                  <a:srgbClr val="73C8FF"/>
+                </a:solidFill>
+                <a:latin typeface="Helvetica Neue"/>
+                <a:ea typeface="Helvetica Neue"/>
+                <a:cs typeface="Helvetica Neue"/>
+              </a:defRPr>
+            </a:pPr>
+            <a:r>
+              <a:rPr sz="1725" b="1">
+                <a:solidFill>
+                  <a:srgbClr val="73C8FF"/>
+                </a:solidFill>
+                <a:latin typeface="Helvetica Neue"/>
+                <a:ea typeface="Helvetica Neue"/>
+                <a:cs typeface="Helvetica Neue"/>
+              </a:rPr>
+              <a:t>03</a:t>
+            </a:r>
+          </a:p>
+        </p:txBody>
+      </p:sp>
+      <p:sp>
+        <p:nvSpPr>
+          <p:cNvPr id="11" name="exam-question-3">
+            <a:extLst xmlns:a="http://schemas.openxmlformats.org/drawingml/2006/main">
+              <a:ext uri="{FF2B5EF4-FFF2-40B4-BE49-F238E27FC236}">
+                <a16:creationId xmlns:a16="http://schemas.microsoft.com/office/drawing/2014/main" id="{C40BCEB2-C19D-47E4-8882-088914EBBB72}"/>
+              </a:ext>
+            </a:extLst>
+          </p:cNvPr>
+          <p:cNvSpPr>
+            <a:spLocks xmlns:a="http://schemas.openxmlformats.org/drawingml/2006/main" noGrp="1"/>
+          </p:cNvSpPr>
+          <p:nvPr/>
+        </p:nvSpPr>
+        <p:spPr>
+          <a:xfrm xmlns:a="http://schemas.openxmlformats.org/drawingml/2006/main">
+            <a:off x="1076325" y="3495675"/>
+            <a:ext cx="4762500" cy="895350"/>
+          </a:xfrm>
+          <a:prstGeom xmlns:a="http://schemas.openxmlformats.org/drawingml/2006/main" prst="rect">
+            <a:avLst/>
+          </a:prstGeom>
+          <a:noFill xmlns:a="http://schemas.openxmlformats.org/drawingml/2006/main"/>
+          <a:ln xmlns:a="http://schemas.openxmlformats.org/drawingml/2006/main" w="0">
+            <a:noFill/>
+            <a:prstDash val="solid"/>
+          </a:ln>
+        </p:spPr>
+        <p:txBody>
+          <a:bodyPr xmlns:a="http://schemas.openxmlformats.org/drawingml/2006/main" anchor="t">
+            <a:normAutofit fontScale="100000"/>
+          </a:bodyPr>
+          <a:lstStyle xmlns:a="http://schemas.openxmlformats.org/drawingml/2006/main"/>
+          <a:p xmlns:a="http://schemas.openxmlformats.org/drawingml/2006/main">
+            <a:pPr algn="l">
+              <a:defRPr sz="1575" b="1">
+                <a:solidFill>
+                  <a:srgbClr val="111111"/>
+                </a:solidFill>
+                <a:latin typeface="Helvetica Neue"/>
+                <a:ea typeface="Helvetica Neue"/>
+                <a:cs typeface="Helvetica Neue"/>
+              </a:defRPr>
+            </a:pPr>
+            <a:r>
+              <a:rPr sz="1575" b="1">
+                <a:solidFill>
+                  <a:srgbClr val="111111"/>
+                </a:solidFill>
+                <a:latin typeface="Helvetica Neue"/>
+                <a:ea typeface="Helvetica Neue"/>
+                <a:cs typeface="Helvetica Neue"/>
+              </a:rPr>
+              <a:t>Why must tool results be treated as untrusted?</a:t>
+            </a:r>
+          </a:p>
+        </p:txBody>
+      </p:sp>
+      <p:sp>
+        <p:nvSpPr>
+          <p:cNvPr id="12" name="exam-number-4">
+            <a:extLst xmlns:a="http://schemas.openxmlformats.org/drawingml/2006/main">
+              <a:ext uri="{FF2B5EF4-FFF2-40B4-BE49-F238E27FC236}">
+                <a16:creationId xmlns:a16="http://schemas.microsoft.com/office/drawing/2014/main" id="{08DAC3B1-9D24-4FE6-AEEF-486D9BA9F36D}"/>
+              </a:ext>
+            </a:extLst>
+          </p:cNvPr>
+          <p:cNvSpPr>
+            <a:spLocks xmlns:a="http://schemas.openxmlformats.org/drawingml/2006/main" noGrp="1"/>
+          </p:cNvSpPr>
+          <p:nvPr/>
+        </p:nvSpPr>
+        <p:spPr>
+          <a:xfrm xmlns:a="http://schemas.openxmlformats.org/drawingml/2006/main">
+            <a:off x="6191250" y="3495675"/>
+            <a:ext cx="590550" cy="400050"/>
+          </a:xfrm>
+          <a:prstGeom xmlns:a="http://schemas.openxmlformats.org/drawingml/2006/main" prst="rect">
+            <a:avLst/>
+          </a:prstGeom>
+          <a:noFill xmlns:a="http://schemas.openxmlformats.org/drawingml/2006/main"/>
+          <a:ln xmlns:a="http://schemas.openxmlformats.org/drawingml/2006/main" w="0">
+            <a:noFill/>
+            <a:prstDash val="solid"/>
+          </a:ln>
+        </p:spPr>
+        <p:txBody>
+          <a:bodyPr xmlns:a="http://schemas.openxmlformats.org/drawingml/2006/main" anchor="t">
+            <a:noAutofit/>
+          </a:bodyPr>
+          <a:lstStyle xmlns:a="http://schemas.openxmlformats.org/drawingml/2006/main"/>
+          <a:p xmlns:a="http://schemas.openxmlformats.org/drawingml/2006/main">
+            <a:pPr algn="l">
+              <a:defRPr sz="1725" b="1">
+                <a:solidFill>
+                  <a:srgbClr val="73C8FF"/>
+                </a:solidFill>
+                <a:latin typeface="Helvetica Neue"/>
+                <a:ea typeface="Helvetica Neue"/>
+                <a:cs typeface="Helvetica Neue"/>
+              </a:defRPr>
+            </a:pPr>
+            <a:r>
+              <a:rPr sz="1725" b="1">
+                <a:solidFill>
+                  <a:srgbClr val="73C8FF"/>
+                </a:solidFill>
+                <a:latin typeface="Helvetica Neue"/>
+                <a:ea typeface="Helvetica Neue"/>
+                <a:cs typeface="Helvetica Neue"/>
+              </a:rPr>
+              <a:t>04</a:t>
+            </a:r>
+          </a:p>
+        </p:txBody>
+      </p:sp>
+      <p:sp>
+        <p:nvSpPr>
+          <p:cNvPr id="13" name="exam-question-4">
+            <a:extLst xmlns:a="http://schemas.openxmlformats.org/drawingml/2006/main">
+              <a:ext uri="{FF2B5EF4-FFF2-40B4-BE49-F238E27FC236}">
+                <a16:creationId xmlns:a16="http://schemas.microsoft.com/office/drawing/2014/main" id="{F426E87F-79D7-4472-B1E1-C420A4D6C05E}"/>
+              </a:ext>
+            </a:extLst>
+          </p:cNvPr>
+          <p:cNvSpPr>
+            <a:spLocks xmlns:a="http://schemas.openxmlformats.org/drawingml/2006/main" noGrp="1"/>
+          </p:cNvSpPr>
+          <p:nvPr/>
+        </p:nvSpPr>
+        <p:spPr>
+          <a:xfrm xmlns:a="http://schemas.openxmlformats.org/drawingml/2006/main">
+            <a:off x="6877050" y="3495675"/>
+            <a:ext cx="4762500" cy="895350"/>
+          </a:xfrm>
+          <a:prstGeom xmlns:a="http://schemas.openxmlformats.org/drawingml/2006/main" prst="rect">
+            <a:avLst/>
+          </a:prstGeom>
+          <a:noFill xmlns:a="http://schemas.openxmlformats.org/drawingml/2006/main"/>
+          <a:ln xmlns:a="http://schemas.openxmlformats.org/drawingml/2006/main" w="0">
+            <a:noFill/>
+            <a:prstDash val="solid"/>
+          </a:ln>
+        </p:spPr>
+        <p:txBody>
+          <a:bodyPr xmlns:a="http://schemas.openxmlformats.org/drawingml/2006/main" anchor="t">
+            <a:normAutofit fontScale="100000"/>
+          </a:bodyPr>
+          <a:lstStyle xmlns:a="http://schemas.openxmlformats.org/drawingml/2006/main"/>
+          <a:p xmlns:a="http://schemas.openxmlformats.org/drawingml/2006/main">
+            <a:pPr algn="l">
+              <a:defRPr sz="1575" b="1">
+                <a:solidFill>
+                  <a:srgbClr val="111111"/>
+                </a:solidFill>
+                <a:latin typeface="Helvetica Neue"/>
+                <a:ea typeface="Helvetica Neue"/>
+                <a:cs typeface="Helvetica Neue"/>
+              </a:defRPr>
+            </a:pPr>
+            <a:r>
+              <a:rPr sz="1575" b="1">
+                <a:solidFill>
+                  <a:srgbClr val="111111"/>
+                </a:solidFill>
+                <a:latin typeface="Helvetica Neue"/>
+                <a:ea typeface="Helvetica Neue"/>
+                <a:cs typeface="Helvetica Neue"/>
+              </a:rPr>
+              <a:t>Explain the N-by-M problem and MCP's answer.</a:t>
+            </a:r>
+          </a:p>
+        </p:txBody>
+      </p:sp>
+      <p:sp>
+        <p:nvSpPr>
+          <p:cNvPr id="14" name="exam-number-5">
+            <a:extLst xmlns:a="http://schemas.openxmlformats.org/drawingml/2006/main">
+              <a:ext uri="{FF2B5EF4-FFF2-40B4-BE49-F238E27FC236}">
+                <a16:creationId xmlns:a16="http://schemas.microsoft.com/office/drawing/2014/main" id="{6969C5C8-30E7-40B3-A4AC-46A39834E032}"/>
+              </a:ext>
+            </a:extLst>
+          </p:cNvPr>
+          <p:cNvSpPr>
+            <a:spLocks xmlns:a="http://schemas.openxmlformats.org/drawingml/2006/main" noGrp="1"/>
+          </p:cNvSpPr>
+          <p:nvPr/>
+        </p:nvSpPr>
+        <p:spPr>
+          <a:xfrm xmlns:a="http://schemas.openxmlformats.org/drawingml/2006/main">
+            <a:off x="390525" y="4752975"/>
+            <a:ext cx="590550" cy="400050"/>
+          </a:xfrm>
+          <a:prstGeom xmlns:a="http://schemas.openxmlformats.org/drawingml/2006/main" prst="rect">
+            <a:avLst/>
+          </a:prstGeom>
+          <a:noFill xmlns:a="http://schemas.openxmlformats.org/drawingml/2006/main"/>
+          <a:ln xmlns:a="http://schemas.openxmlformats.org/drawingml/2006/main" w="0">
+            <a:noFill/>
+            <a:prstDash val="solid"/>
+          </a:ln>
+        </p:spPr>
+        <p:txBody>
+          <a:bodyPr xmlns:a="http://schemas.openxmlformats.org/drawingml/2006/main" anchor="t">
+            <a:noAutofit/>
+          </a:bodyPr>
+          <a:lstStyle xmlns:a="http://schemas.openxmlformats.org/drawingml/2006/main"/>
+          <a:p xmlns:a="http://schemas.openxmlformats.org/drawingml/2006/main">
+            <a:pPr algn="l">
+              <a:defRPr sz="1725" b="1">
+                <a:solidFill>
+                  <a:srgbClr val="73C8FF"/>
+                </a:solidFill>
+                <a:latin typeface="Helvetica Neue"/>
+                <a:ea typeface="Helvetica Neue"/>
+                <a:cs typeface="Helvetica Neue"/>
+              </a:defRPr>
+            </a:pPr>
+            <a:r>
+              <a:rPr sz="1725" b="1">
+                <a:solidFill>
+                  <a:srgbClr val="73C8FF"/>
+                </a:solidFill>
+                <a:latin typeface="Helvetica Neue"/>
+                <a:ea typeface="Helvetica Neue"/>
+                <a:cs typeface="Helvetica Neue"/>
+              </a:rPr>
+              <a:t>05</a:t>
+            </a:r>
+          </a:p>
+        </p:txBody>
+      </p:sp>
+      <p:sp>
+        <p:nvSpPr>
+          <p:cNvPr id="15" name="exam-question-5">
+            <a:extLst xmlns:a="http://schemas.openxmlformats.org/drawingml/2006/main">
+              <a:ext uri="{FF2B5EF4-FFF2-40B4-BE49-F238E27FC236}">
+                <a16:creationId xmlns:a16="http://schemas.microsoft.com/office/drawing/2014/main" id="{2D036EBE-BA9A-4BBF-B112-8CE868CA157B}"/>
+              </a:ext>
+            </a:extLst>
+          </p:cNvPr>
+          <p:cNvSpPr>
+            <a:spLocks xmlns:a="http://schemas.openxmlformats.org/drawingml/2006/main" noGrp="1"/>
+          </p:cNvSpPr>
+          <p:nvPr/>
+        </p:nvSpPr>
+        <p:spPr>
+          <a:xfrm xmlns:a="http://schemas.openxmlformats.org/drawingml/2006/main">
+            <a:off x="1076325" y="4752975"/>
+            <a:ext cx="4762500" cy="895350"/>
+          </a:xfrm>
+          <a:prstGeom xmlns:a="http://schemas.openxmlformats.org/drawingml/2006/main" prst="rect">
+            <a:avLst/>
+          </a:prstGeom>
+          <a:noFill xmlns:a="http://schemas.openxmlformats.org/drawingml/2006/main"/>
+          <a:ln xmlns:a="http://schemas.openxmlformats.org/drawingml/2006/main" w="0">
+            <a:noFill/>
+            <a:prstDash val="solid"/>
+          </a:ln>
+        </p:spPr>
+        <p:txBody>
+          <a:bodyPr xmlns:a="http://schemas.openxmlformats.org/drawingml/2006/main" anchor="t">
+            <a:normAutofit fontScale="100000"/>
+          </a:bodyPr>
+          <a:lstStyle xmlns:a="http://schemas.openxmlformats.org/drawingml/2006/main"/>
+          <a:p xmlns:a="http://schemas.openxmlformats.org/drawingml/2006/main">
+            <a:pPr algn="l">
+              <a:defRPr sz="1575" b="1">
+                <a:solidFill>
+                  <a:srgbClr val="111111"/>
+                </a:solidFill>
+                <a:latin typeface="Helvetica Neue"/>
+                <a:ea typeface="Helvetica Neue"/>
+                <a:cs typeface="Helvetica Neue"/>
+              </a:defRPr>
+            </a:pPr>
+            <a:r>
+              <a:rPr sz="1575" b="1">
+                <a:solidFill>
+                  <a:srgbClr val="111111"/>
+                </a:solidFill>
+                <a:latin typeface="Helvetica Neue"/>
+                <a:ea typeface="Helvetica Neue"/>
+                <a:cs typeface="Helvetica Neue"/>
+              </a:rPr>
+              <a:t>List server-side and client-side MCP primitives.</a:t>
+            </a:r>
+          </a:p>
+        </p:txBody>
+      </p:sp>
+      <p:sp>
+        <p:nvSpPr>
+          <p:cNvPr id="16" name="exam-number-6">
+            <a:extLst xmlns:a="http://schemas.openxmlformats.org/drawingml/2006/main">
+              <a:ext uri="{FF2B5EF4-FFF2-40B4-BE49-F238E27FC236}">
+                <a16:creationId xmlns:a16="http://schemas.microsoft.com/office/drawing/2014/main" id="{9CFA193A-A2E7-4EB1-9A48-749CE03ADC84}"/>
+              </a:ext>
+            </a:extLst>
+          </p:cNvPr>
+          <p:cNvSpPr>
+            <a:spLocks xmlns:a="http://schemas.openxmlformats.org/drawingml/2006/main" noGrp="1"/>
+          </p:cNvSpPr>
+          <p:nvPr/>
+        </p:nvSpPr>
+        <p:spPr>
+          <a:xfrm xmlns:a="http://schemas.openxmlformats.org/drawingml/2006/main">
+            <a:off x="6191250" y="4752975"/>
+            <a:ext cx="590550" cy="400050"/>
+          </a:xfrm>
+          <a:prstGeom xmlns:a="http://schemas.openxmlformats.org/drawingml/2006/main" prst="rect">
+            <a:avLst/>
+          </a:prstGeom>
+          <a:noFill xmlns:a="http://schemas.openxmlformats.org/drawingml/2006/main"/>
+          <a:ln xmlns:a="http://schemas.openxmlformats.org/drawingml/2006/main" w="0">
+            <a:noFill/>
+            <a:prstDash val="solid"/>
+          </a:ln>
+        </p:spPr>
+        <p:txBody>
+          <a:bodyPr xmlns:a="http://schemas.openxmlformats.org/drawingml/2006/main" anchor="t">
+            <a:noAutofit/>
+          </a:bodyPr>
+          <a:lstStyle xmlns:a="http://schemas.openxmlformats.org/drawingml/2006/main"/>
+          <a:p xmlns:a="http://schemas.openxmlformats.org/drawingml/2006/main">
+            <a:pPr algn="l">
+              <a:defRPr sz="1725" b="1">
+                <a:solidFill>
+                  <a:srgbClr val="73C8FF"/>
+                </a:solidFill>
+                <a:latin typeface="Helvetica Neue"/>
+                <a:ea typeface="Helvetica Neue"/>
+                <a:cs typeface="Helvetica Neue"/>
+              </a:defRPr>
+            </a:pPr>
+            <a:r>
+              <a:rPr sz="1725" b="1">
+                <a:solidFill>
+                  <a:srgbClr val="73C8FF"/>
+                </a:solidFill>
+                <a:latin typeface="Helvetica Neue"/>
+                <a:ea typeface="Helvetica Neue"/>
+                <a:cs typeface="Helvetica Neue"/>
+              </a:rPr>
+              <a:t>06</a:t>
+            </a:r>
+          </a:p>
+        </p:txBody>
+      </p:sp>
+      <p:sp>
+        <p:nvSpPr>
+          <p:cNvPr id="17" name="exam-question-6">
+            <a:extLst xmlns:a="http://schemas.openxmlformats.org/drawingml/2006/main">
+              <a:ext uri="{FF2B5EF4-FFF2-40B4-BE49-F238E27FC236}">
+                <a16:creationId xmlns:a16="http://schemas.microsoft.com/office/drawing/2014/main" id="{EEB4A0DC-9245-4BB1-9BCE-9DFAC81C6905}"/>
+              </a:ext>
+            </a:extLst>
+          </p:cNvPr>
+          <p:cNvSpPr>
+            <a:spLocks xmlns:a="http://schemas.openxmlformats.org/drawingml/2006/main" noGrp="1"/>
+          </p:cNvSpPr>
+          <p:nvPr/>
+        </p:nvSpPr>
+        <p:spPr>
+          <a:xfrm xmlns:a="http://schemas.openxmlformats.org/drawingml/2006/main">
+            <a:off x="6877050" y="4752975"/>
+            <a:ext cx="4762500" cy="895350"/>
+          </a:xfrm>
+          <a:prstGeom xmlns:a="http://schemas.openxmlformats.org/drawingml/2006/main" prst="rect">
+            <a:avLst/>
+          </a:prstGeom>
+          <a:noFill xmlns:a="http://schemas.openxmlformats.org/drawingml/2006/main"/>
+          <a:ln xmlns:a="http://schemas.openxmlformats.org/drawingml/2006/main" w="0">
+            <a:noFill/>
+            <a:prstDash val="solid"/>
+          </a:ln>
+        </p:spPr>
+        <p:txBody>
+          <a:bodyPr xmlns:a="http://schemas.openxmlformats.org/drawingml/2006/main" anchor="t">
+            <a:normAutofit fontScale="100000"/>
+          </a:bodyPr>
+          <a:lstStyle xmlns:a="http://schemas.openxmlformats.org/drawingml/2006/main"/>
+          <a:p xmlns:a="http://schemas.openxmlformats.org/drawingml/2006/main">
+            <a:pPr algn="l">
+              <a:defRPr sz="1575" b="1">
+                <a:solidFill>
+                  <a:srgbClr val="111111"/>
+                </a:solidFill>
+                <a:latin typeface="Helvetica Neue"/>
+                <a:ea typeface="Helvetica Neue"/>
+                <a:cs typeface="Helvetica Neue"/>
+              </a:defRPr>
+            </a:pPr>
+            <a:r>
+              <a:rPr sz="1575" b="1">
+                <a:solidFill>
+                  <a:srgbClr val="111111"/>
+                </a:solidFill>
+                <a:latin typeface="Helvetica Neue"/>
+                <a:ea typeface="Helvetica Neue"/>
+                <a:cs typeface="Helvetica Neue"/>
+              </a:rPr>
+              <a:t>Why does an advertised filesystem root still need implementation-level access controls?</a:t>
+            </a:r>
+          </a:p>
+        </p:txBody>
+      </p:sp>
+    </p:spTree>
+    <p:extLst>
+      <p:ext uri="{BB962C8B-B14F-4D97-AF65-F5344CB8AC3E}">
+        <p14:creationId xmlns:p14="http://schemas.microsoft.com/office/powerpoint/2010/main" val="1022657809"/>
+      </p:ext>
+    </p:extLst>
+  </p:cSld>
+</p:sld>
+</file>
+
+<file path=ppt/slides/slide11.xml><?xml version="1.0" encoding="utf-8"?>
 <p:sld xmlns:p="http://schemas.openxmlformats.org/presentationml/2006/main">
   <p:cSld>
     <p:bg>
@@ -2258,7 +4020,7 @@
           <p:cNvPr id="14" name="accent-line">
             <a:extLst xmlns:a="http://schemas.openxmlformats.org/drawingml/2006/main">
               <a:ext uri="{FF2B5EF4-FFF2-40B4-BE49-F238E27FC236}">
-                <a16:creationId xmlns:a16="http://schemas.microsoft.com/office/drawing/2014/main" id="{6D7E477A-2383-4C1E-831F-A0328323FD5E}"/>
+                <a16:creationId xmlns:a16="http://schemas.microsoft.com/office/drawing/2014/main" id="{61704055-B2F4-4C5C-A0C4-88B3AA3D42A0}"/>
               </a:ext>
             </a:extLst>
           </p:cNvPr>
@@ -2291,7 +4053,7 @@
           <p:cNvPr id="2" name="chapter-label">
             <a:extLst xmlns:a="http://schemas.openxmlformats.org/drawingml/2006/main">
               <a:ext uri="{FF2B5EF4-FFF2-40B4-BE49-F238E27FC236}">
-                <a16:creationId xmlns:a16="http://schemas.microsoft.com/office/drawing/2014/main" id="{13185B49-0374-4545-82F8-E73A43307D8E}"/>
+                <a16:creationId xmlns:a16="http://schemas.microsoft.com/office/drawing/2014/main" id="{142D4530-A07C-4327-B119-99DE331648C0}"/>
               </a:ext>
             </a:extLst>
           </p:cNvPr>
@@ -2349,7 +4111,7 @@
           <p:cNvPr id="3" name="slide-number">
             <a:extLst xmlns:a="http://schemas.openxmlformats.org/drawingml/2006/main">
               <a:ext uri="{FF2B5EF4-FFF2-40B4-BE49-F238E27FC236}">
-                <a16:creationId xmlns:a16="http://schemas.microsoft.com/office/drawing/2014/main" id="{E4098F0F-FD39-4766-BAD7-71517911C67F}"/>
+                <a16:creationId xmlns:a16="http://schemas.microsoft.com/office/drawing/2014/main" id="{E9331114-60BC-4F17-8CDB-387CE99DF172}"/>
               </a:ext>
             </a:extLst>
           </p:cNvPr>
@@ -2397,7 +4159,7 @@
                 <a:ea typeface="Helvetica Neue"/>
                 <a:cs typeface="Helvetica Neue"/>
               </a:rPr>
-              <a:t>10</a:t>
+              <a:t>11</a:t>
             </a:r>
           </a:p>
         </p:txBody>
@@ -2407,7 +4169,7 @@
           <p:cNvPr id="4" name="chapter-footer">
             <a:extLst xmlns:a="http://schemas.openxmlformats.org/drawingml/2006/main">
               <a:ext uri="{FF2B5EF4-FFF2-40B4-BE49-F238E27FC236}">
-                <a16:creationId xmlns:a16="http://schemas.microsoft.com/office/drawing/2014/main" id="{573C0976-3047-4499-B850-29525BD93400}"/>
+                <a16:creationId xmlns:a16="http://schemas.microsoft.com/office/drawing/2014/main" id="{CE374156-E314-4674-BB07-D92F4A98C58F}"/>
               </a:ext>
             </a:extLst>
           </p:cNvPr>
@@ -2465,7 +4227,7 @@
           <p:cNvPr id="5" name="closing-title">
             <a:extLst xmlns:a="http://schemas.openxmlformats.org/drawingml/2006/main">
               <a:ext uri="{FF2B5EF4-FFF2-40B4-BE49-F238E27FC236}">
-                <a16:creationId xmlns:a16="http://schemas.microsoft.com/office/drawing/2014/main" id="{92490F10-AF95-4B4A-8299-6A8A1BD86136}"/>
+                <a16:creationId xmlns:a16="http://schemas.microsoft.com/office/drawing/2014/main" id="{22BF3CE8-6DCD-4ADE-B847-F5A412E20281}"/>
               </a:ext>
             </a:extLst>
           </p:cNvPr>
@@ -2523,7 +4285,7 @@
           <p:cNvPr id="6" name="takeaway-number-1">
             <a:extLst xmlns:a="http://schemas.openxmlformats.org/drawingml/2006/main">
               <a:ext uri="{FF2B5EF4-FFF2-40B4-BE49-F238E27FC236}">
-                <a16:creationId xmlns:a16="http://schemas.microsoft.com/office/drawing/2014/main" id="{A02CFE89-0825-4E6A-9FE1-3ABF49B3F15D}"/>
+                <a16:creationId xmlns:a16="http://schemas.microsoft.com/office/drawing/2014/main" id="{1C2D8244-AB26-45CE-80FB-189AA4BF6B5F}"/>
               </a:ext>
             </a:extLst>
           </p:cNvPr>
@@ -2581,7 +4343,7 @@
           <p:cNvPr id="7" name="takeaway-1">
             <a:extLst xmlns:a="http://schemas.openxmlformats.org/drawingml/2006/main">
               <a:ext uri="{FF2B5EF4-FFF2-40B4-BE49-F238E27FC236}">
-                <a16:creationId xmlns:a16="http://schemas.microsoft.com/office/drawing/2014/main" id="{46E227B3-3DDE-45B4-9843-F3D34E2FE082}"/>
+                <a16:creationId xmlns:a16="http://schemas.microsoft.com/office/drawing/2014/main" id="{95F2A2A6-1124-496C-B89D-10C0E6DA4A01}"/>
               </a:ext>
             </a:extLst>
           </p:cNvPr>
@@ -2639,7 +4401,7 @@
           <p:cNvPr id="8" name="takeaway-number-2">
             <a:extLst xmlns:a="http://schemas.openxmlformats.org/drawingml/2006/main">
               <a:ext uri="{FF2B5EF4-FFF2-40B4-BE49-F238E27FC236}">
-                <a16:creationId xmlns:a16="http://schemas.microsoft.com/office/drawing/2014/main" id="{B8A546A7-4E98-4A03-9AF0-769FF7D220A6}"/>
+                <a16:creationId xmlns:a16="http://schemas.microsoft.com/office/drawing/2014/main" id="{9E8D5169-81FD-4BC0-AAF6-60F6564BDD92}"/>
               </a:ext>
             </a:extLst>
           </p:cNvPr>
@@ -2697,7 +4459,7 @@
           <p:cNvPr id="9" name="takeaway-2">
             <a:extLst xmlns:a="http://schemas.openxmlformats.org/drawingml/2006/main">
               <a:ext uri="{FF2B5EF4-FFF2-40B4-BE49-F238E27FC236}">
-                <a16:creationId xmlns:a16="http://schemas.microsoft.com/office/drawing/2014/main" id="{323AD9AD-647F-4C49-9A88-FB421CEADCD5}"/>
+                <a16:creationId xmlns:a16="http://schemas.microsoft.com/office/drawing/2014/main" id="{83679B5E-09A2-4ACC-A3C7-5FE7DDF55737}"/>
               </a:ext>
             </a:extLst>
           </p:cNvPr>
@@ -2755,7 +4517,7 @@
           <p:cNvPr id="10" name="takeaway-number-3">
             <a:extLst xmlns:a="http://schemas.openxmlformats.org/drawingml/2006/main">
               <a:ext uri="{FF2B5EF4-FFF2-40B4-BE49-F238E27FC236}">
-                <a16:creationId xmlns:a16="http://schemas.microsoft.com/office/drawing/2014/main" id="{F43A3EFB-9ABC-4DF3-8DFF-D0C3BD90EF84}"/>
+                <a16:creationId xmlns:a16="http://schemas.microsoft.com/office/drawing/2014/main" id="{88D4BEC1-D27C-4423-B8DE-43FCB2BE2492}"/>
               </a:ext>
             </a:extLst>
           </p:cNvPr>
@@ -2813,7 +4575,7 @@
           <p:cNvPr id="11" name="takeaway-3">
             <a:extLst xmlns:a="http://schemas.openxmlformats.org/drawingml/2006/main">
               <a:ext uri="{FF2B5EF4-FFF2-40B4-BE49-F238E27FC236}">
-                <a16:creationId xmlns:a16="http://schemas.microsoft.com/office/drawing/2014/main" id="{B4411378-E35A-42BD-827E-520B7F94CE85}"/>
+                <a16:creationId xmlns:a16="http://schemas.microsoft.com/office/drawing/2014/main" id="{1092FD90-5A97-44EB-8116-289BF215701C}"/>
               </a:ext>
             </a:extLst>
           </p:cNvPr>
@@ -2871,7 +4633,7 @@
           <p:cNvPr id="12" name="takeaway-number-4">
             <a:extLst xmlns:a="http://schemas.openxmlformats.org/drawingml/2006/main">
               <a:ext uri="{FF2B5EF4-FFF2-40B4-BE49-F238E27FC236}">
-                <a16:creationId xmlns:a16="http://schemas.microsoft.com/office/drawing/2014/main" id="{6EBDCF25-B002-43FA-B0EA-A2F8316DA147}"/>
+                <a16:creationId xmlns:a16="http://schemas.microsoft.com/office/drawing/2014/main" id="{A4AF6BC7-7295-4B3D-B4A7-FEA226798AD9}"/>
               </a:ext>
             </a:extLst>
           </p:cNvPr>
@@ -2929,7 +4691,7 @@
           <p:cNvPr id="13" name="takeaway-4">
             <a:extLst xmlns:a="http://schemas.openxmlformats.org/drawingml/2006/main">
               <a:ext uri="{FF2B5EF4-FFF2-40B4-BE49-F238E27FC236}">
-                <a16:creationId xmlns:a16="http://schemas.microsoft.com/office/drawing/2014/main" id="{99FF25B5-886A-458A-8B0E-AD5193BDDED3}"/>
+                <a16:creationId xmlns:a16="http://schemas.microsoft.com/office/drawing/2014/main" id="{50FFB978-0662-4A69-98EC-403F6BE42752}"/>
               </a:ext>
             </a:extLst>
           </p:cNvPr>
@@ -2985,7 +4747,579 @@
     </p:spTree>
     <p:extLst>
       <p:ext uri="{BB962C8B-B14F-4D97-AF65-F5344CB8AC3E}">
-        <p14:creationId xmlns:p14="http://schemas.microsoft.com/office/powerpoint/2010/main" val="1741287534"/>
+        <p14:creationId xmlns:p14="http://schemas.microsoft.com/office/powerpoint/2010/main" val="1983162828"/>
+      </p:ext>
+    </p:extLst>
+  </p:cSld>
+</p:sld>
+</file>
+
+<file path=ppt/slides/slide12.xml><?xml version="1.0" encoding="utf-8"?>
+<p:sld xmlns:p="http://schemas.openxmlformats.org/presentationml/2006/main">
+  <p:cSld>
+    <p:bg>
+      <p:bgPr>
+        <a:solidFill xmlns:a="http://schemas.openxmlformats.org/drawingml/2006/main">
+          <a:srgbClr val="FFFFFF"/>
+        </a:solidFill>
+      </p:bgPr>
+    </p:bg>
+    <p:spTree>
+      <p:nvGrpSpPr>
+        <p:cNvPr id="1" name=""/>
+        <p:cNvGrpSpPr/>
+        <p:nvPr/>
+      </p:nvGrpSpPr>
+      <p:grpSpPr>
+        <a:xfrm xmlns:a="http://schemas.openxmlformats.org/drawingml/2006/main"/>
+      </p:grpSpPr>
+      <p:sp>
+        <p:nvSpPr>
+          <p:cNvPr id="10" name="accent-line">
+            <a:extLst xmlns:a="http://schemas.openxmlformats.org/drawingml/2006/main">
+              <a:ext uri="{FF2B5EF4-FFF2-40B4-BE49-F238E27FC236}">
+                <a16:creationId xmlns:a16="http://schemas.microsoft.com/office/drawing/2014/main" id="{E77B56BE-D0F5-48D9-8D0C-4A415B70D64B}"/>
+              </a:ext>
+            </a:extLst>
+          </p:cNvPr>
+          <p:cNvSpPr>
+            <a:spLocks xmlns:a="http://schemas.openxmlformats.org/drawingml/2006/main" noGrp="1"/>
+          </p:cNvSpPr>
+          <p:nvPr/>
+        </p:nvSpPr>
+        <p:spPr>
+          <a:xfrm xmlns:a="http://schemas.openxmlformats.org/drawingml/2006/main">
+            <a:off x="390525" y="304800"/>
+            <a:ext cx="11410950" cy="66675"/>
+          </a:xfrm>
+          <a:prstGeom xmlns:a="http://schemas.openxmlformats.org/drawingml/2006/main" prst="rect">
+            <a:avLst/>
+          </a:prstGeom>
+          <a:solidFill xmlns:a="http://schemas.openxmlformats.org/drawingml/2006/main">
+            <a:srgbClr val="73C8FF"/>
+          </a:solidFill>
+          <a:ln xmlns:a="http://schemas.openxmlformats.org/drawingml/2006/main" w="0">
+            <a:solidFill>
+              <a:srgbClr val="73C8FF"/>
+            </a:solidFill>
+            <a:prstDash val="solid"/>
+          </a:ln>
+        </p:spPr>
+      </p:sp>
+      <p:sp>
+        <p:nvSpPr>
+          <p:cNvPr id="2" name="chapter-label">
+            <a:extLst xmlns:a="http://schemas.openxmlformats.org/drawingml/2006/main">
+              <a:ext uri="{FF2B5EF4-FFF2-40B4-BE49-F238E27FC236}">
+                <a16:creationId xmlns:a16="http://schemas.microsoft.com/office/drawing/2014/main" id="{85F8D672-9850-405B-96BD-2F0E2343736E}"/>
+              </a:ext>
+            </a:extLst>
+          </p:cNvPr>
+          <p:cNvSpPr>
+            <a:spLocks xmlns:a="http://schemas.openxmlformats.org/drawingml/2006/main" noGrp="1"/>
+          </p:cNvSpPr>
+          <p:nvPr/>
+        </p:nvSpPr>
+        <p:spPr>
+          <a:xfrm xmlns:a="http://schemas.openxmlformats.org/drawingml/2006/main">
+            <a:off x="390525" y="466725"/>
+            <a:ext cx="4953000" cy="323850"/>
+          </a:xfrm>
+          <a:prstGeom xmlns:a="http://schemas.openxmlformats.org/drawingml/2006/main" prst="rect">
+            <a:avLst/>
+          </a:prstGeom>
+          <a:noFill xmlns:a="http://schemas.openxmlformats.org/drawingml/2006/main"/>
+          <a:ln xmlns:a="http://schemas.openxmlformats.org/drawingml/2006/main" w="0">
+            <a:noFill/>
+            <a:prstDash val="solid"/>
+          </a:ln>
+        </p:spPr>
+        <p:txBody>
+          <a:bodyPr xmlns:a="http://schemas.openxmlformats.org/drawingml/2006/main" anchor="t">
+            <a:noAutofit/>
+          </a:bodyPr>
+          <a:lstStyle xmlns:a="http://schemas.openxmlformats.org/drawingml/2006/main"/>
+          <a:p xmlns:a="http://schemas.openxmlformats.org/drawingml/2006/main">
+            <a:pPr algn="l">
+              <a:defRPr sz="1275" b="1">
+                <a:solidFill>
+                  <a:srgbClr val="5B5B57"/>
+                </a:solidFill>
+                <a:latin typeface="Helvetica Neue"/>
+                <a:ea typeface="Helvetica Neue"/>
+                <a:cs typeface="Helvetica Neue"/>
+              </a:defRPr>
+            </a:pPr>
+            <a:r>
+              <a:rPr sz="1275" b="1">
+                <a:solidFill>
+                  <a:srgbClr val="5B5B57"/>
+                </a:solidFill>
+                <a:latin typeface="Helvetica Neue"/>
+                <a:ea typeface="Helvetica Neue"/>
+                <a:cs typeface="Helvetica Neue"/>
+              </a:rPr>
+              <a:t>PRACTICE AND READING  /  05</a:t>
+            </a:r>
+          </a:p>
+        </p:txBody>
+      </p:sp>
+      <p:sp>
+        <p:nvSpPr>
+          <p:cNvPr id="3" name="slide-number">
+            <a:extLst xmlns:a="http://schemas.openxmlformats.org/drawingml/2006/main">
+              <a:ext uri="{FF2B5EF4-FFF2-40B4-BE49-F238E27FC236}">
+                <a16:creationId xmlns:a16="http://schemas.microsoft.com/office/drawing/2014/main" id="{9936A120-CF37-46F0-8154-F70E3C902932}"/>
+              </a:ext>
+            </a:extLst>
+          </p:cNvPr>
+          <p:cNvSpPr>
+            <a:spLocks xmlns:a="http://schemas.openxmlformats.org/drawingml/2006/main" noGrp="1"/>
+          </p:cNvSpPr>
+          <p:nvPr/>
+        </p:nvSpPr>
+        <p:spPr>
+          <a:xfrm xmlns:a="http://schemas.openxmlformats.org/drawingml/2006/main">
+            <a:off x="11049000" y="6286500"/>
+            <a:ext cx="742950" cy="266700"/>
+          </a:xfrm>
+          <a:prstGeom xmlns:a="http://schemas.openxmlformats.org/drawingml/2006/main" prst="rect">
+            <a:avLst/>
+          </a:prstGeom>
+          <a:noFill xmlns:a="http://schemas.openxmlformats.org/drawingml/2006/main"/>
+          <a:ln xmlns:a="http://schemas.openxmlformats.org/drawingml/2006/main" w="0">
+            <a:noFill/>
+            <a:prstDash val="solid"/>
+          </a:ln>
+        </p:spPr>
+        <p:txBody>
+          <a:bodyPr xmlns:a="http://schemas.openxmlformats.org/drawingml/2006/main" anchor="t">
+            <a:noAutofit/>
+          </a:bodyPr>
+          <a:lstStyle xmlns:a="http://schemas.openxmlformats.org/drawingml/2006/main"/>
+          <a:p xmlns:a="http://schemas.openxmlformats.org/drawingml/2006/main">
+            <a:pPr algn="r">
+              <a:defRPr sz="1200" b="0">
+                <a:solidFill>
+                  <a:srgbClr val="5B5B57"/>
+                </a:solidFill>
+                <a:latin typeface="Helvetica Neue"/>
+                <a:ea typeface="Helvetica Neue"/>
+                <a:cs typeface="Helvetica Neue"/>
+              </a:defRPr>
+            </a:pPr>
+            <a:r>
+              <a:rPr sz="1200" b="0">
+                <a:solidFill>
+                  <a:srgbClr val="5B5B57"/>
+                </a:solidFill>
+                <a:latin typeface="Helvetica Neue"/>
+                <a:ea typeface="Helvetica Neue"/>
+                <a:cs typeface="Helvetica Neue"/>
+              </a:rPr>
+              <a:t>12</a:t>
+            </a:r>
+          </a:p>
+        </p:txBody>
+      </p:sp>
+      <p:sp>
+        <p:nvSpPr>
+          <p:cNvPr id="4" name="chapter-footer">
+            <a:extLst xmlns:a="http://schemas.openxmlformats.org/drawingml/2006/main">
+              <a:ext uri="{FF2B5EF4-FFF2-40B4-BE49-F238E27FC236}">
+                <a16:creationId xmlns:a16="http://schemas.microsoft.com/office/drawing/2014/main" id="{E7D2A2B4-BFC5-4A46-9EC1-ED317AB6901B}"/>
+              </a:ext>
+            </a:extLst>
+          </p:cNvPr>
+          <p:cNvSpPr>
+            <a:spLocks xmlns:a="http://schemas.openxmlformats.org/drawingml/2006/main" noGrp="1"/>
+          </p:cNvSpPr>
+          <p:nvPr/>
+        </p:nvSpPr>
+        <p:spPr>
+          <a:xfrm xmlns:a="http://schemas.openxmlformats.org/drawingml/2006/main">
+            <a:off x="390525" y="6286500"/>
+            <a:ext cx="8191500" cy="266700"/>
+          </a:xfrm>
+          <a:prstGeom xmlns:a="http://schemas.openxmlformats.org/drawingml/2006/main" prst="rect">
+            <a:avLst/>
+          </a:prstGeom>
+          <a:noFill xmlns:a="http://schemas.openxmlformats.org/drawingml/2006/main"/>
+          <a:ln xmlns:a="http://schemas.openxmlformats.org/drawingml/2006/main" w="0">
+            <a:noFill/>
+            <a:prstDash val="solid"/>
+          </a:ln>
+        </p:spPr>
+        <p:txBody>
+          <a:bodyPr xmlns:a="http://schemas.openxmlformats.org/drawingml/2006/main" anchor="t">
+            <a:noAutofit/>
+          </a:bodyPr>
+          <a:lstStyle xmlns:a="http://schemas.openxmlformats.org/drawingml/2006/main"/>
+          <a:p xmlns:a="http://schemas.openxmlformats.org/drawingml/2006/main">
+            <a:pPr algn="l">
+              <a:defRPr sz="1125" b="0">
+                <a:solidFill>
+                  <a:srgbClr val="5B5B57"/>
+                </a:solidFill>
+                <a:latin typeface="Helvetica Neue"/>
+                <a:ea typeface="Helvetica Neue"/>
+                <a:cs typeface="Helvetica Neue"/>
+              </a:defRPr>
+            </a:pPr>
+            <a:r>
+              <a:rPr sz="1125" b="0">
+                <a:solidFill>
+                  <a:srgbClr val="5B5B57"/>
+                </a:solidFill>
+                <a:latin typeface="Helvetica Neue"/>
+                <a:ea typeface="Helvetica Neue"/>
+                <a:cs typeface="Helvetica Neue"/>
+              </a:rPr>
+              <a:t>Tool Use, MCP, and Frameworks</a:t>
+            </a:r>
+          </a:p>
+        </p:txBody>
+      </p:sp>
+      <p:sp>
+        <p:nvSpPr>
+          <p:cNvPr id="5" name="practice-title">
+            <a:extLst xmlns:a="http://schemas.openxmlformats.org/drawingml/2006/main">
+              <a:ext uri="{FF2B5EF4-FFF2-40B4-BE49-F238E27FC236}">
+                <a16:creationId xmlns:a16="http://schemas.microsoft.com/office/drawing/2014/main" id="{AF861C8F-F31B-4F8F-BFB3-D59FB643EEDA}"/>
+              </a:ext>
+            </a:extLst>
+          </p:cNvPr>
+          <p:cNvSpPr>
+            <a:spLocks xmlns:a="http://schemas.openxmlformats.org/drawingml/2006/main" noGrp="1"/>
+          </p:cNvSpPr>
+          <p:nvPr/>
+        </p:nvSpPr>
+        <p:spPr>
+          <a:xfrm xmlns:a="http://schemas.openxmlformats.org/drawingml/2006/main">
+            <a:off x="390525" y="1000125"/>
+            <a:ext cx="11144250" cy="666750"/>
+          </a:xfrm>
+          <a:prstGeom xmlns:a="http://schemas.openxmlformats.org/drawingml/2006/main" prst="rect">
+            <a:avLst/>
+          </a:prstGeom>
+          <a:noFill xmlns:a="http://schemas.openxmlformats.org/drawingml/2006/main"/>
+          <a:ln xmlns:a="http://schemas.openxmlformats.org/drawingml/2006/main" w="0">
+            <a:noFill/>
+            <a:prstDash val="solid"/>
+          </a:ln>
+        </p:spPr>
+        <p:txBody>
+          <a:bodyPr xmlns:a="http://schemas.openxmlformats.org/drawingml/2006/main" anchor="t">
+            <a:normAutofit fontScale="100000"/>
+          </a:bodyPr>
+          <a:lstStyle xmlns:a="http://schemas.openxmlformats.org/drawingml/2006/main"/>
+          <a:p xmlns:a="http://schemas.openxmlformats.org/drawingml/2006/main">
+            <a:pPr algn="l">
+              <a:defRPr sz="3000" b="1">
+                <a:solidFill>
+                  <a:srgbClr val="111111"/>
+                </a:solidFill>
+                <a:latin typeface="Helvetica Neue"/>
+                <a:ea typeface="Helvetica Neue"/>
+                <a:cs typeface="Helvetica Neue"/>
+              </a:defRPr>
+            </a:pPr>
+            <a:r>
+              <a:rPr sz="3000" b="1">
+                <a:solidFill>
+                  <a:srgbClr val="111111"/>
+                </a:solidFill>
+                <a:latin typeface="Helvetica Neue"/>
+                <a:ea typeface="Helvetica Neue"/>
+                <a:cs typeface="Helvetica Neue"/>
+              </a:rPr>
+              <a:t>Evidence to submit</a:t>
+            </a:r>
+          </a:p>
+        </p:txBody>
+      </p:sp>
+      <p:sp>
+        <p:nvSpPr>
+          <p:cNvPr id="6" name="practice-task">
+            <a:extLst xmlns:a="http://schemas.openxmlformats.org/drawingml/2006/main">
+              <a:ext uri="{FF2B5EF4-FFF2-40B4-BE49-F238E27FC236}">
+                <a16:creationId xmlns:a16="http://schemas.microsoft.com/office/drawing/2014/main" id="{A35057C9-64D8-493C-8641-8B65D2070A06}"/>
+              </a:ext>
+            </a:extLst>
+          </p:cNvPr>
+          <p:cNvSpPr>
+            <a:spLocks xmlns:a="http://schemas.openxmlformats.org/drawingml/2006/main" noGrp="1"/>
+          </p:cNvSpPr>
+          <p:nvPr/>
+        </p:nvSpPr>
+        <p:spPr>
+          <a:xfrm xmlns:a="http://schemas.openxmlformats.org/drawingml/2006/main">
+            <a:off x="390525" y="2000250"/>
+            <a:ext cx="10953750" cy="1238250"/>
+          </a:xfrm>
+          <a:prstGeom xmlns:a="http://schemas.openxmlformats.org/drawingml/2006/main" prst="rect">
+            <a:avLst/>
+          </a:prstGeom>
+          <a:noFill xmlns:a="http://schemas.openxmlformats.org/drawingml/2006/main"/>
+          <a:ln xmlns:a="http://schemas.openxmlformats.org/drawingml/2006/main" w="0">
+            <a:noFill/>
+            <a:prstDash val="solid"/>
+          </a:ln>
+        </p:spPr>
+        <p:txBody>
+          <a:bodyPr xmlns:a="http://schemas.openxmlformats.org/drawingml/2006/main" anchor="t">
+            <a:normAutofit fontScale="100000"/>
+          </a:bodyPr>
+          <a:lstStyle xmlns:a="http://schemas.openxmlformats.org/drawingml/2006/main"/>
+          <a:p xmlns:a="http://schemas.openxmlformats.org/drawingml/2006/main">
+            <a:pPr algn="l">
+              <a:defRPr sz="1950" b="0">
+                <a:solidFill>
+                  <a:srgbClr val="111111"/>
+                </a:solidFill>
+                <a:latin typeface="Helvetica Neue"/>
+                <a:ea typeface="Helvetica Neue"/>
+                <a:cs typeface="Helvetica Neue"/>
+              </a:defRPr>
+            </a:pPr>
+            <a:r>
+              <a:rPr sz="1950" b="0">
+                <a:solidFill>
+                  <a:srgbClr val="111111"/>
+                </a:solidFill>
+                <a:latin typeface="Helvetica Neue"/>
+                <a:ea typeface="Helvetica Neue"/>
+                <a:cs typeface="Helvetica Neue"/>
+              </a:rPr>
+              <a:t>Complete Lab 5's dispatch policy. For the MCP 2025-11-25 baseline, explain why a roots response cannot substitute for filesystem access controls.</a:t>
+            </a:r>
+          </a:p>
+        </p:txBody>
+      </p:sp>
+      <p:sp>
+        <p:nvSpPr>
+          <p:cNvPr id="7" name="practice-check">
+            <a:extLst xmlns:a="http://schemas.openxmlformats.org/drawingml/2006/main">
+              <a:ext uri="{FF2B5EF4-FFF2-40B4-BE49-F238E27FC236}">
+                <a16:creationId xmlns:a16="http://schemas.microsoft.com/office/drawing/2014/main" id="{56B74765-E347-4E39-8E0D-20832E6EE53F}"/>
+              </a:ext>
+            </a:extLst>
+          </p:cNvPr>
+          <p:cNvSpPr>
+            <a:spLocks xmlns:a="http://schemas.openxmlformats.org/drawingml/2006/main" noGrp="1"/>
+          </p:cNvSpPr>
+          <p:nvPr/>
+        </p:nvSpPr>
+        <p:spPr>
+          <a:xfrm xmlns:a="http://schemas.openxmlformats.org/drawingml/2006/main">
+            <a:off x="390525" y="3381375"/>
+            <a:ext cx="10953750" cy="1095375"/>
+          </a:xfrm>
+          <a:prstGeom xmlns:a="http://schemas.openxmlformats.org/drawingml/2006/main" prst="rect">
+            <a:avLst/>
+          </a:prstGeom>
+          <a:noFill xmlns:a="http://schemas.openxmlformats.org/drawingml/2006/main"/>
+          <a:ln xmlns:a="http://schemas.openxmlformats.org/drawingml/2006/main" w="0">
+            <a:noFill/>
+            <a:prstDash val="solid"/>
+          </a:ln>
+        </p:spPr>
+        <p:txBody>
+          <a:bodyPr xmlns:a="http://schemas.openxmlformats.org/drawingml/2006/main" anchor="t">
+            <a:normAutofit fontScale="100000"/>
+          </a:bodyPr>
+          <a:lstStyle xmlns:a="http://schemas.openxmlformats.org/drawingml/2006/main"/>
+          <a:p xmlns:a="http://schemas.openxmlformats.org/drawingml/2006/main">
+            <a:pPr algn="l">
+              <a:defRPr sz="1800" b="0">
+                <a:solidFill>
+                  <a:srgbClr val="5B5B57"/>
+                </a:solidFill>
+                <a:latin typeface="Helvetica Neue"/>
+                <a:ea typeface="Helvetica Neue"/>
+                <a:cs typeface="Helvetica Neue"/>
+              </a:defRPr>
+            </a:pPr>
+            <a:r>
+              <a:rPr sz="1800" b="0">
+                <a:solidFill>
+                  <a:srgbClr val="5B5B57"/>
+                </a:solidFill>
+                <a:latin typeface="Helvetica Neue"/>
+                <a:ea typeface="Helvetica Neue"/>
+                <a:cs typeface="Helvetica Neue"/>
+              </a:rPr>
+              <a:t>Reject booleans in numeric fields, nonfinite values, and oversized input. Name the component that enforces each permission.</a:t>
+            </a:r>
+          </a:p>
+        </p:txBody>
+      </p:sp>
+      <p:sp>
+        <p:nvSpPr>
+          <p:cNvPr id="8" name="practice-readings">
+            <a:extLst xmlns:a="http://schemas.openxmlformats.org/drawingml/2006/main">
+              <a:ext uri="{FF2B5EF4-FFF2-40B4-BE49-F238E27FC236}">
+                <a16:creationId xmlns:a16="http://schemas.microsoft.com/office/drawing/2014/main" id="{B3719561-A760-449D-B30F-745C97958069}"/>
+              </a:ext>
+            </a:extLst>
+          </p:cNvPr>
+          <p:cNvSpPr>
+            <a:spLocks xmlns:a="http://schemas.openxmlformats.org/drawingml/2006/main" noGrp="1"/>
+          </p:cNvSpPr>
+          <p:nvPr/>
+        </p:nvSpPr>
+        <p:spPr>
+          <a:xfrm xmlns:a="http://schemas.openxmlformats.org/drawingml/2006/main">
+            <a:off x="390525" y="4667250"/>
+            <a:ext cx="10953750" cy="1000125"/>
+          </a:xfrm>
+          <a:prstGeom xmlns:a="http://schemas.openxmlformats.org/drawingml/2006/main" prst="rect">
+            <a:avLst/>
+          </a:prstGeom>
+          <a:noFill xmlns:a="http://schemas.openxmlformats.org/drawingml/2006/main"/>
+          <a:ln xmlns:a="http://schemas.openxmlformats.org/drawingml/2006/main" w="0">
+            <a:noFill/>
+            <a:prstDash val="solid"/>
+          </a:ln>
+        </p:spPr>
+        <p:txBody>
+          <a:bodyPr xmlns:a="http://schemas.openxmlformats.org/drawingml/2006/main" anchor="t">
+            <a:normAutofit fontScale="100000"/>
+          </a:bodyPr>
+          <a:lstStyle xmlns:a="http://schemas.openxmlformats.org/drawingml/2006/main"/>
+          <a:p xmlns:a="http://schemas.openxmlformats.org/drawingml/2006/main">
+            <a:pPr algn="l">
+              <a:defRPr sz="1425" b="0">
+                <a:solidFill>
+                  <a:srgbClr val="111111"/>
+                </a:solidFill>
+                <a:latin typeface="Helvetica Neue"/>
+                <a:ea typeface="Helvetica Neue"/>
+                <a:cs typeface="Helvetica Neue"/>
+              </a:defRPr>
+            </a:pPr>
+            <a:r>
+              <a:rPr sz="1425" b="0">
+                <a:solidFill>
+                  <a:srgbClr val="111111"/>
+                </a:solidFill>
+                <a:latin typeface="Helvetica Neue"/>
+                <a:ea typeface="Helvetica Neue"/>
+                <a:cs typeface="Helvetica Neue"/>
+              </a:rPr>
+              <a:t>S1  Gemini function calling</a:t>
+            </a:r>
+          </a:p>
+          <a:p xmlns:a="http://schemas.openxmlformats.org/drawingml/2006/main">
+            <a:pPr algn="l">
+              <a:defRPr sz="1425" b="0">
+                <a:solidFill>
+                  <a:srgbClr val="111111"/>
+                </a:solidFill>
+                <a:latin typeface="Helvetica Neue"/>
+                <a:ea typeface="Helvetica Neue"/>
+                <a:cs typeface="Helvetica Neue"/>
+              </a:defRPr>
+            </a:pPr>
+            <a:r>
+              <a:rPr sz="1425" b="0">
+                <a:solidFill>
+                  <a:srgbClr val="111111"/>
+                </a:solidFill>
+                <a:latin typeface="Helvetica Neue"/>
+                <a:ea typeface="Helvetica Neue"/>
+                <a:cs typeface="Helvetica Neue"/>
+              </a:rPr>
+              <a:t>S2  OpenAI Agents SDK model integration</a:t>
+            </a:r>
+          </a:p>
+          <a:p xmlns:a="http://schemas.openxmlformats.org/drawingml/2006/main">
+            <a:pPr algn="l">
+              <a:defRPr sz="1425" b="0">
+                <a:solidFill>
+                  <a:srgbClr val="111111"/>
+                </a:solidFill>
+                <a:latin typeface="Helvetica Neue"/>
+                <a:ea typeface="Helvetica Neue"/>
+                <a:cs typeface="Helvetica Neue"/>
+              </a:defRPr>
+            </a:pPr>
+            <a:r>
+              <a:rPr sz="1425" b="0">
+                <a:solidFill>
+                  <a:srgbClr val="111111"/>
+                </a:solidFill>
+                <a:latin typeface="Helvetica Neue"/>
+                <a:ea typeface="Helvetica Neue"/>
+                <a:cs typeface="Helvetica Neue"/>
+              </a:rPr>
+              <a:t>S5  MCP roots specification 2025-11-25</a:t>
+            </a:r>
+          </a:p>
+        </p:txBody>
+      </p:sp>
+      <p:sp>
+        <p:nvSpPr>
+          <p:cNvPr id="9" name="practice-lab">
+            <a:extLst xmlns:a="http://schemas.openxmlformats.org/drawingml/2006/main">
+              <a:ext uri="{FF2B5EF4-FFF2-40B4-BE49-F238E27FC236}">
+                <a16:creationId xmlns:a16="http://schemas.microsoft.com/office/drawing/2014/main" id="{6E14BD8A-4B6A-4381-9174-F43DE898F5E4}"/>
+              </a:ext>
+            </a:extLst>
+          </p:cNvPr>
+          <p:cNvSpPr>
+            <a:spLocks xmlns:a="http://schemas.openxmlformats.org/drawingml/2006/main" noGrp="1"/>
+          </p:cNvSpPr>
+          <p:nvPr/>
+        </p:nvSpPr>
+        <p:spPr>
+          <a:xfrm xmlns:a="http://schemas.openxmlformats.org/drawingml/2006/main">
+            <a:off x="390525" y="5857875"/>
+            <a:ext cx="10953750" cy="266700"/>
+          </a:xfrm>
+          <a:prstGeom xmlns:a="http://schemas.openxmlformats.org/drawingml/2006/main" prst="rect">
+            <a:avLst/>
+          </a:prstGeom>
+          <a:noFill xmlns:a="http://schemas.openxmlformats.org/drawingml/2006/main"/>
+          <a:ln xmlns:a="http://schemas.openxmlformats.org/drawingml/2006/main" w="0">
+            <a:noFill/>
+            <a:prstDash val="solid"/>
+          </a:ln>
+        </p:spPr>
+        <p:txBody>
+          <a:bodyPr xmlns:a="http://schemas.openxmlformats.org/drawingml/2006/main" anchor="t">
+            <a:normAutofit fontScale="90196"/>
+          </a:bodyPr>
+          <a:lstStyle xmlns:a="http://schemas.openxmlformats.org/drawingml/2006/main"/>
+          <a:p xmlns:a="http://schemas.openxmlformats.org/drawingml/2006/main">
+            <a:pPr algn="l">
+              <a:defRPr sz="1275" b="0">
+                <a:solidFill>
+                  <a:srgbClr val="5B5B57"/>
+                </a:solidFill>
+                <a:latin typeface="Helvetica Neue"/>
+                <a:ea typeface="Helvetica Neue"/>
+                <a:cs typeface="Helvetica Neue"/>
+              </a:defRPr>
+            </a:pPr>
+            <a:r>
+              <a:rPr sz="1275" b="0">
+                <a:solidFill>
+                  <a:srgbClr val="5B5B57"/>
+                </a:solidFill>
+                <a:latin typeface="Helvetica Neue"/>
+                <a:ea typeface="Helvetica Neue"/>
+                <a:cs typeface="Helvetica Neue"/>
+              </a:rPr>
+              <a:t>labs/05_gemini_bounded_tools.ipynb</a:t>
+            </a:r>
+          </a:p>
+        </p:txBody>
+      </p:sp>
+    </p:spTree>
+    <p:extLst>
+      <p:ext uri="{BB962C8B-B14F-4D97-AF65-F5344CB8AC3E}">
+        <p14:creationId xmlns:p14="http://schemas.microsoft.com/office/powerpoint/2010/main" val="1816041549"/>
       </p:ext>
     </p:extLst>
   </p:cSld>
@@ -3016,7 +5350,7 @@
           <p:cNvPr id="14" name="accent-line">
             <a:extLst xmlns:a="http://schemas.openxmlformats.org/drawingml/2006/main">
               <a:ext uri="{FF2B5EF4-FFF2-40B4-BE49-F238E27FC236}">
-                <a16:creationId xmlns:a16="http://schemas.microsoft.com/office/drawing/2014/main" id="{ACFA995A-739C-40D1-BF59-8CA3A580CD05}"/>
+                <a16:creationId xmlns:a16="http://schemas.microsoft.com/office/drawing/2014/main" id="{18B58ED0-5AB2-48D7-B45B-42B755733D20}"/>
               </a:ext>
             </a:extLst>
           </p:cNvPr>
@@ -3049,7 +5383,7 @@
           <p:cNvPr id="2" name="chapter-label">
             <a:extLst xmlns:a="http://schemas.openxmlformats.org/drawingml/2006/main">
               <a:ext uri="{FF2B5EF4-FFF2-40B4-BE49-F238E27FC236}">
-                <a16:creationId xmlns:a16="http://schemas.microsoft.com/office/drawing/2014/main" id="{EF49084A-7A84-451D-A307-2A4E946B8873}"/>
+                <a16:creationId xmlns:a16="http://schemas.microsoft.com/office/drawing/2014/main" id="{7CA1CEE2-AA25-4864-8501-DAB42FCC5B22}"/>
               </a:ext>
             </a:extLst>
           </p:cNvPr>
@@ -3107,7 +5441,7 @@
           <p:cNvPr id="3" name="slide-number">
             <a:extLst xmlns:a="http://schemas.openxmlformats.org/drawingml/2006/main">
               <a:ext uri="{FF2B5EF4-FFF2-40B4-BE49-F238E27FC236}">
-                <a16:creationId xmlns:a16="http://schemas.microsoft.com/office/drawing/2014/main" id="{97CFB95D-D494-4CB5-8910-1455A24EA398}"/>
+                <a16:creationId xmlns:a16="http://schemas.microsoft.com/office/drawing/2014/main" id="{2110BDE1-D1A1-4342-BBF7-265C83244D3D}"/>
               </a:ext>
             </a:extLst>
           </p:cNvPr>
@@ -3165,7 +5499,7 @@
           <p:cNvPr id="4" name="chapter-footer">
             <a:extLst xmlns:a="http://schemas.openxmlformats.org/drawingml/2006/main">
               <a:ext uri="{FF2B5EF4-FFF2-40B4-BE49-F238E27FC236}">
-                <a16:creationId xmlns:a16="http://schemas.microsoft.com/office/drawing/2014/main" id="{E53A0CD7-DF19-4334-8BCC-D5B3FAE626D3}"/>
+                <a16:creationId xmlns:a16="http://schemas.microsoft.com/office/drawing/2014/main" id="{7958D0F4-710E-487A-A69A-CC35FFDD76A6}"/>
               </a:ext>
             </a:extLst>
           </p:cNvPr>
@@ -3223,7 +5557,7 @@
           <p:cNvPr id="5" name="objectives-title">
             <a:extLst xmlns:a="http://schemas.openxmlformats.org/drawingml/2006/main">
               <a:ext uri="{FF2B5EF4-FFF2-40B4-BE49-F238E27FC236}">
-                <a16:creationId xmlns:a16="http://schemas.microsoft.com/office/drawing/2014/main" id="{D198162B-5E2D-42B0-A8B9-BBD0B3C17DF2}"/>
+                <a16:creationId xmlns:a16="http://schemas.microsoft.com/office/drawing/2014/main" id="{8F0BEED4-E7DD-4025-9A36-1710C7FF413F}"/>
               </a:ext>
             </a:extLst>
           </p:cNvPr>
@@ -3281,7 +5615,7 @@
           <p:cNvPr id="6" name="objective-number-1">
             <a:extLst xmlns:a="http://schemas.openxmlformats.org/drawingml/2006/main">
               <a:ext uri="{FF2B5EF4-FFF2-40B4-BE49-F238E27FC236}">
-                <a16:creationId xmlns:a16="http://schemas.microsoft.com/office/drawing/2014/main" id="{15A04EEA-4C7F-458F-9051-EC29C0244183}"/>
+                <a16:creationId xmlns:a16="http://schemas.microsoft.com/office/drawing/2014/main" id="{E35B3B08-B75B-4686-A6BF-DC8887D40D3A}"/>
               </a:ext>
             </a:extLst>
           </p:cNvPr>
@@ -3339,7 +5673,7 @@
           <p:cNvPr id="7" name="objective-1">
             <a:extLst xmlns:a="http://schemas.openxmlformats.org/drawingml/2006/main">
               <a:ext uri="{FF2B5EF4-FFF2-40B4-BE49-F238E27FC236}">
-                <a16:creationId xmlns:a16="http://schemas.microsoft.com/office/drawing/2014/main" id="{67B25A13-257B-4FD0-AE2C-3971FA7B898B}"/>
+                <a16:creationId xmlns:a16="http://schemas.microsoft.com/office/drawing/2014/main" id="{51660D29-ED6B-4692-AC21-6BDC8E0EF8EE}"/>
               </a:ext>
             </a:extLst>
           </p:cNvPr>
@@ -3397,7 +5731,7 @@
           <p:cNvPr id="8" name="objective-number-2">
             <a:extLst xmlns:a="http://schemas.openxmlformats.org/drawingml/2006/main">
               <a:ext uri="{FF2B5EF4-FFF2-40B4-BE49-F238E27FC236}">
-                <a16:creationId xmlns:a16="http://schemas.microsoft.com/office/drawing/2014/main" id="{FEC9242C-D300-428B-BFC0-787FB3B5145C}"/>
+                <a16:creationId xmlns:a16="http://schemas.microsoft.com/office/drawing/2014/main" id="{CC4E9756-CCB1-4D2E-BF61-0A64568DD790}"/>
               </a:ext>
             </a:extLst>
           </p:cNvPr>
@@ -3455,7 +5789,7 @@
           <p:cNvPr id="9" name="objective-2">
             <a:extLst xmlns:a="http://schemas.openxmlformats.org/drawingml/2006/main">
               <a:ext uri="{FF2B5EF4-FFF2-40B4-BE49-F238E27FC236}">
-                <a16:creationId xmlns:a16="http://schemas.microsoft.com/office/drawing/2014/main" id="{F5E34CF5-6BC1-407B-9BFA-7326C779EE3F}"/>
+                <a16:creationId xmlns:a16="http://schemas.microsoft.com/office/drawing/2014/main" id="{CFC3853B-FF27-432B-B1D6-C3955C5B8DE9}"/>
               </a:ext>
             </a:extLst>
           </p:cNvPr>
@@ -3513,7 +5847,7 @@
           <p:cNvPr id="10" name="objective-number-3">
             <a:extLst xmlns:a="http://schemas.openxmlformats.org/drawingml/2006/main">
               <a:ext uri="{FF2B5EF4-FFF2-40B4-BE49-F238E27FC236}">
-                <a16:creationId xmlns:a16="http://schemas.microsoft.com/office/drawing/2014/main" id="{97637C37-9DB0-420B-A5DC-CA9BAF266373}"/>
+                <a16:creationId xmlns:a16="http://schemas.microsoft.com/office/drawing/2014/main" id="{B97B89B1-0C40-4E5A-BB37-885BE322F938}"/>
               </a:ext>
             </a:extLst>
           </p:cNvPr>
@@ -3571,7 +5905,7 @@
           <p:cNvPr id="11" name="objective-3">
             <a:extLst xmlns:a="http://schemas.openxmlformats.org/drawingml/2006/main">
               <a:ext uri="{FF2B5EF4-FFF2-40B4-BE49-F238E27FC236}">
-                <a16:creationId xmlns:a16="http://schemas.microsoft.com/office/drawing/2014/main" id="{7ACAEF98-9CAC-4006-B5C0-052B896847F5}"/>
+                <a16:creationId xmlns:a16="http://schemas.microsoft.com/office/drawing/2014/main" id="{588D5C6D-D5CF-4ECF-A90D-C3E97A9730F1}"/>
               </a:ext>
             </a:extLst>
           </p:cNvPr>
@@ -3629,7 +5963,7 @@
           <p:cNvPr id="12" name="objective-number-4">
             <a:extLst xmlns:a="http://schemas.openxmlformats.org/drawingml/2006/main">
               <a:ext uri="{FF2B5EF4-FFF2-40B4-BE49-F238E27FC236}">
-                <a16:creationId xmlns:a16="http://schemas.microsoft.com/office/drawing/2014/main" id="{8F85DE63-25AF-4230-9B55-41E418B6D4B0}"/>
+                <a16:creationId xmlns:a16="http://schemas.microsoft.com/office/drawing/2014/main" id="{88E44937-16EB-490D-AAB0-55EB3008D6BF}"/>
               </a:ext>
             </a:extLst>
           </p:cNvPr>
@@ -3687,7 +6021,7 @@
           <p:cNvPr id="13" name="objective-4">
             <a:extLst xmlns:a="http://schemas.openxmlformats.org/drawingml/2006/main">
               <a:ext uri="{FF2B5EF4-FFF2-40B4-BE49-F238E27FC236}">
-                <a16:creationId xmlns:a16="http://schemas.microsoft.com/office/drawing/2014/main" id="{AD7C2C6A-F0B4-4195-876F-0CA619BC16EC}"/>
+                <a16:creationId xmlns:a16="http://schemas.microsoft.com/office/drawing/2014/main" id="{02DE8B1F-5F02-4D3A-84E9-AFBB9D40580F}"/>
               </a:ext>
             </a:extLst>
           </p:cNvPr>
@@ -3743,7 +6077,7 @@
     </p:spTree>
     <p:extLst>
       <p:ext uri="{BB962C8B-B14F-4D97-AF65-F5344CB8AC3E}">
-        <p14:creationId xmlns:p14="http://schemas.microsoft.com/office/powerpoint/2010/main" val="1577315084"/>
+        <p14:creationId xmlns:p14="http://schemas.microsoft.com/office/powerpoint/2010/main" val="667245416"/>
       </p:ext>
     </p:extLst>
   </p:cSld>
@@ -3774,7 +6108,7 @@
           <p:cNvPr id="9" name="accent-line">
             <a:extLst xmlns:a="http://schemas.openxmlformats.org/drawingml/2006/main">
               <a:ext uri="{FF2B5EF4-FFF2-40B4-BE49-F238E27FC236}">
-                <a16:creationId xmlns:a16="http://schemas.microsoft.com/office/drawing/2014/main" id="{639C41A1-8B84-4A3A-B0C6-D45AE5ABC2E0}"/>
+                <a16:creationId xmlns:a16="http://schemas.microsoft.com/office/drawing/2014/main" id="{236B9FC1-321D-4CCE-8640-5DB6FBF7AF75}"/>
               </a:ext>
             </a:extLst>
           </p:cNvPr>
@@ -3807,7 +6141,7 @@
           <p:cNvPr id="2" name="chapter-label">
             <a:extLst xmlns:a="http://schemas.openxmlformats.org/drawingml/2006/main">
               <a:ext uri="{FF2B5EF4-FFF2-40B4-BE49-F238E27FC236}">
-                <a16:creationId xmlns:a16="http://schemas.microsoft.com/office/drawing/2014/main" id="{4D749382-8127-469A-B7AF-784EA82BC06A}"/>
+                <a16:creationId xmlns:a16="http://schemas.microsoft.com/office/drawing/2014/main" id="{039128FD-5996-4CFC-A319-DC167BF2AAB0}"/>
               </a:ext>
             </a:extLst>
           </p:cNvPr>
@@ -3865,7 +6199,7 @@
           <p:cNvPr id="3" name="slide-number">
             <a:extLst xmlns:a="http://schemas.openxmlformats.org/drawingml/2006/main">
               <a:ext uri="{FF2B5EF4-FFF2-40B4-BE49-F238E27FC236}">
-                <a16:creationId xmlns:a16="http://schemas.microsoft.com/office/drawing/2014/main" id="{778CEF16-86D1-46DA-9F14-2133CF33E206}"/>
+                <a16:creationId xmlns:a16="http://schemas.microsoft.com/office/drawing/2014/main" id="{C6EE8FEF-0F1E-490B-A8B4-C64037D2A17F}"/>
               </a:ext>
             </a:extLst>
           </p:cNvPr>
@@ -3923,7 +6257,7 @@
           <p:cNvPr id="4" name="chapter-footer">
             <a:extLst xmlns:a="http://schemas.openxmlformats.org/drawingml/2006/main">
               <a:ext uri="{FF2B5EF4-FFF2-40B4-BE49-F238E27FC236}">
-                <a16:creationId xmlns:a16="http://schemas.microsoft.com/office/drawing/2014/main" id="{17F3F65D-E027-4079-BE52-B6B74648591D}"/>
+                <a16:creationId xmlns:a16="http://schemas.microsoft.com/office/drawing/2014/main" id="{03241962-8375-4935-A4B6-100BD57FDCF9}"/>
               </a:ext>
             </a:extLst>
           </p:cNvPr>
@@ -3981,7 +6315,7 @@
           <p:cNvPr id="5" name="section-title">
             <a:extLst xmlns:a="http://schemas.openxmlformats.org/drawingml/2006/main">
               <a:ext uri="{FF2B5EF4-FFF2-40B4-BE49-F238E27FC236}">
-                <a16:creationId xmlns:a16="http://schemas.microsoft.com/office/drawing/2014/main" id="{A5BC9F3E-51F9-4A5F-9499-177F680F5204}"/>
+                <a16:creationId xmlns:a16="http://schemas.microsoft.com/office/drawing/2014/main" id="{EE8F8690-46C9-427A-8ECD-57EA3812FCCB}"/>
               </a:ext>
             </a:extLst>
           </p:cNvPr>
@@ -4039,7 +6373,7 @@
           <p:cNvPr id="6" name="section-explanation">
             <a:extLst xmlns:a="http://schemas.openxmlformats.org/drawingml/2006/main">
               <a:ext uri="{FF2B5EF4-FFF2-40B4-BE49-F238E27FC236}">
-                <a16:creationId xmlns:a16="http://schemas.microsoft.com/office/drawing/2014/main" id="{59C5F2A2-B9FC-429B-AEC5-3B2407E53579}"/>
+                <a16:creationId xmlns:a16="http://schemas.microsoft.com/office/drawing/2014/main" id="{792D4340-0B71-4073-868E-54B6536B0E2E}"/>
               </a:ext>
             </a:extLst>
           </p:cNvPr>
@@ -4097,7 +6431,7 @@
           <p:cNvPr id="7" name="column-rule">
             <a:extLst xmlns:a="http://schemas.openxmlformats.org/drawingml/2006/main">
               <a:ext uri="{FF2B5EF4-FFF2-40B4-BE49-F238E27FC236}">
-                <a16:creationId xmlns:a16="http://schemas.microsoft.com/office/drawing/2014/main" id="{B23FD8C9-6B1C-4BE1-A81D-CA26B43BCA73}"/>
+                <a16:creationId xmlns:a16="http://schemas.microsoft.com/office/drawing/2014/main" id="{B846B7DC-410C-45BE-ACA9-D1387074AF17}"/>
               </a:ext>
             </a:extLst>
           </p:cNvPr>
@@ -4130,7 +6464,7 @@
           <p:cNvPr id="8" name="section-points">
             <a:extLst xmlns:a="http://schemas.openxmlformats.org/drawingml/2006/main">
               <a:ext uri="{FF2B5EF4-FFF2-40B4-BE49-F238E27FC236}">
-                <a16:creationId xmlns:a16="http://schemas.microsoft.com/office/drawing/2014/main" id="{73234070-A905-47BE-9177-7E322348DB6E}"/>
+                <a16:creationId xmlns:a16="http://schemas.microsoft.com/office/drawing/2014/main" id="{8310B6BD-8680-4B17-9900-DC7347BEA8AE}"/>
               </a:ext>
             </a:extLst>
           </p:cNvPr>
@@ -4242,7 +6576,7 @@
     </p:spTree>
     <p:extLst>
       <p:ext uri="{BB962C8B-B14F-4D97-AF65-F5344CB8AC3E}">
-        <p14:creationId xmlns:p14="http://schemas.microsoft.com/office/powerpoint/2010/main" val="38080757"/>
+        <p14:creationId xmlns:p14="http://schemas.microsoft.com/office/powerpoint/2010/main" val="1393380632"/>
       </p:ext>
     </p:extLst>
   </p:cSld>
@@ -4273,7 +6607,7 @@
           <p:cNvPr id="15" name="accent-line">
             <a:extLst xmlns:a="http://schemas.openxmlformats.org/drawingml/2006/main">
               <a:ext uri="{FF2B5EF4-FFF2-40B4-BE49-F238E27FC236}">
-                <a16:creationId xmlns:a16="http://schemas.microsoft.com/office/drawing/2014/main" id="{E2E31CAB-DD28-4081-83DF-71FAAA72262B}"/>
+                <a16:creationId xmlns:a16="http://schemas.microsoft.com/office/drawing/2014/main" id="{07087C35-3239-4A5F-855C-13C9B204F20C}"/>
               </a:ext>
             </a:extLst>
           </p:cNvPr>
@@ -4306,7 +6640,7 @@
           <p:cNvPr id="2" name="chapter-label">
             <a:extLst xmlns:a="http://schemas.openxmlformats.org/drawingml/2006/main">
               <a:ext uri="{FF2B5EF4-FFF2-40B4-BE49-F238E27FC236}">
-                <a16:creationId xmlns:a16="http://schemas.microsoft.com/office/drawing/2014/main" id="{74E36379-74EE-411D-A6A9-45685F0B67F7}"/>
+                <a16:creationId xmlns:a16="http://schemas.microsoft.com/office/drawing/2014/main" id="{B0C31DF0-C648-4659-8EF5-377D3E3EFF26}"/>
               </a:ext>
             </a:extLst>
           </p:cNvPr>
@@ -4364,7 +6698,7 @@
           <p:cNvPr id="3" name="slide-number">
             <a:extLst xmlns:a="http://schemas.openxmlformats.org/drawingml/2006/main">
               <a:ext uri="{FF2B5EF4-FFF2-40B4-BE49-F238E27FC236}">
-                <a16:creationId xmlns:a16="http://schemas.microsoft.com/office/drawing/2014/main" id="{B7440F1D-3F35-458A-9B55-0C6C68E2A0C1}"/>
+                <a16:creationId xmlns:a16="http://schemas.microsoft.com/office/drawing/2014/main" id="{E7599DDB-0763-4530-85EB-7FAABCABA793}"/>
               </a:ext>
             </a:extLst>
           </p:cNvPr>
@@ -4422,7 +6756,7 @@
           <p:cNvPr id="4" name="chapter-footer">
             <a:extLst xmlns:a="http://schemas.openxmlformats.org/drawingml/2006/main">
               <a:ext uri="{FF2B5EF4-FFF2-40B4-BE49-F238E27FC236}">
-                <a16:creationId xmlns:a16="http://schemas.microsoft.com/office/drawing/2014/main" id="{68120DB2-6F52-47FE-9860-A5F4270441D6}"/>
+                <a16:creationId xmlns:a16="http://schemas.microsoft.com/office/drawing/2014/main" id="{C591DB8F-9BA7-4B50-89EA-B58B2C4695BE}"/>
               </a:ext>
             </a:extLst>
           </p:cNvPr>
@@ -4480,7 +6814,7 @@
           <p:cNvPr id="5" name="section-title">
             <a:extLst xmlns:a="http://schemas.openxmlformats.org/drawingml/2006/main">
               <a:ext uri="{FF2B5EF4-FFF2-40B4-BE49-F238E27FC236}">
-                <a16:creationId xmlns:a16="http://schemas.microsoft.com/office/drawing/2014/main" id="{D49A5BD5-5A06-4515-B0F2-1A3E8210074D}"/>
+                <a16:creationId xmlns:a16="http://schemas.microsoft.com/office/drawing/2014/main" id="{2DC3DBB2-D1EE-4C6F-B1D8-B876C1E7D9E3}"/>
               </a:ext>
             </a:extLst>
           </p:cNvPr>
@@ -4538,7 +6872,7 @@
           <p:cNvPr id="6" name="section-explanation">
             <a:extLst xmlns:a="http://schemas.openxmlformats.org/drawingml/2006/main">
               <a:ext uri="{FF2B5EF4-FFF2-40B4-BE49-F238E27FC236}">
-                <a16:creationId xmlns:a16="http://schemas.microsoft.com/office/drawing/2014/main" id="{35A39FA9-EE98-4C12-BAE2-78E33110466F}"/>
+                <a16:creationId xmlns:a16="http://schemas.microsoft.com/office/drawing/2014/main" id="{C5240E55-5A9D-4B7E-864F-A996508B9616}"/>
               </a:ext>
             </a:extLst>
           </p:cNvPr>
@@ -4596,7 +6930,7 @@
           <p:cNvPr id="7" name="point-band-1">
             <a:extLst xmlns:a="http://schemas.openxmlformats.org/drawingml/2006/main">
               <a:ext uri="{FF2B5EF4-FFF2-40B4-BE49-F238E27FC236}">
-                <a16:creationId xmlns:a16="http://schemas.microsoft.com/office/drawing/2014/main" id="{DBD90DED-74CD-495E-91D2-1378D3E1814C}"/>
+                <a16:creationId xmlns:a16="http://schemas.microsoft.com/office/drawing/2014/main" id="{CF756073-66E1-4B0C-B0BF-7A55EDC192BF}"/>
               </a:ext>
             </a:extLst>
           </p:cNvPr>
@@ -4629,7 +6963,7 @@
           <p:cNvPr id="8" name="point-1">
             <a:extLst xmlns:a="http://schemas.openxmlformats.org/drawingml/2006/main">
               <a:ext uri="{FF2B5EF4-FFF2-40B4-BE49-F238E27FC236}">
-                <a16:creationId xmlns:a16="http://schemas.microsoft.com/office/drawing/2014/main" id="{11E36EDE-4FC9-4850-BF44-18FDBC9B7C77}"/>
+                <a16:creationId xmlns:a16="http://schemas.microsoft.com/office/drawing/2014/main" id="{08FC934D-3802-4AF9-9386-47C51D26C7C1}"/>
               </a:ext>
             </a:extLst>
           </p:cNvPr>
@@ -4687,7 +7021,7 @@
           <p:cNvPr id="9" name="point-band-2">
             <a:extLst xmlns:a="http://schemas.openxmlformats.org/drawingml/2006/main">
               <a:ext uri="{FF2B5EF4-FFF2-40B4-BE49-F238E27FC236}">
-                <a16:creationId xmlns:a16="http://schemas.microsoft.com/office/drawing/2014/main" id="{D2BEECF1-2ED2-4AFC-B9FA-F5702938617D}"/>
+                <a16:creationId xmlns:a16="http://schemas.microsoft.com/office/drawing/2014/main" id="{9F0A1CDC-897B-4630-AC0B-48941A81AAC3}"/>
               </a:ext>
             </a:extLst>
           </p:cNvPr>
@@ -4720,7 +7054,7 @@
           <p:cNvPr id="10" name="point-2">
             <a:extLst xmlns:a="http://schemas.openxmlformats.org/drawingml/2006/main">
               <a:ext uri="{FF2B5EF4-FFF2-40B4-BE49-F238E27FC236}">
-                <a16:creationId xmlns:a16="http://schemas.microsoft.com/office/drawing/2014/main" id="{AA86E871-E8B8-4F4D-B7ED-D2A836D7F807}"/>
+                <a16:creationId xmlns:a16="http://schemas.microsoft.com/office/drawing/2014/main" id="{0F5FFE45-34A4-4B5B-8801-76D406BB144D}"/>
               </a:ext>
             </a:extLst>
           </p:cNvPr>
@@ -4778,7 +7112,7 @@
           <p:cNvPr id="11" name="point-band-3">
             <a:extLst xmlns:a="http://schemas.openxmlformats.org/drawingml/2006/main">
               <a:ext uri="{FF2B5EF4-FFF2-40B4-BE49-F238E27FC236}">
-                <a16:creationId xmlns:a16="http://schemas.microsoft.com/office/drawing/2014/main" id="{F0E6FB36-6C77-4161-98B4-6A5248657507}"/>
+                <a16:creationId xmlns:a16="http://schemas.microsoft.com/office/drawing/2014/main" id="{FE9CA975-92B7-428D-BEBE-127528620546}"/>
               </a:ext>
             </a:extLst>
           </p:cNvPr>
@@ -4811,7 +7145,7 @@
           <p:cNvPr id="12" name="point-3">
             <a:extLst xmlns:a="http://schemas.openxmlformats.org/drawingml/2006/main">
               <a:ext uri="{FF2B5EF4-FFF2-40B4-BE49-F238E27FC236}">
-                <a16:creationId xmlns:a16="http://schemas.microsoft.com/office/drawing/2014/main" id="{2B1F89D5-394F-43B1-8BF2-EC423EF756F8}"/>
+                <a16:creationId xmlns:a16="http://schemas.microsoft.com/office/drawing/2014/main" id="{CCA9312A-853B-463A-B89F-6CE1A334CC5E}"/>
               </a:ext>
             </a:extLst>
           </p:cNvPr>
@@ -4869,7 +7203,7 @@
           <p:cNvPr id="13" name="point-band-4">
             <a:extLst xmlns:a="http://schemas.openxmlformats.org/drawingml/2006/main">
               <a:ext uri="{FF2B5EF4-FFF2-40B4-BE49-F238E27FC236}">
-                <a16:creationId xmlns:a16="http://schemas.microsoft.com/office/drawing/2014/main" id="{EFBBA98E-E8A0-4985-9CF7-94A4DBCB4528}"/>
+                <a16:creationId xmlns:a16="http://schemas.microsoft.com/office/drawing/2014/main" id="{6FBA096B-870C-4F93-A719-41540585304F}"/>
               </a:ext>
             </a:extLst>
           </p:cNvPr>
@@ -4902,7 +7236,7 @@
           <p:cNvPr id="14" name="point-4">
             <a:extLst xmlns:a="http://schemas.openxmlformats.org/drawingml/2006/main">
               <a:ext uri="{FF2B5EF4-FFF2-40B4-BE49-F238E27FC236}">
-                <a16:creationId xmlns:a16="http://schemas.microsoft.com/office/drawing/2014/main" id="{FAD3AAFE-ECCA-485B-8711-A2C904C07B1E}"/>
+                <a16:creationId xmlns:a16="http://schemas.microsoft.com/office/drawing/2014/main" id="{7FB4CB80-4453-4EE4-99F6-0F14B72488C7}"/>
               </a:ext>
             </a:extLst>
           </p:cNvPr>
@@ -4958,7 +7292,7 @@
     </p:spTree>
     <p:extLst>
       <p:ext uri="{BB962C8B-B14F-4D97-AF65-F5344CB8AC3E}">
-        <p14:creationId xmlns:p14="http://schemas.microsoft.com/office/powerpoint/2010/main" val="1420356113"/>
+        <p14:creationId xmlns:p14="http://schemas.microsoft.com/office/powerpoint/2010/main" val="1624738855"/>
       </p:ext>
     </p:extLst>
   </p:cSld>
@@ -4989,7 +7323,7 @@
           <p:cNvPr id="9" name="accent-line">
             <a:extLst xmlns:a="http://schemas.openxmlformats.org/drawingml/2006/main">
               <a:ext uri="{FF2B5EF4-FFF2-40B4-BE49-F238E27FC236}">
-                <a16:creationId xmlns:a16="http://schemas.microsoft.com/office/drawing/2014/main" id="{5A4E452A-6A39-4018-87F1-596FAC34A943}"/>
+                <a16:creationId xmlns:a16="http://schemas.microsoft.com/office/drawing/2014/main" id="{96963BEB-C30A-4F08-B7EC-22CC0FB8B853}"/>
               </a:ext>
             </a:extLst>
           </p:cNvPr>
@@ -5022,7 +7356,7 @@
           <p:cNvPr id="2" name="chapter-label">
             <a:extLst xmlns:a="http://schemas.openxmlformats.org/drawingml/2006/main">
               <a:ext uri="{FF2B5EF4-FFF2-40B4-BE49-F238E27FC236}">
-                <a16:creationId xmlns:a16="http://schemas.microsoft.com/office/drawing/2014/main" id="{342FC7FA-156E-47F5-A6FD-5CFFAD25E1DD}"/>
+                <a16:creationId xmlns:a16="http://schemas.microsoft.com/office/drawing/2014/main" id="{07CD0665-2CB4-4D3B-9A85-4E366061BDB5}"/>
               </a:ext>
             </a:extLst>
           </p:cNvPr>
@@ -5080,7 +7414,7 @@
           <p:cNvPr id="3" name="slide-number">
             <a:extLst xmlns:a="http://schemas.openxmlformats.org/drawingml/2006/main">
               <a:ext uri="{FF2B5EF4-FFF2-40B4-BE49-F238E27FC236}">
-                <a16:creationId xmlns:a16="http://schemas.microsoft.com/office/drawing/2014/main" id="{BD0B091E-08FD-4232-809F-0B8459AB135C}"/>
+                <a16:creationId xmlns:a16="http://schemas.microsoft.com/office/drawing/2014/main" id="{C18CE2BC-BD0B-44B6-A5D0-63E6D66C1D53}"/>
               </a:ext>
             </a:extLst>
           </p:cNvPr>
@@ -5138,7 +7472,7 @@
           <p:cNvPr id="4" name="chapter-footer">
             <a:extLst xmlns:a="http://schemas.openxmlformats.org/drawingml/2006/main">
               <a:ext uri="{FF2B5EF4-FFF2-40B4-BE49-F238E27FC236}">
-                <a16:creationId xmlns:a16="http://schemas.microsoft.com/office/drawing/2014/main" id="{D5EFBCE7-DCAD-48E1-97E7-B1FF2054CCBD}"/>
+                <a16:creationId xmlns:a16="http://schemas.microsoft.com/office/drawing/2014/main" id="{2BE67D2A-803F-4A9C-9EC0-1F100ADBA6F6}"/>
               </a:ext>
             </a:extLst>
           </p:cNvPr>
@@ -5196,7 +7530,7 @@
           <p:cNvPr id="5" name="section-title">
             <a:extLst xmlns:a="http://schemas.openxmlformats.org/drawingml/2006/main">
               <a:ext uri="{FF2B5EF4-FFF2-40B4-BE49-F238E27FC236}">
-                <a16:creationId xmlns:a16="http://schemas.microsoft.com/office/drawing/2014/main" id="{53F5F725-BD80-4D74-B89A-B1FA33268856}"/>
+                <a16:creationId xmlns:a16="http://schemas.microsoft.com/office/drawing/2014/main" id="{615B39FB-3806-4D08-BCFC-403C9CDD9E30}"/>
               </a:ext>
             </a:extLst>
           </p:cNvPr>
@@ -5254,7 +7588,7 @@
           <p:cNvPr id="6" name="section-explanation">
             <a:extLst xmlns:a="http://schemas.openxmlformats.org/drawingml/2006/main">
               <a:ext uri="{FF2B5EF4-FFF2-40B4-BE49-F238E27FC236}">
-                <a16:creationId xmlns:a16="http://schemas.microsoft.com/office/drawing/2014/main" id="{F76DFE33-7E15-4B4F-BE7C-F028A1BC729A}"/>
+                <a16:creationId xmlns:a16="http://schemas.microsoft.com/office/drawing/2014/main" id="{0BE60ACF-04E9-45D5-AE33-C2F393CC4A6F}"/>
               </a:ext>
             </a:extLst>
           </p:cNvPr>
@@ -5312,7 +7646,7 @@
           <p:cNvPr id="7" name="column-rule">
             <a:extLst xmlns:a="http://schemas.openxmlformats.org/drawingml/2006/main">
               <a:ext uri="{FF2B5EF4-FFF2-40B4-BE49-F238E27FC236}">
-                <a16:creationId xmlns:a16="http://schemas.microsoft.com/office/drawing/2014/main" id="{ED3803DA-4C54-4E1C-A12B-69E8DA458CF3}"/>
+                <a16:creationId xmlns:a16="http://schemas.microsoft.com/office/drawing/2014/main" id="{31FD18CC-6206-4116-81C0-E1AC53D791D9}"/>
               </a:ext>
             </a:extLst>
           </p:cNvPr>
@@ -5345,7 +7679,7 @@
           <p:cNvPr id="8" name="section-points">
             <a:extLst xmlns:a="http://schemas.openxmlformats.org/drawingml/2006/main">
               <a:ext uri="{FF2B5EF4-FFF2-40B4-BE49-F238E27FC236}">
-                <a16:creationId xmlns:a16="http://schemas.microsoft.com/office/drawing/2014/main" id="{4B9BBC87-8045-4168-918B-76EAB137AF60}"/>
+                <a16:creationId xmlns:a16="http://schemas.microsoft.com/office/drawing/2014/main" id="{F9CDEB8D-0BCF-423E-8755-227C38460336}"/>
               </a:ext>
             </a:extLst>
           </p:cNvPr>
@@ -5457,7 +7791,7 @@
     </p:spTree>
     <p:extLst>
       <p:ext uri="{BB962C8B-B14F-4D97-AF65-F5344CB8AC3E}">
-        <p14:creationId xmlns:p14="http://schemas.microsoft.com/office/powerpoint/2010/main" val="57730475"/>
+        <p14:creationId xmlns:p14="http://schemas.microsoft.com/office/powerpoint/2010/main" val="86977901"/>
       </p:ext>
     </p:extLst>
   </p:cSld>
@@ -5488,7 +7822,7 @@
           <p:cNvPr id="13" name="accent-line">
             <a:extLst xmlns:a="http://schemas.openxmlformats.org/drawingml/2006/main">
               <a:ext uri="{FF2B5EF4-FFF2-40B4-BE49-F238E27FC236}">
-                <a16:creationId xmlns:a16="http://schemas.microsoft.com/office/drawing/2014/main" id="{57FB3677-967C-4D2E-9D45-F1B257A0F3F0}"/>
+                <a16:creationId xmlns:a16="http://schemas.microsoft.com/office/drawing/2014/main" id="{11CA5AFE-D734-4B73-B4EF-3B9D785394E4}"/>
               </a:ext>
             </a:extLst>
           </p:cNvPr>
@@ -5521,7 +7855,7 @@
           <p:cNvPr id="2" name="chapter-label">
             <a:extLst xmlns:a="http://schemas.openxmlformats.org/drawingml/2006/main">
               <a:ext uri="{FF2B5EF4-FFF2-40B4-BE49-F238E27FC236}">
-                <a16:creationId xmlns:a16="http://schemas.microsoft.com/office/drawing/2014/main" id="{593110D7-523F-436F-BCFC-E0348EB92BB1}"/>
+                <a16:creationId xmlns:a16="http://schemas.microsoft.com/office/drawing/2014/main" id="{F5FCDB13-E8FC-419F-A84B-722B9DCE1900}"/>
               </a:ext>
             </a:extLst>
           </p:cNvPr>
@@ -5579,7 +7913,7 @@
           <p:cNvPr id="3" name="slide-number">
             <a:extLst xmlns:a="http://schemas.openxmlformats.org/drawingml/2006/main">
               <a:ext uri="{FF2B5EF4-FFF2-40B4-BE49-F238E27FC236}">
-                <a16:creationId xmlns:a16="http://schemas.microsoft.com/office/drawing/2014/main" id="{62E0F5CE-1CCD-4505-A95E-A6E5BA2B1E77}"/>
+                <a16:creationId xmlns:a16="http://schemas.microsoft.com/office/drawing/2014/main" id="{E0CEFCFC-1621-4D36-A14B-17365D47A57F}"/>
               </a:ext>
             </a:extLst>
           </p:cNvPr>
@@ -5637,7 +7971,7 @@
           <p:cNvPr id="4" name="chapter-footer">
             <a:extLst xmlns:a="http://schemas.openxmlformats.org/drawingml/2006/main">
               <a:ext uri="{FF2B5EF4-FFF2-40B4-BE49-F238E27FC236}">
-                <a16:creationId xmlns:a16="http://schemas.microsoft.com/office/drawing/2014/main" id="{5803C34B-9F54-4F74-BB2F-56EBD0ED0723}"/>
+                <a16:creationId xmlns:a16="http://schemas.microsoft.com/office/drawing/2014/main" id="{104B726B-EDB5-4C9F-A737-51D271186454}"/>
               </a:ext>
             </a:extLst>
           </p:cNvPr>
@@ -5695,7 +8029,7 @@
           <p:cNvPr id="5" name="section-title">
             <a:extLst xmlns:a="http://schemas.openxmlformats.org/drawingml/2006/main">
               <a:ext uri="{FF2B5EF4-FFF2-40B4-BE49-F238E27FC236}">
-                <a16:creationId xmlns:a16="http://schemas.microsoft.com/office/drawing/2014/main" id="{AE6CE04A-8D33-4133-AE10-D218FD60C41D}"/>
+                <a16:creationId xmlns:a16="http://schemas.microsoft.com/office/drawing/2014/main" id="{E45284C3-2094-4576-B45C-6EE8E37ECFB3}"/>
               </a:ext>
             </a:extLst>
           </p:cNvPr>
@@ -5753,7 +8087,7 @@
           <p:cNvPr id="6" name="section-explanation">
             <a:extLst xmlns:a="http://schemas.openxmlformats.org/drawingml/2006/main">
               <a:ext uri="{FF2B5EF4-FFF2-40B4-BE49-F238E27FC236}">
-                <a16:creationId xmlns:a16="http://schemas.microsoft.com/office/drawing/2014/main" id="{2DBAB43C-E5DA-45D8-BEE9-6C2BC3E17EE9}"/>
+                <a16:creationId xmlns:a16="http://schemas.microsoft.com/office/drawing/2014/main" id="{5CB4A544-9D7D-4CE2-AFCA-49EE6CE6F6C6}"/>
               </a:ext>
             </a:extLst>
           </p:cNvPr>
@@ -5811,7 +8145,7 @@
           <p:cNvPr id="7" name="point-band-1">
             <a:extLst xmlns:a="http://schemas.openxmlformats.org/drawingml/2006/main">
               <a:ext uri="{FF2B5EF4-FFF2-40B4-BE49-F238E27FC236}">
-                <a16:creationId xmlns:a16="http://schemas.microsoft.com/office/drawing/2014/main" id="{D47D8805-88C9-4902-9966-4B365FD6F980}"/>
+                <a16:creationId xmlns:a16="http://schemas.microsoft.com/office/drawing/2014/main" id="{814A5C53-A079-4412-8116-10FD819DE810}"/>
               </a:ext>
             </a:extLst>
           </p:cNvPr>
@@ -5844,7 +8178,7 @@
           <p:cNvPr id="8" name="point-1">
             <a:extLst xmlns:a="http://schemas.openxmlformats.org/drawingml/2006/main">
               <a:ext uri="{FF2B5EF4-FFF2-40B4-BE49-F238E27FC236}">
-                <a16:creationId xmlns:a16="http://schemas.microsoft.com/office/drawing/2014/main" id="{AAC345F3-1E91-45EE-AF3E-EE9F0C61B0E8}"/>
+                <a16:creationId xmlns:a16="http://schemas.microsoft.com/office/drawing/2014/main" id="{06655A85-D836-46F8-83EB-2D1EA0FC5D2B}"/>
               </a:ext>
             </a:extLst>
           </p:cNvPr>
@@ -5902,7 +8236,7 @@
           <p:cNvPr id="9" name="point-band-2">
             <a:extLst xmlns:a="http://schemas.openxmlformats.org/drawingml/2006/main">
               <a:ext uri="{FF2B5EF4-FFF2-40B4-BE49-F238E27FC236}">
-                <a16:creationId xmlns:a16="http://schemas.microsoft.com/office/drawing/2014/main" id="{C59A4DDC-7691-468E-B901-A4722B4B46BF}"/>
+                <a16:creationId xmlns:a16="http://schemas.microsoft.com/office/drawing/2014/main" id="{9E06BBE5-CD99-41EF-87AF-23CD1F44C123}"/>
               </a:ext>
             </a:extLst>
           </p:cNvPr>
@@ -5935,7 +8269,7 @@
           <p:cNvPr id="10" name="point-2">
             <a:extLst xmlns:a="http://schemas.openxmlformats.org/drawingml/2006/main">
               <a:ext uri="{FF2B5EF4-FFF2-40B4-BE49-F238E27FC236}">
-                <a16:creationId xmlns:a16="http://schemas.microsoft.com/office/drawing/2014/main" id="{D7510E4C-7095-42CF-A6B4-88FA5A976E53}"/>
+                <a16:creationId xmlns:a16="http://schemas.microsoft.com/office/drawing/2014/main" id="{8A4EE8FC-154C-4004-961C-E1F7D8CE8BD1}"/>
               </a:ext>
             </a:extLst>
           </p:cNvPr>
@@ -5993,7 +8327,7 @@
           <p:cNvPr id="11" name="point-band-3">
             <a:extLst xmlns:a="http://schemas.openxmlformats.org/drawingml/2006/main">
               <a:ext uri="{FF2B5EF4-FFF2-40B4-BE49-F238E27FC236}">
-                <a16:creationId xmlns:a16="http://schemas.microsoft.com/office/drawing/2014/main" id="{4ABC55CE-1BC1-4A88-B000-CBA9348912EA}"/>
+                <a16:creationId xmlns:a16="http://schemas.microsoft.com/office/drawing/2014/main" id="{F3F95C48-460A-42B4-A478-CE608ECDA1C8}"/>
               </a:ext>
             </a:extLst>
           </p:cNvPr>
@@ -6026,7 +8360,7 @@
           <p:cNvPr id="12" name="point-3">
             <a:extLst xmlns:a="http://schemas.openxmlformats.org/drawingml/2006/main">
               <a:ext uri="{FF2B5EF4-FFF2-40B4-BE49-F238E27FC236}">
-                <a16:creationId xmlns:a16="http://schemas.microsoft.com/office/drawing/2014/main" id="{F12865AC-8CCE-4399-837A-97A738B3124F}"/>
+                <a16:creationId xmlns:a16="http://schemas.microsoft.com/office/drawing/2014/main" id="{21E46560-5C9D-4277-97BC-89DA0736EEDC}"/>
               </a:ext>
             </a:extLst>
           </p:cNvPr>
@@ -6082,7 +8416,7 @@
     </p:spTree>
     <p:extLst>
       <p:ext uri="{BB962C8B-B14F-4D97-AF65-F5344CB8AC3E}">
-        <p14:creationId xmlns:p14="http://schemas.microsoft.com/office/powerpoint/2010/main" val="275981967"/>
+        <p14:creationId xmlns:p14="http://schemas.microsoft.com/office/powerpoint/2010/main" val="905596319"/>
       </p:ext>
     </p:extLst>
   </p:cSld>
@@ -6113,7 +8447,7 @@
           <p:cNvPr id="9" name="accent-line">
             <a:extLst xmlns:a="http://schemas.openxmlformats.org/drawingml/2006/main">
               <a:ext uri="{FF2B5EF4-FFF2-40B4-BE49-F238E27FC236}">
-                <a16:creationId xmlns:a16="http://schemas.microsoft.com/office/drawing/2014/main" id="{DC64ED1B-A572-40AE-B446-37B4F2AE3B7C}"/>
+                <a16:creationId xmlns:a16="http://schemas.microsoft.com/office/drawing/2014/main" id="{28062BD3-70DB-4680-B24F-AD411FB5A126}"/>
               </a:ext>
             </a:extLst>
           </p:cNvPr>
@@ -6146,7 +8480,7 @@
           <p:cNvPr id="2" name="chapter-label">
             <a:extLst xmlns:a="http://schemas.openxmlformats.org/drawingml/2006/main">
               <a:ext uri="{FF2B5EF4-FFF2-40B4-BE49-F238E27FC236}">
-                <a16:creationId xmlns:a16="http://schemas.microsoft.com/office/drawing/2014/main" id="{93319A13-C2D5-44E0-901D-27763271F16A}"/>
+                <a16:creationId xmlns:a16="http://schemas.microsoft.com/office/drawing/2014/main" id="{7F13DA24-DA13-405C-A156-2C5692EEC320}"/>
               </a:ext>
             </a:extLst>
           </p:cNvPr>
@@ -6204,7 +8538,7 @@
           <p:cNvPr id="3" name="slide-number">
             <a:extLst xmlns:a="http://schemas.openxmlformats.org/drawingml/2006/main">
               <a:ext uri="{FF2B5EF4-FFF2-40B4-BE49-F238E27FC236}">
-                <a16:creationId xmlns:a16="http://schemas.microsoft.com/office/drawing/2014/main" id="{F378E7CB-64C5-413B-A6E7-A65A932ADF95}"/>
+                <a16:creationId xmlns:a16="http://schemas.microsoft.com/office/drawing/2014/main" id="{B4C4BF9B-DE59-4BE7-9CA5-B5A73A532F23}"/>
               </a:ext>
             </a:extLst>
           </p:cNvPr>
@@ -6262,7 +8596,7 @@
           <p:cNvPr id="4" name="chapter-footer">
             <a:extLst xmlns:a="http://schemas.openxmlformats.org/drawingml/2006/main">
               <a:ext uri="{FF2B5EF4-FFF2-40B4-BE49-F238E27FC236}">
-                <a16:creationId xmlns:a16="http://schemas.microsoft.com/office/drawing/2014/main" id="{D804AFD4-23DA-4D06-9DE5-0BA056843233}"/>
+                <a16:creationId xmlns:a16="http://schemas.microsoft.com/office/drawing/2014/main" id="{5A5DE91F-63AF-4109-85E0-D247D36985A7}"/>
               </a:ext>
             </a:extLst>
           </p:cNvPr>
@@ -6320,7 +8654,7 @@
           <p:cNvPr id="5" name="section-title">
             <a:extLst xmlns:a="http://schemas.openxmlformats.org/drawingml/2006/main">
               <a:ext uri="{FF2B5EF4-FFF2-40B4-BE49-F238E27FC236}">
-                <a16:creationId xmlns:a16="http://schemas.microsoft.com/office/drawing/2014/main" id="{CB5750E7-B5A1-454F-8ACC-35C0C714E0B5}"/>
+                <a16:creationId xmlns:a16="http://schemas.microsoft.com/office/drawing/2014/main" id="{A985F080-1ADB-4BC0-A763-22A2925F9FB8}"/>
               </a:ext>
             </a:extLst>
           </p:cNvPr>
@@ -6368,7 +8702,7 @@
                 <a:ea typeface="Helvetica Neue"/>
                 <a:cs typeface="Helvetica Neue"/>
               </a:rPr>
-              <a:t>MCP is bidirectional and transport-independent</a:t>
+              <a:t>MCP capabilities depend on the selected version</a:t>
             </a:r>
           </a:p>
         </p:txBody>
@@ -6378,7 +8712,7 @@
           <p:cNvPr id="6" name="section-explanation">
             <a:extLst xmlns:a="http://schemas.openxmlformats.org/drawingml/2006/main">
               <a:ext uri="{FF2B5EF4-FFF2-40B4-BE49-F238E27FC236}">
-                <a16:creationId xmlns:a16="http://schemas.microsoft.com/office/drawing/2014/main" id="{46CB334E-234B-49BE-8252-AC5F386BDA8F}"/>
+                <a16:creationId xmlns:a16="http://schemas.microsoft.com/office/drawing/2014/main" id="{E6F980D3-80D1-487F-B027-46CFB6C128B0}"/>
               </a:ext>
             </a:extLst>
           </p:cNvPr>
@@ -6426,7 +8760,7 @@
                 <a:ea typeface="Helvetica Neue"/>
                 <a:cs typeface="Helvetica Neue"/>
               </a:rPr>
-              <a:t>Servers expose tools, resources, and prompts; clients can expose sampling, roots, and elicitation. The same protocol messages can flow over local stdio or remote Streamable HTTP sessions.</a:t>
+              <a:t>For the MCP 2025-11-25 baseline, servers expose tools, resources, and prompts. Clients can support sampling, roots, and elicitation. This edition discusses stdio and Streamable HTTP and requires implementations to enforce access controls.</a:t>
             </a:r>
           </a:p>
         </p:txBody>
@@ -6436,7 +8770,7 @@
           <p:cNvPr id="7" name="column-rule">
             <a:extLst xmlns:a="http://schemas.openxmlformats.org/drawingml/2006/main">
               <a:ext uri="{FF2B5EF4-FFF2-40B4-BE49-F238E27FC236}">
-                <a16:creationId xmlns:a16="http://schemas.microsoft.com/office/drawing/2014/main" id="{46C24F7B-00A6-4C1C-9130-E795EFE7BA37}"/>
+                <a16:creationId xmlns:a16="http://schemas.microsoft.com/office/drawing/2014/main" id="{1F6E86F0-459C-4991-9255-9239B7B91549}"/>
               </a:ext>
             </a:extLst>
           </p:cNvPr>
@@ -6469,7 +8803,7 @@
           <p:cNvPr id="8" name="section-points">
             <a:extLst xmlns:a="http://schemas.openxmlformats.org/drawingml/2006/main">
               <a:ext uri="{FF2B5EF4-FFF2-40B4-BE49-F238E27FC236}">
-                <a16:creationId xmlns:a16="http://schemas.microsoft.com/office/drawing/2014/main" id="{8E82A1A2-381F-4DB1-876A-1B7428669644}"/>
+                <a16:creationId xmlns:a16="http://schemas.microsoft.com/office/drawing/2014/main" id="{31B7DCA7-00B6-441F-96AE-0C17A12B8495}"/>
               </a:ext>
             </a:extLst>
           </p:cNvPr>
@@ -6545,7 +8879,7 @@
                 <a:ea typeface="Helvetica Neue"/>
                 <a:cs typeface="Helvetica Neue"/>
               </a:rPr>
-              <a:t>02  Roots communicate permitted filesystem scopes.</a:t>
+              <a:t>02  Roots advertise filesystem context. Implementations enforce access.</a:t>
             </a:r>
           </a:p>
           <a:p xmlns:a="http://schemas.openxmlformats.org/drawingml/2006/main">
@@ -6609,7 +8943,7 @@
     </p:spTree>
     <p:extLst>
       <p:ext uri="{BB962C8B-B14F-4D97-AF65-F5344CB8AC3E}">
-        <p14:creationId xmlns:p14="http://schemas.microsoft.com/office/powerpoint/2010/main" val="1668853984"/>
+        <p14:creationId xmlns:p14="http://schemas.microsoft.com/office/powerpoint/2010/main" val="584028195"/>
       </p:ext>
     </p:extLst>
   </p:cSld>
@@ -6640,7 +8974,7 @@
           <p:cNvPr id="15" name="accent-line">
             <a:extLst xmlns:a="http://schemas.openxmlformats.org/drawingml/2006/main">
               <a:ext uri="{FF2B5EF4-FFF2-40B4-BE49-F238E27FC236}">
-                <a16:creationId xmlns:a16="http://schemas.microsoft.com/office/drawing/2014/main" id="{625DABA9-BE5E-4647-9CAE-A16BD5F5F72E}"/>
+                <a16:creationId xmlns:a16="http://schemas.microsoft.com/office/drawing/2014/main" id="{0F011F2D-2A73-408F-831E-35DA9E986F8B}"/>
               </a:ext>
             </a:extLst>
           </p:cNvPr>
@@ -6673,7 +9007,7 @@
           <p:cNvPr id="2" name="chapter-label">
             <a:extLst xmlns:a="http://schemas.openxmlformats.org/drawingml/2006/main">
               <a:ext uri="{FF2B5EF4-FFF2-40B4-BE49-F238E27FC236}">
-                <a16:creationId xmlns:a16="http://schemas.microsoft.com/office/drawing/2014/main" id="{CFEA7566-52FD-42F8-A686-9BAC87940CC1}"/>
+                <a16:creationId xmlns:a16="http://schemas.microsoft.com/office/drawing/2014/main" id="{9796CEDE-FED7-4D29-9A73-636A36668C2C}"/>
               </a:ext>
             </a:extLst>
           </p:cNvPr>
@@ -6731,7 +9065,7 @@
           <p:cNvPr id="3" name="slide-number">
             <a:extLst xmlns:a="http://schemas.openxmlformats.org/drawingml/2006/main">
               <a:ext uri="{FF2B5EF4-FFF2-40B4-BE49-F238E27FC236}">
-                <a16:creationId xmlns:a16="http://schemas.microsoft.com/office/drawing/2014/main" id="{ED3848F0-F8F9-4AF0-AAB0-BB5C2B830F25}"/>
+                <a16:creationId xmlns:a16="http://schemas.microsoft.com/office/drawing/2014/main" id="{CC0FF417-30CD-44AA-AFA9-E9057C666B6E}"/>
               </a:ext>
             </a:extLst>
           </p:cNvPr>
@@ -6789,7 +9123,7 @@
           <p:cNvPr id="4" name="chapter-footer">
             <a:extLst xmlns:a="http://schemas.openxmlformats.org/drawingml/2006/main">
               <a:ext uri="{FF2B5EF4-FFF2-40B4-BE49-F238E27FC236}">
-                <a16:creationId xmlns:a16="http://schemas.microsoft.com/office/drawing/2014/main" id="{324F586B-A47C-4E09-8C88-B17CF72C5FB9}"/>
+                <a16:creationId xmlns:a16="http://schemas.microsoft.com/office/drawing/2014/main" id="{6FF60E39-61E5-42AF-BBB7-C811C9DA96A2}"/>
               </a:ext>
             </a:extLst>
           </p:cNvPr>
@@ -6847,7 +9181,7 @@
           <p:cNvPr id="5" name="section-title">
             <a:extLst xmlns:a="http://schemas.openxmlformats.org/drawingml/2006/main">
               <a:ext uri="{FF2B5EF4-FFF2-40B4-BE49-F238E27FC236}">
-                <a16:creationId xmlns:a16="http://schemas.microsoft.com/office/drawing/2014/main" id="{4135D614-9844-4922-9CCC-A6597A73B79B}"/>
+                <a16:creationId xmlns:a16="http://schemas.microsoft.com/office/drawing/2014/main" id="{AB672D6B-D0C4-40C3-88A7-9D0AE6EA6743}"/>
               </a:ext>
             </a:extLst>
           </p:cNvPr>
@@ -6905,7 +9239,7 @@
           <p:cNvPr id="6" name="section-explanation">
             <a:extLst xmlns:a="http://schemas.openxmlformats.org/drawingml/2006/main">
               <a:ext uri="{FF2B5EF4-FFF2-40B4-BE49-F238E27FC236}">
-                <a16:creationId xmlns:a16="http://schemas.microsoft.com/office/drawing/2014/main" id="{63332224-4F11-4B17-B114-D44D141D6BC7}"/>
+                <a16:creationId xmlns:a16="http://schemas.microsoft.com/office/drawing/2014/main" id="{854592B3-ABA7-4F47-8094-B5AEB7E4E106}"/>
               </a:ext>
             </a:extLst>
           </p:cNvPr>
@@ -6963,7 +9297,7 @@
           <p:cNvPr id="7" name="point-band-1">
             <a:extLst xmlns:a="http://schemas.openxmlformats.org/drawingml/2006/main">
               <a:ext uri="{FF2B5EF4-FFF2-40B4-BE49-F238E27FC236}">
-                <a16:creationId xmlns:a16="http://schemas.microsoft.com/office/drawing/2014/main" id="{772D41B7-3875-45E5-8A01-698E48D0B6CA}"/>
+                <a16:creationId xmlns:a16="http://schemas.microsoft.com/office/drawing/2014/main" id="{44378BA8-E886-4523-B639-CA7D2FD9CCF2}"/>
               </a:ext>
             </a:extLst>
           </p:cNvPr>
@@ -6996,7 +9330,7 @@
           <p:cNvPr id="8" name="point-1">
             <a:extLst xmlns:a="http://schemas.openxmlformats.org/drawingml/2006/main">
               <a:ext uri="{FF2B5EF4-FFF2-40B4-BE49-F238E27FC236}">
-                <a16:creationId xmlns:a16="http://schemas.microsoft.com/office/drawing/2014/main" id="{6AED7DD7-A18E-4738-878A-BCF5E0B90B86}"/>
+                <a16:creationId xmlns:a16="http://schemas.microsoft.com/office/drawing/2014/main" id="{F244FD4D-51BF-4288-B27F-A56FA1E42718}"/>
               </a:ext>
             </a:extLst>
           </p:cNvPr>
@@ -7054,7 +9388,7 @@
           <p:cNvPr id="9" name="point-band-2">
             <a:extLst xmlns:a="http://schemas.openxmlformats.org/drawingml/2006/main">
               <a:ext uri="{FF2B5EF4-FFF2-40B4-BE49-F238E27FC236}">
-                <a16:creationId xmlns:a16="http://schemas.microsoft.com/office/drawing/2014/main" id="{8E371C97-7E78-4FAA-AEE8-67DBB6950BD0}"/>
+                <a16:creationId xmlns:a16="http://schemas.microsoft.com/office/drawing/2014/main" id="{59CC7763-6886-480E-B1D4-73441834047C}"/>
               </a:ext>
             </a:extLst>
           </p:cNvPr>
@@ -7087,7 +9421,7 @@
           <p:cNvPr id="10" name="point-2">
             <a:extLst xmlns:a="http://schemas.openxmlformats.org/drawingml/2006/main">
               <a:ext uri="{FF2B5EF4-FFF2-40B4-BE49-F238E27FC236}">
-                <a16:creationId xmlns:a16="http://schemas.microsoft.com/office/drawing/2014/main" id="{E07F052B-2687-471D-A328-8C36D48B16A5}"/>
+                <a16:creationId xmlns:a16="http://schemas.microsoft.com/office/drawing/2014/main" id="{C02C8CE0-F28B-4B9B-AFBF-73103632F739}"/>
               </a:ext>
             </a:extLst>
           </p:cNvPr>
@@ -7145,7 +9479,7 @@
           <p:cNvPr id="11" name="point-band-3">
             <a:extLst xmlns:a="http://schemas.openxmlformats.org/drawingml/2006/main">
               <a:ext uri="{FF2B5EF4-FFF2-40B4-BE49-F238E27FC236}">
-                <a16:creationId xmlns:a16="http://schemas.microsoft.com/office/drawing/2014/main" id="{ACF9BDCD-65AB-4977-8699-10B4EDEEB6B1}"/>
+                <a16:creationId xmlns:a16="http://schemas.microsoft.com/office/drawing/2014/main" id="{8533A563-B810-40F2-851F-1885536DBCD7}"/>
               </a:ext>
             </a:extLst>
           </p:cNvPr>
@@ -7178,7 +9512,7 @@
           <p:cNvPr id="12" name="point-3">
             <a:extLst xmlns:a="http://schemas.openxmlformats.org/drawingml/2006/main">
               <a:ext uri="{FF2B5EF4-FFF2-40B4-BE49-F238E27FC236}">
-                <a16:creationId xmlns:a16="http://schemas.microsoft.com/office/drawing/2014/main" id="{B16E57FA-5C39-417B-B58B-AB2366D156CE}"/>
+                <a16:creationId xmlns:a16="http://schemas.microsoft.com/office/drawing/2014/main" id="{824F340D-39AA-461C-A5DF-2C111A4D63DD}"/>
               </a:ext>
             </a:extLst>
           </p:cNvPr>
@@ -7236,7 +9570,7 @@
           <p:cNvPr id="13" name="point-band-4">
             <a:extLst xmlns:a="http://schemas.openxmlformats.org/drawingml/2006/main">
               <a:ext uri="{FF2B5EF4-FFF2-40B4-BE49-F238E27FC236}">
-                <a16:creationId xmlns:a16="http://schemas.microsoft.com/office/drawing/2014/main" id="{6528B764-0BDB-42CD-97B2-4AB67C1ABE12}"/>
+                <a16:creationId xmlns:a16="http://schemas.microsoft.com/office/drawing/2014/main" id="{DAD514FF-0963-4EC8-8F18-DB084D1DCD95}"/>
               </a:ext>
             </a:extLst>
           </p:cNvPr>
@@ -7269,7 +9603,7 @@
           <p:cNvPr id="14" name="point-4">
             <a:extLst xmlns:a="http://schemas.openxmlformats.org/drawingml/2006/main">
               <a:ext uri="{FF2B5EF4-FFF2-40B4-BE49-F238E27FC236}">
-                <a16:creationId xmlns:a16="http://schemas.microsoft.com/office/drawing/2014/main" id="{86A43E84-357D-48D5-8BB3-3FE3560530FA}"/>
+                <a16:creationId xmlns:a16="http://schemas.microsoft.com/office/drawing/2014/main" id="{08F0B732-4D58-448A-BA5A-6CFBD740CF6F}"/>
               </a:ext>
             </a:extLst>
           </p:cNvPr>
@@ -7325,7 +9659,7 @@
     </p:spTree>
     <p:extLst>
       <p:ext uri="{BB962C8B-B14F-4D97-AF65-F5344CB8AC3E}">
-        <p14:creationId xmlns:p14="http://schemas.microsoft.com/office/powerpoint/2010/main" val="494558684"/>
+        <p14:creationId xmlns:p14="http://schemas.microsoft.com/office/powerpoint/2010/main" val="406304541"/>
       </p:ext>
     </p:extLst>
   </p:cSld>
@@ -7353,10 +9687,10 @@
       </p:grpSpPr>
       <p:sp>
         <p:nvSpPr>
-          <p:cNvPr id="18" name="accent-line">
-            <a:extLst xmlns:a="http://schemas.openxmlformats.org/drawingml/2006/main">
-              <a:ext uri="{FF2B5EF4-FFF2-40B4-BE49-F238E27FC236}">
-                <a16:creationId xmlns:a16="http://schemas.microsoft.com/office/drawing/2014/main" id="{E70E4FB6-46AD-4ECF-BA2E-6F93B7C24631}"/>
+          <p:cNvPr id="9" name="accent-line">
+            <a:extLst xmlns:a="http://schemas.openxmlformats.org/drawingml/2006/main">
+              <a:ext uri="{FF2B5EF4-FFF2-40B4-BE49-F238E27FC236}">
+                <a16:creationId xmlns:a16="http://schemas.microsoft.com/office/drawing/2014/main" id="{DD998006-76F9-4D55-A7D8-FA6467F2E24D}"/>
               </a:ext>
             </a:extLst>
           </p:cNvPr>
@@ -7389,7 +9723,7 @@
           <p:cNvPr id="2" name="chapter-label">
             <a:extLst xmlns:a="http://schemas.openxmlformats.org/drawingml/2006/main">
               <a:ext uri="{FF2B5EF4-FFF2-40B4-BE49-F238E27FC236}">
-                <a16:creationId xmlns:a16="http://schemas.microsoft.com/office/drawing/2014/main" id="{B8A1FE86-1E38-4986-9D80-D9F6E763BD36}"/>
+                <a16:creationId xmlns:a16="http://schemas.microsoft.com/office/drawing/2014/main" id="{DCBCD9CE-9AC1-4659-A9FA-5B364138A46F}"/>
               </a:ext>
             </a:extLst>
           </p:cNvPr>
@@ -7437,7 +9771,7 @@
                 <a:ea typeface="Helvetica Neue"/>
                 <a:cs typeface="Helvetica Neue"/>
               </a:rPr>
-              <a:t>EXAM CHECK  /  05</a:t>
+              <a:t>CORE IDEA 07  /  05</a:t>
             </a:r>
           </a:p>
         </p:txBody>
@@ -7447,7 +9781,7 @@
           <p:cNvPr id="3" name="slide-number">
             <a:extLst xmlns:a="http://schemas.openxmlformats.org/drawingml/2006/main">
               <a:ext uri="{FF2B5EF4-FFF2-40B4-BE49-F238E27FC236}">
-                <a16:creationId xmlns:a16="http://schemas.microsoft.com/office/drawing/2014/main" id="{7CCAE131-DAC0-468D-B2E8-3F90B2B2B891}"/>
+                <a16:creationId xmlns:a16="http://schemas.microsoft.com/office/drawing/2014/main" id="{912FB1E4-8E95-4E8F-A0A4-E87884D2C8AA}"/>
               </a:ext>
             </a:extLst>
           </p:cNvPr>
@@ -7505,7 +9839,7 @@
           <p:cNvPr id="4" name="chapter-footer">
             <a:extLst xmlns:a="http://schemas.openxmlformats.org/drawingml/2006/main">
               <a:ext uri="{FF2B5EF4-FFF2-40B4-BE49-F238E27FC236}">
-                <a16:creationId xmlns:a16="http://schemas.microsoft.com/office/drawing/2014/main" id="{8FEFDE36-E75F-4C37-B535-05DD4942D456}"/>
+                <a16:creationId xmlns:a16="http://schemas.microsoft.com/office/drawing/2014/main" id="{DEE27281-7A2C-4083-BE44-CCAC7B5AA2B9}"/>
               </a:ext>
             </a:extLst>
           </p:cNvPr>
@@ -7560,138 +9894,22 @@
       </p:sp>
       <p:sp>
         <p:nvSpPr>
-          <p:cNvPr id="5" name="exam-title">
-            <a:extLst xmlns:a="http://schemas.openxmlformats.org/drawingml/2006/main">
-              <a:ext uri="{FF2B5EF4-FFF2-40B4-BE49-F238E27FC236}">
-                <a16:creationId xmlns:a16="http://schemas.microsoft.com/office/drawing/2014/main" id="{114A6282-351F-4260-AE3C-A74EE4E32DEA}"/>
-              </a:ext>
-            </a:extLst>
-          </p:cNvPr>
-          <p:cNvSpPr>
-            <a:spLocks xmlns:a="http://schemas.openxmlformats.org/drawingml/2006/main" noGrp="1"/>
-          </p:cNvSpPr>
-          <p:nvPr/>
-        </p:nvSpPr>
-        <p:spPr>
-          <a:xfrm xmlns:a="http://schemas.openxmlformats.org/drawingml/2006/main">
-            <a:off x="390525" y="981075"/>
-            <a:ext cx="10668000" cy="781050"/>
-          </a:xfrm>
-          <a:prstGeom xmlns:a="http://schemas.openxmlformats.org/drawingml/2006/main" prst="rect">
-            <a:avLst/>
-          </a:prstGeom>
-          <a:noFill xmlns:a="http://schemas.openxmlformats.org/drawingml/2006/main"/>
-          <a:ln xmlns:a="http://schemas.openxmlformats.org/drawingml/2006/main" w="0">
-            <a:noFill/>
-            <a:prstDash val="solid"/>
-          </a:ln>
-        </p:spPr>
-        <p:txBody>
-          <a:bodyPr xmlns:a="http://schemas.openxmlformats.org/drawingml/2006/main" anchor="t">
-            <a:noAutofit/>
-          </a:bodyPr>
-          <a:lstStyle xmlns:a="http://schemas.openxmlformats.org/drawingml/2006/main"/>
-          <a:p xmlns:a="http://schemas.openxmlformats.org/drawingml/2006/main">
-            <a:pPr algn="l">
-              <a:defRPr sz="3150" b="1">
-                <a:solidFill>
-                  <a:srgbClr val="111111"/>
-                </a:solidFill>
-                <a:latin typeface="Helvetica Neue"/>
-                <a:ea typeface="Helvetica Neue"/>
-                <a:cs typeface="Helvetica Neue"/>
-              </a:defRPr>
-            </a:pPr>
-            <a:r>
-              <a:rPr sz="3150" b="1">
-                <a:solidFill>
-                  <a:srgbClr val="111111"/>
-                </a:solidFill>
-                <a:latin typeface="Helvetica Neue"/>
-                <a:ea typeface="Helvetica Neue"/>
-                <a:cs typeface="Helvetica Neue"/>
-              </a:rPr>
-              <a:t>Can you answer these without notes?</a:t>
-            </a:r>
-          </a:p>
-        </p:txBody>
-      </p:sp>
-      <p:sp>
-        <p:nvSpPr>
-          <p:cNvPr id="6" name="exam-number-1">
-            <a:extLst xmlns:a="http://schemas.openxmlformats.org/drawingml/2006/main">
-              <a:ext uri="{FF2B5EF4-FFF2-40B4-BE49-F238E27FC236}">
-                <a16:creationId xmlns:a16="http://schemas.microsoft.com/office/drawing/2014/main" id="{605C7839-CB79-4A9A-B172-BC8B66D61131}"/>
-              </a:ext>
-            </a:extLst>
-          </p:cNvPr>
-          <p:cNvSpPr>
-            <a:spLocks xmlns:a="http://schemas.openxmlformats.org/drawingml/2006/main" noGrp="1"/>
-          </p:cNvSpPr>
-          <p:nvPr/>
-        </p:nvSpPr>
-        <p:spPr>
-          <a:xfrm xmlns:a="http://schemas.openxmlformats.org/drawingml/2006/main">
-            <a:off x="390525" y="2238375"/>
-            <a:ext cx="590550" cy="400050"/>
-          </a:xfrm>
-          <a:prstGeom xmlns:a="http://schemas.openxmlformats.org/drawingml/2006/main" prst="rect">
-            <a:avLst/>
-          </a:prstGeom>
-          <a:noFill xmlns:a="http://schemas.openxmlformats.org/drawingml/2006/main"/>
-          <a:ln xmlns:a="http://schemas.openxmlformats.org/drawingml/2006/main" w="0">
-            <a:noFill/>
-            <a:prstDash val="solid"/>
-          </a:ln>
-        </p:spPr>
-        <p:txBody>
-          <a:bodyPr xmlns:a="http://schemas.openxmlformats.org/drawingml/2006/main" anchor="t">
-            <a:noAutofit/>
-          </a:bodyPr>
-          <a:lstStyle xmlns:a="http://schemas.openxmlformats.org/drawingml/2006/main"/>
-          <a:p xmlns:a="http://schemas.openxmlformats.org/drawingml/2006/main">
-            <a:pPr algn="l">
-              <a:defRPr sz="1725" b="1">
-                <a:solidFill>
-                  <a:srgbClr val="73C8FF"/>
-                </a:solidFill>
-                <a:latin typeface="Helvetica Neue"/>
-                <a:ea typeface="Helvetica Neue"/>
-                <a:cs typeface="Helvetica Neue"/>
-              </a:defRPr>
-            </a:pPr>
-            <a:r>
-              <a:rPr sz="1725" b="1">
-                <a:solidFill>
-                  <a:srgbClr val="73C8FF"/>
-                </a:solidFill>
-                <a:latin typeface="Helvetica Neue"/>
-                <a:ea typeface="Helvetica Neue"/>
-                <a:cs typeface="Helvetica Neue"/>
-              </a:rPr>
-              <a:t>01</a:t>
-            </a:r>
-          </a:p>
-        </p:txBody>
-      </p:sp>
-      <p:sp>
-        <p:nvSpPr>
-          <p:cNvPr id="7" name="exam-question-1">
-            <a:extLst xmlns:a="http://schemas.openxmlformats.org/drawingml/2006/main">
-              <a:ext uri="{FF2B5EF4-FFF2-40B4-BE49-F238E27FC236}">
-                <a16:creationId xmlns:a16="http://schemas.microsoft.com/office/drawing/2014/main" id="{02D59444-3378-4C1A-8D20-E8F114548D4F}"/>
-              </a:ext>
-            </a:extLst>
-          </p:cNvPr>
-          <p:cNvSpPr>
-            <a:spLocks xmlns:a="http://schemas.openxmlformats.org/drawingml/2006/main" noGrp="1"/>
-          </p:cNvSpPr>
-          <p:nvPr/>
-        </p:nvSpPr>
-        <p:spPr>
-          <a:xfrm xmlns:a="http://schemas.openxmlformats.org/drawingml/2006/main">
-            <a:off x="1076325" y="2238375"/>
-            <a:ext cx="4762500" cy="895350"/>
+          <p:cNvPr id="5" name="section-title">
+            <a:extLst xmlns:a="http://schemas.openxmlformats.org/drawingml/2006/main">
+              <a:ext uri="{FF2B5EF4-FFF2-40B4-BE49-F238E27FC236}">
+                <a16:creationId xmlns:a16="http://schemas.microsoft.com/office/drawing/2014/main" id="{15219AAA-96CC-4720-85DE-D5EFAA86C366}"/>
+              </a:ext>
+            </a:extLst>
+          </p:cNvPr>
+          <p:cNvSpPr>
+            <a:spLocks xmlns:a="http://schemas.openxmlformats.org/drawingml/2006/main" noGrp="1"/>
+          </p:cNvSpPr>
+          <p:nvPr/>
+        </p:nvSpPr>
+        <p:spPr>
+          <a:xfrm xmlns:a="http://schemas.openxmlformats.org/drawingml/2006/main">
+            <a:off x="390525" y="971550"/>
+            <a:ext cx="11144250" cy="971550"/>
           </a:xfrm>
           <a:prstGeom xmlns:a="http://schemas.openxmlformats.org/drawingml/2006/main" prst="rect">
             <a:avLst/>
@@ -7709,105 +9927,47 @@
           <a:lstStyle xmlns:a="http://schemas.openxmlformats.org/drawingml/2006/main"/>
           <a:p xmlns:a="http://schemas.openxmlformats.org/drawingml/2006/main">
             <a:pPr algn="l">
-              <a:defRPr sz="1575" b="1">
-                <a:solidFill>
-                  <a:srgbClr val="111111"/>
-                </a:solidFill>
-                <a:latin typeface="Helvetica Neue"/>
-                <a:ea typeface="Helvetica Neue"/>
-                <a:cs typeface="Helvetica Neue"/>
-              </a:defRPr>
-            </a:pPr>
-            <a:r>
-              <a:rPr sz="1575" b="1">
-                <a:solidFill>
-                  <a:srgbClr val="111111"/>
-                </a:solidFill>
-                <a:latin typeface="Helvetica Neue"/>
-                <a:ea typeface="Helvetica Neue"/>
-                <a:cs typeface="Helvetica Neue"/>
-              </a:rPr>
-              <a:t>Walk through the complete function-call cycle.</a:t>
-            </a:r>
-          </a:p>
-        </p:txBody>
-      </p:sp>
-      <p:sp>
-        <p:nvSpPr>
-          <p:cNvPr id="8" name="exam-number-2">
-            <a:extLst xmlns:a="http://schemas.openxmlformats.org/drawingml/2006/main">
-              <a:ext uri="{FF2B5EF4-FFF2-40B4-BE49-F238E27FC236}">
-                <a16:creationId xmlns:a16="http://schemas.microsoft.com/office/drawing/2014/main" id="{78F60366-8BB3-4B69-8C00-C13216C1F02B}"/>
-              </a:ext>
-            </a:extLst>
-          </p:cNvPr>
-          <p:cNvSpPr>
-            <a:spLocks xmlns:a="http://schemas.openxmlformats.org/drawingml/2006/main" noGrp="1"/>
-          </p:cNvSpPr>
-          <p:nvPr/>
-        </p:nvSpPr>
-        <p:spPr>
-          <a:xfrm xmlns:a="http://schemas.openxmlformats.org/drawingml/2006/main">
-            <a:off x="6191250" y="2238375"/>
-            <a:ext cx="590550" cy="400050"/>
-          </a:xfrm>
-          <a:prstGeom xmlns:a="http://schemas.openxmlformats.org/drawingml/2006/main" prst="rect">
-            <a:avLst/>
-          </a:prstGeom>
-          <a:noFill xmlns:a="http://schemas.openxmlformats.org/drawingml/2006/main"/>
-          <a:ln xmlns:a="http://schemas.openxmlformats.org/drawingml/2006/main" w="0">
-            <a:noFill/>
-            <a:prstDash val="solid"/>
-          </a:ln>
-        </p:spPr>
-        <p:txBody>
-          <a:bodyPr xmlns:a="http://schemas.openxmlformats.org/drawingml/2006/main" anchor="t">
-            <a:noAutofit/>
-          </a:bodyPr>
-          <a:lstStyle xmlns:a="http://schemas.openxmlformats.org/drawingml/2006/main"/>
-          <a:p xmlns:a="http://schemas.openxmlformats.org/drawingml/2006/main">
-            <a:pPr algn="l">
-              <a:defRPr sz="1725" b="1">
-                <a:solidFill>
-                  <a:srgbClr val="73C8FF"/>
-                </a:solidFill>
-                <a:latin typeface="Helvetica Neue"/>
-                <a:ea typeface="Helvetica Neue"/>
-                <a:cs typeface="Helvetica Neue"/>
-              </a:defRPr>
-            </a:pPr>
-            <a:r>
-              <a:rPr sz="1725" b="1">
-                <a:solidFill>
-                  <a:srgbClr val="73C8FF"/>
-                </a:solidFill>
-                <a:latin typeface="Helvetica Neue"/>
-                <a:ea typeface="Helvetica Neue"/>
-                <a:cs typeface="Helvetica Neue"/>
-              </a:rPr>
-              <a:t>02</a:t>
-            </a:r>
-          </a:p>
-        </p:txBody>
-      </p:sp>
-      <p:sp>
-        <p:nvSpPr>
-          <p:cNvPr id="9" name="exam-question-2">
-            <a:extLst xmlns:a="http://schemas.openxmlformats.org/drawingml/2006/main">
-              <a:ext uri="{FF2B5EF4-FFF2-40B4-BE49-F238E27FC236}">
-                <a16:creationId xmlns:a16="http://schemas.microsoft.com/office/drawing/2014/main" id="{408BF2DA-ADF6-4419-B948-F229253DBC48}"/>
-              </a:ext>
-            </a:extLst>
-          </p:cNvPr>
-          <p:cNvSpPr>
-            <a:spLocks xmlns:a="http://schemas.openxmlformats.org/drawingml/2006/main" noGrp="1"/>
-          </p:cNvSpPr>
-          <p:nvPr/>
-        </p:nvSpPr>
-        <p:spPr>
-          <a:xfrm xmlns:a="http://schemas.openxmlformats.org/drawingml/2006/main">
-            <a:off x="6877050" y="2238375"/>
-            <a:ext cx="4762500" cy="895350"/>
+              <a:defRPr sz="3000" b="1">
+                <a:solidFill>
+                  <a:srgbClr val="111111"/>
+                </a:solidFill>
+                <a:latin typeface="Helvetica Neue"/>
+                <a:ea typeface="Helvetica Neue"/>
+                <a:cs typeface="Helvetica Neue"/>
+              </a:defRPr>
+            </a:pPr>
+            <a:r>
+              <a:rPr sz="3000" b="1">
+                <a:solidFill>
+                  <a:srgbClr val="111111"/>
+                </a:solidFill>
+                <a:latin typeface="Helvetica Neue"/>
+                <a:ea typeface="Helvetica Neue"/>
+                <a:cs typeface="Helvetica Neue"/>
+              </a:rPr>
+              <a:t>Tool interfaces and authority need separate checks</a:t>
+            </a:r>
+          </a:p>
+        </p:txBody>
+      </p:sp>
+      <p:sp>
+        <p:nvSpPr>
+          <p:cNvPr id="6" name="section-explanation">
+            <a:extLst xmlns:a="http://schemas.openxmlformats.org/drawingml/2006/main">
+              <a:ext uri="{FF2B5EF4-FFF2-40B4-BE49-F238E27FC236}">
+                <a16:creationId xmlns:a16="http://schemas.microsoft.com/office/drawing/2014/main" id="{176DE62C-2E0F-41A6-A499-168D94D0D64A}"/>
+              </a:ext>
+            </a:extLst>
+          </p:cNvPr>
+          <p:cNvSpPr>
+            <a:spLocks xmlns:a="http://schemas.openxmlformats.org/drawingml/2006/main" noGrp="1"/>
+          </p:cNvSpPr>
+          <p:nvPr/>
+        </p:nvSpPr>
+        <p:spPr>
+          <a:xfrm xmlns:a="http://schemas.openxmlformats.org/drawingml/2006/main">
+            <a:off x="390525" y="2381250"/>
+            <a:ext cx="4524375" cy="2905125"/>
           </a:xfrm>
           <a:prstGeom xmlns:a="http://schemas.openxmlformats.org/drawingml/2006/main" prst="rect">
             <a:avLst/>
@@ -7825,105 +9985,80 @@
           <a:lstStyle xmlns:a="http://schemas.openxmlformats.org/drawingml/2006/main"/>
           <a:p xmlns:a="http://schemas.openxmlformats.org/drawingml/2006/main">
             <a:pPr algn="l">
-              <a:defRPr sz="1575" b="1">
-                <a:solidFill>
-                  <a:srgbClr val="111111"/>
-                </a:solidFill>
-                <a:latin typeface="Helvetica Neue"/>
-                <a:ea typeface="Helvetica Neue"/>
-                <a:cs typeface="Helvetica Neue"/>
-              </a:defRPr>
-            </a:pPr>
-            <a:r>
-              <a:rPr sz="1575" b="1">
-                <a:solidFill>
-                  <a:srgbClr val="111111"/>
-                </a:solidFill>
-                <a:latin typeface="Helvetica Neue"/>
-                <a:ea typeface="Helvetica Neue"/>
-                <a:cs typeface="Helvetica Neue"/>
-              </a:rPr>
-              <a:t>What makes a tool specification model-friendly?</a:t>
-            </a:r>
-          </a:p>
-        </p:txBody>
-      </p:sp>
-      <p:sp>
-        <p:nvSpPr>
-          <p:cNvPr id="10" name="exam-number-3">
-            <a:extLst xmlns:a="http://schemas.openxmlformats.org/drawingml/2006/main">
-              <a:ext uri="{FF2B5EF4-FFF2-40B4-BE49-F238E27FC236}">
-                <a16:creationId xmlns:a16="http://schemas.microsoft.com/office/drawing/2014/main" id="{7EEF1060-D46A-4D48-80C3-4A518433B252}"/>
-              </a:ext>
-            </a:extLst>
-          </p:cNvPr>
-          <p:cNvSpPr>
-            <a:spLocks xmlns:a="http://schemas.openxmlformats.org/drawingml/2006/main" noGrp="1"/>
-          </p:cNvSpPr>
-          <p:nvPr/>
-        </p:nvSpPr>
-        <p:spPr>
-          <a:xfrm xmlns:a="http://schemas.openxmlformats.org/drawingml/2006/main">
-            <a:off x="390525" y="3495675"/>
-            <a:ext cx="590550" cy="400050"/>
-          </a:xfrm>
-          <a:prstGeom xmlns:a="http://schemas.openxmlformats.org/drawingml/2006/main" prst="rect">
-            <a:avLst/>
-          </a:prstGeom>
-          <a:noFill xmlns:a="http://schemas.openxmlformats.org/drawingml/2006/main"/>
-          <a:ln xmlns:a="http://schemas.openxmlformats.org/drawingml/2006/main" w="0">
-            <a:noFill/>
-            <a:prstDash val="solid"/>
-          </a:ln>
-        </p:spPr>
-        <p:txBody>
-          <a:bodyPr xmlns:a="http://schemas.openxmlformats.org/drawingml/2006/main" anchor="t">
-            <a:noAutofit/>
-          </a:bodyPr>
-          <a:lstStyle xmlns:a="http://schemas.openxmlformats.org/drawingml/2006/main"/>
-          <a:p xmlns:a="http://schemas.openxmlformats.org/drawingml/2006/main">
-            <a:pPr algn="l">
-              <a:defRPr sz="1725" b="1">
-                <a:solidFill>
-                  <a:srgbClr val="73C8FF"/>
-                </a:solidFill>
-                <a:latin typeface="Helvetica Neue"/>
-                <a:ea typeface="Helvetica Neue"/>
-                <a:cs typeface="Helvetica Neue"/>
-              </a:defRPr>
-            </a:pPr>
-            <a:r>
-              <a:rPr sz="1725" b="1">
-                <a:solidFill>
-                  <a:srgbClr val="73C8FF"/>
-                </a:solidFill>
-                <a:latin typeface="Helvetica Neue"/>
-                <a:ea typeface="Helvetica Neue"/>
-                <a:cs typeface="Helvetica Neue"/>
-              </a:rPr>
-              <a:t>03</a:t>
-            </a:r>
-          </a:p>
-        </p:txBody>
-      </p:sp>
-      <p:sp>
-        <p:nvSpPr>
-          <p:cNvPr id="11" name="exam-question-3">
-            <a:extLst xmlns:a="http://schemas.openxmlformats.org/drawingml/2006/main">
-              <a:ext uri="{FF2B5EF4-FFF2-40B4-BE49-F238E27FC236}">
-                <a16:creationId xmlns:a16="http://schemas.microsoft.com/office/drawing/2014/main" id="{D3DFDD6B-ADFB-421C-BFF3-5C4887D5012D}"/>
-              </a:ext>
-            </a:extLst>
-          </p:cNvPr>
-          <p:cNvSpPr>
-            <a:spLocks xmlns:a="http://schemas.openxmlformats.org/drawingml/2006/main" noGrp="1"/>
-          </p:cNvSpPr>
-          <p:nvPr/>
-        </p:nvSpPr>
-        <p:spPr>
-          <a:xfrm xmlns:a="http://schemas.openxmlformats.org/drawingml/2006/main">
-            <a:off x="1076325" y="3495675"/>
-            <a:ext cx="4762500" cy="895350"/>
+              <a:defRPr sz="1875" b="0">
+                <a:solidFill>
+                  <a:srgbClr val="5B5B57"/>
+                </a:solidFill>
+                <a:latin typeface="Helvetica Neue"/>
+                <a:ea typeface="Helvetica Neue"/>
+                <a:cs typeface="Helvetica Neue"/>
+              </a:defRPr>
+            </a:pPr>
+            <a:r>
+              <a:rPr sz="1875" b="0">
+                <a:solidFill>
+                  <a:srgbClr val="5B5B57"/>
+                </a:solidFill>
+                <a:latin typeface="Helvetica Neue"/>
+                <a:ea typeface="Helvetica Neue"/>
+                <a:cs typeface="Helvetica Neue"/>
+              </a:rPr>
+              <a:t>The labs use Gemini native calls and the OpenAI Agents SDK compatibility path. They expose local functions with explicit input limits. MCP descriptions and roots convey context, while the host and server implementations enforce access.</a:t>
+            </a:r>
+          </a:p>
+        </p:txBody>
+      </p:sp>
+      <p:sp>
+        <p:nvSpPr>
+          <p:cNvPr id="7" name="column-rule">
+            <a:extLst xmlns:a="http://schemas.openxmlformats.org/drawingml/2006/main">
+              <a:ext uri="{FF2B5EF4-FFF2-40B4-BE49-F238E27FC236}">
+                <a16:creationId xmlns:a16="http://schemas.microsoft.com/office/drawing/2014/main" id="{C541660F-46AE-4EED-8B73-8D0F63DF42D9}"/>
+              </a:ext>
+            </a:extLst>
+          </p:cNvPr>
+          <p:cNvSpPr>
+            <a:spLocks xmlns:a="http://schemas.openxmlformats.org/drawingml/2006/main" noGrp="1"/>
+          </p:cNvSpPr>
+          <p:nvPr/>
+        </p:nvSpPr>
+        <p:spPr>
+          <a:xfrm xmlns:a="http://schemas.openxmlformats.org/drawingml/2006/main">
+            <a:off x="5334000" y="2343150"/>
+            <a:ext cx="47625" cy="3257550"/>
+          </a:xfrm>
+          <a:prstGeom xmlns:a="http://schemas.openxmlformats.org/drawingml/2006/main" prst="rect">
+            <a:avLst/>
+          </a:prstGeom>
+          <a:solidFill xmlns:a="http://schemas.openxmlformats.org/drawingml/2006/main">
+            <a:srgbClr val="73C8FF"/>
+          </a:solidFill>
+          <a:ln xmlns:a="http://schemas.openxmlformats.org/drawingml/2006/main" w="0">
+            <a:solidFill>
+              <a:srgbClr val="73C8FF"/>
+            </a:solidFill>
+            <a:prstDash val="solid"/>
+          </a:ln>
+        </p:spPr>
+      </p:sp>
+      <p:sp>
+        <p:nvSpPr>
+          <p:cNvPr id="8" name="section-points">
+            <a:extLst xmlns:a="http://schemas.openxmlformats.org/drawingml/2006/main">
+              <a:ext uri="{FF2B5EF4-FFF2-40B4-BE49-F238E27FC236}">
+                <a16:creationId xmlns:a16="http://schemas.microsoft.com/office/drawing/2014/main" id="{D8C43E57-565A-44EF-A35E-4C00B2D6B57F}"/>
+              </a:ext>
+            </a:extLst>
+          </p:cNvPr>
+          <p:cNvSpPr>
+            <a:spLocks xmlns:a="http://schemas.openxmlformats.org/drawingml/2006/main" noGrp="1"/>
+          </p:cNvSpPr>
+          <p:nvPr/>
+        </p:nvSpPr>
+        <p:spPr>
+          <a:xfrm xmlns:a="http://schemas.openxmlformats.org/drawingml/2006/main">
+            <a:off x="5857875" y="2343150"/>
+            <a:ext cx="5572125" cy="3429000"/>
           </a:xfrm>
           <a:prstGeom xmlns:a="http://schemas.openxmlformats.org/drawingml/2006/main" prst="rect">
             <a:avLst/>
@@ -7941,67 +10076,37 @@
           <a:lstStyle xmlns:a="http://schemas.openxmlformats.org/drawingml/2006/main"/>
           <a:p xmlns:a="http://schemas.openxmlformats.org/drawingml/2006/main">
             <a:pPr algn="l">
-              <a:defRPr sz="1575" b="1">
-                <a:solidFill>
-                  <a:srgbClr val="111111"/>
-                </a:solidFill>
-                <a:latin typeface="Helvetica Neue"/>
-                <a:ea typeface="Helvetica Neue"/>
-                <a:cs typeface="Helvetica Neue"/>
-              </a:defRPr>
-            </a:pPr>
-            <a:r>
-              <a:rPr sz="1575" b="1">
-                <a:solidFill>
-                  <a:srgbClr val="111111"/>
-                </a:solidFill>
-                <a:latin typeface="Helvetica Neue"/>
-                <a:ea typeface="Helvetica Neue"/>
-                <a:cs typeface="Helvetica Neue"/>
-              </a:rPr>
-              <a:t>Why must tool results be treated as untrusted?</a:t>
-            </a:r>
-          </a:p>
-        </p:txBody>
-      </p:sp>
-      <p:sp>
-        <p:nvSpPr>
-          <p:cNvPr id="12" name="exam-number-4">
-            <a:extLst xmlns:a="http://schemas.openxmlformats.org/drawingml/2006/main">
-              <a:ext uri="{FF2B5EF4-FFF2-40B4-BE49-F238E27FC236}">
-                <a16:creationId xmlns:a16="http://schemas.microsoft.com/office/drawing/2014/main" id="{DEFF9724-D62E-4375-80CE-FA32D0C95556}"/>
-              </a:ext>
-            </a:extLst>
-          </p:cNvPr>
-          <p:cNvSpPr>
-            <a:spLocks xmlns:a="http://schemas.openxmlformats.org/drawingml/2006/main" noGrp="1"/>
-          </p:cNvSpPr>
-          <p:nvPr/>
-        </p:nvSpPr>
-        <p:spPr>
-          <a:xfrm xmlns:a="http://schemas.openxmlformats.org/drawingml/2006/main">
-            <a:off x="6191250" y="3495675"/>
-            <a:ext cx="590550" cy="400050"/>
-          </a:xfrm>
-          <a:prstGeom xmlns:a="http://schemas.openxmlformats.org/drawingml/2006/main" prst="rect">
-            <a:avLst/>
-          </a:prstGeom>
-          <a:noFill xmlns:a="http://schemas.openxmlformats.org/drawingml/2006/main"/>
-          <a:ln xmlns:a="http://schemas.openxmlformats.org/drawingml/2006/main" w="0">
-            <a:noFill/>
-            <a:prstDash val="solid"/>
-          </a:ln>
-        </p:spPr>
-        <p:txBody>
-          <a:bodyPr xmlns:a="http://schemas.openxmlformats.org/drawingml/2006/main" anchor="t">
-            <a:noAutofit/>
-          </a:bodyPr>
-          <a:lstStyle xmlns:a="http://schemas.openxmlformats.org/drawingml/2006/main"/>
+              <a:defRPr sz="1725" b="1">
+                <a:solidFill>
+                  <a:srgbClr val="111111"/>
+                </a:solidFill>
+                <a:latin typeface="Helvetica Neue"/>
+                <a:ea typeface="Helvetica Neue"/>
+                <a:cs typeface="Helvetica Neue"/>
+              </a:defRPr>
+            </a:pPr>
+            <a:r>
+              <a:rPr sz="1725" b="1">
+                <a:solidFill>
+                  <a:srgbClr val="111111"/>
+                </a:solidFill>
+                <a:latin typeface="Helvetica Neue"/>
+                <a:ea typeface="Helvetica Neue"/>
+                <a:cs typeface="Helvetica Neue"/>
+              </a:rPr>
+              <a:t>01  Reject unknown names and extra arguments before execution.</a:t>
+            </a:r>
+          </a:p>
+          <a:p xmlns:a="http://schemas.openxmlformats.org/drawingml/2006/main">
+            <a:r>
+              <a:t/>
+            </a:r>
+          </a:p>
           <a:p xmlns:a="http://schemas.openxmlformats.org/drawingml/2006/main">
             <a:pPr algn="l">
               <a:defRPr sz="1725" b="1">
                 <a:solidFill>
-                  <a:srgbClr val="73C8FF"/>
+                  <a:srgbClr val="111111"/>
                 </a:solidFill>
                 <a:latin typeface="Helvetica Neue"/>
                 <a:ea typeface="Helvetica Neue"/>
@@ -8011,113 +10116,25 @@
             <a:r>
               <a:rPr sz="1725" b="1">
                 <a:solidFill>
-                  <a:srgbClr val="73C8FF"/>
-                </a:solidFill>
-                <a:latin typeface="Helvetica Neue"/>
-                <a:ea typeface="Helvetica Neue"/>
-                <a:cs typeface="Helvetica Neue"/>
-              </a:rPr>
-              <a:t>04</a:t>
-            </a:r>
-          </a:p>
-        </p:txBody>
-      </p:sp>
-      <p:sp>
-        <p:nvSpPr>
-          <p:cNvPr id="13" name="exam-question-4">
-            <a:extLst xmlns:a="http://schemas.openxmlformats.org/drawingml/2006/main">
-              <a:ext uri="{FF2B5EF4-FFF2-40B4-BE49-F238E27FC236}">
-                <a16:creationId xmlns:a16="http://schemas.microsoft.com/office/drawing/2014/main" id="{EAF78C65-EE07-4C3A-9336-E2ABE0A88673}"/>
-              </a:ext>
-            </a:extLst>
-          </p:cNvPr>
-          <p:cNvSpPr>
-            <a:spLocks xmlns:a="http://schemas.openxmlformats.org/drawingml/2006/main" noGrp="1"/>
-          </p:cNvSpPr>
-          <p:nvPr/>
-        </p:nvSpPr>
-        <p:spPr>
-          <a:xfrm xmlns:a="http://schemas.openxmlformats.org/drawingml/2006/main">
-            <a:off x="6877050" y="3495675"/>
-            <a:ext cx="4762500" cy="895350"/>
-          </a:xfrm>
-          <a:prstGeom xmlns:a="http://schemas.openxmlformats.org/drawingml/2006/main" prst="rect">
-            <a:avLst/>
-          </a:prstGeom>
-          <a:noFill xmlns:a="http://schemas.openxmlformats.org/drawingml/2006/main"/>
-          <a:ln xmlns:a="http://schemas.openxmlformats.org/drawingml/2006/main" w="0">
-            <a:noFill/>
-            <a:prstDash val="solid"/>
-          </a:ln>
-        </p:spPr>
-        <p:txBody>
-          <a:bodyPr xmlns:a="http://schemas.openxmlformats.org/drawingml/2006/main" anchor="t">
-            <a:normAutofit fontScale="100000"/>
-          </a:bodyPr>
-          <a:lstStyle xmlns:a="http://schemas.openxmlformats.org/drawingml/2006/main"/>
-          <a:p xmlns:a="http://schemas.openxmlformats.org/drawingml/2006/main">
-            <a:pPr algn="l">
-              <a:defRPr sz="1575" b="1">
-                <a:solidFill>
-                  <a:srgbClr val="111111"/>
-                </a:solidFill>
-                <a:latin typeface="Helvetica Neue"/>
-                <a:ea typeface="Helvetica Neue"/>
-                <a:cs typeface="Helvetica Neue"/>
-              </a:defRPr>
-            </a:pPr>
-            <a:r>
-              <a:rPr sz="1575" b="1">
-                <a:solidFill>
-                  <a:srgbClr val="111111"/>
-                </a:solidFill>
-                <a:latin typeface="Helvetica Neue"/>
-                <a:ea typeface="Helvetica Neue"/>
-                <a:cs typeface="Helvetica Neue"/>
-              </a:rPr>
-              <a:t>Explain the N-by-M problem and MCP's answer.</a:t>
-            </a:r>
-          </a:p>
-        </p:txBody>
-      </p:sp>
-      <p:sp>
-        <p:nvSpPr>
-          <p:cNvPr id="14" name="exam-number-5">
-            <a:extLst xmlns:a="http://schemas.openxmlformats.org/drawingml/2006/main">
-              <a:ext uri="{FF2B5EF4-FFF2-40B4-BE49-F238E27FC236}">
-                <a16:creationId xmlns:a16="http://schemas.microsoft.com/office/drawing/2014/main" id="{55E22C12-520E-44F3-A739-2B7217FE5653}"/>
-              </a:ext>
-            </a:extLst>
-          </p:cNvPr>
-          <p:cNvSpPr>
-            <a:spLocks xmlns:a="http://schemas.openxmlformats.org/drawingml/2006/main" noGrp="1"/>
-          </p:cNvSpPr>
-          <p:nvPr/>
-        </p:nvSpPr>
-        <p:spPr>
-          <a:xfrm xmlns:a="http://schemas.openxmlformats.org/drawingml/2006/main">
-            <a:off x="390525" y="4752975"/>
-            <a:ext cx="590550" cy="400050"/>
-          </a:xfrm>
-          <a:prstGeom xmlns:a="http://schemas.openxmlformats.org/drawingml/2006/main" prst="rect">
-            <a:avLst/>
-          </a:prstGeom>
-          <a:noFill xmlns:a="http://schemas.openxmlformats.org/drawingml/2006/main"/>
-          <a:ln xmlns:a="http://schemas.openxmlformats.org/drawingml/2006/main" w="0">
-            <a:noFill/>
-            <a:prstDash val="solid"/>
-          </a:ln>
-        </p:spPr>
-        <p:txBody>
-          <a:bodyPr xmlns:a="http://schemas.openxmlformats.org/drawingml/2006/main" anchor="t">
-            <a:noAutofit/>
-          </a:bodyPr>
-          <a:lstStyle xmlns:a="http://schemas.openxmlformats.org/drawingml/2006/main"/>
+                  <a:srgbClr val="111111"/>
+                </a:solidFill>
+                <a:latin typeface="Helvetica Neue"/>
+                <a:ea typeface="Helvetica Neue"/>
+                <a:cs typeface="Helvetica Neue"/>
+              </a:rPr>
+              <a:t>02  Bound input size and arithmetic magnitude.</a:t>
+            </a:r>
+          </a:p>
+          <a:p xmlns:a="http://schemas.openxmlformats.org/drawingml/2006/main">
+            <a:r>
+              <a:t/>
+            </a:r>
+          </a:p>
           <a:p xmlns:a="http://schemas.openxmlformats.org/drawingml/2006/main">
             <a:pPr algn="l">
               <a:defRPr sz="1725" b="1">
                 <a:solidFill>
-                  <a:srgbClr val="73C8FF"/>
+                  <a:srgbClr val="111111"/>
                 </a:solidFill>
                 <a:latin typeface="Helvetica Neue"/>
                 <a:ea typeface="Helvetica Neue"/>
@@ -8127,187 +10144,13 @@
             <a:r>
               <a:rPr sz="1725" b="1">
                 <a:solidFill>
-                  <a:srgbClr val="73C8FF"/>
-                </a:solidFill>
-                <a:latin typeface="Helvetica Neue"/>
-                <a:ea typeface="Helvetica Neue"/>
-                <a:cs typeface="Helvetica Neue"/>
-              </a:rPr>
-              <a:t>05</a:t>
-            </a:r>
-          </a:p>
-        </p:txBody>
-      </p:sp>
-      <p:sp>
-        <p:nvSpPr>
-          <p:cNvPr id="15" name="exam-question-5">
-            <a:extLst xmlns:a="http://schemas.openxmlformats.org/drawingml/2006/main">
-              <a:ext uri="{FF2B5EF4-FFF2-40B4-BE49-F238E27FC236}">
-                <a16:creationId xmlns:a16="http://schemas.microsoft.com/office/drawing/2014/main" id="{579C911A-441A-4017-A3FB-6D17A6F3CE98}"/>
-              </a:ext>
-            </a:extLst>
-          </p:cNvPr>
-          <p:cNvSpPr>
-            <a:spLocks xmlns:a="http://schemas.openxmlformats.org/drawingml/2006/main" noGrp="1"/>
-          </p:cNvSpPr>
-          <p:nvPr/>
-        </p:nvSpPr>
-        <p:spPr>
-          <a:xfrm xmlns:a="http://schemas.openxmlformats.org/drawingml/2006/main">
-            <a:off x="1076325" y="4752975"/>
-            <a:ext cx="4762500" cy="895350"/>
-          </a:xfrm>
-          <a:prstGeom xmlns:a="http://schemas.openxmlformats.org/drawingml/2006/main" prst="rect">
-            <a:avLst/>
-          </a:prstGeom>
-          <a:noFill xmlns:a="http://schemas.openxmlformats.org/drawingml/2006/main"/>
-          <a:ln xmlns:a="http://schemas.openxmlformats.org/drawingml/2006/main" w="0">
-            <a:noFill/>
-            <a:prstDash val="solid"/>
-          </a:ln>
-        </p:spPr>
-        <p:txBody>
-          <a:bodyPr xmlns:a="http://schemas.openxmlformats.org/drawingml/2006/main" anchor="t">
-            <a:normAutofit fontScale="100000"/>
-          </a:bodyPr>
-          <a:lstStyle xmlns:a="http://schemas.openxmlformats.org/drawingml/2006/main"/>
-          <a:p xmlns:a="http://schemas.openxmlformats.org/drawingml/2006/main">
-            <a:pPr algn="l">
-              <a:defRPr sz="1575" b="1">
-                <a:solidFill>
-                  <a:srgbClr val="111111"/>
-                </a:solidFill>
-                <a:latin typeface="Helvetica Neue"/>
-                <a:ea typeface="Helvetica Neue"/>
-                <a:cs typeface="Helvetica Neue"/>
-              </a:defRPr>
-            </a:pPr>
-            <a:r>
-              <a:rPr sz="1575" b="1">
-                <a:solidFill>
-                  <a:srgbClr val="111111"/>
-                </a:solidFill>
-                <a:latin typeface="Helvetica Neue"/>
-                <a:ea typeface="Helvetica Neue"/>
-                <a:cs typeface="Helvetica Neue"/>
-              </a:rPr>
-              <a:t>List server-side and client-side MCP primitives.</a:t>
-            </a:r>
-          </a:p>
-        </p:txBody>
-      </p:sp>
-      <p:sp>
-        <p:nvSpPr>
-          <p:cNvPr id="16" name="exam-number-6">
-            <a:extLst xmlns:a="http://schemas.openxmlformats.org/drawingml/2006/main">
-              <a:ext uri="{FF2B5EF4-FFF2-40B4-BE49-F238E27FC236}">
-                <a16:creationId xmlns:a16="http://schemas.microsoft.com/office/drawing/2014/main" id="{05475133-35D2-4759-BE00-2836C98248E7}"/>
-              </a:ext>
-            </a:extLst>
-          </p:cNvPr>
-          <p:cNvSpPr>
-            <a:spLocks xmlns:a="http://schemas.openxmlformats.org/drawingml/2006/main" noGrp="1"/>
-          </p:cNvSpPr>
-          <p:nvPr/>
-        </p:nvSpPr>
-        <p:spPr>
-          <a:xfrm xmlns:a="http://schemas.openxmlformats.org/drawingml/2006/main">
-            <a:off x="6191250" y="4752975"/>
-            <a:ext cx="590550" cy="400050"/>
-          </a:xfrm>
-          <a:prstGeom xmlns:a="http://schemas.openxmlformats.org/drawingml/2006/main" prst="rect">
-            <a:avLst/>
-          </a:prstGeom>
-          <a:noFill xmlns:a="http://schemas.openxmlformats.org/drawingml/2006/main"/>
-          <a:ln xmlns:a="http://schemas.openxmlformats.org/drawingml/2006/main" w="0">
-            <a:noFill/>
-            <a:prstDash val="solid"/>
-          </a:ln>
-        </p:spPr>
-        <p:txBody>
-          <a:bodyPr xmlns:a="http://schemas.openxmlformats.org/drawingml/2006/main" anchor="t">
-            <a:noAutofit/>
-          </a:bodyPr>
-          <a:lstStyle xmlns:a="http://schemas.openxmlformats.org/drawingml/2006/main"/>
-          <a:p xmlns:a="http://schemas.openxmlformats.org/drawingml/2006/main">
-            <a:pPr algn="l">
-              <a:defRPr sz="1725" b="1">
-                <a:solidFill>
-                  <a:srgbClr val="73C8FF"/>
-                </a:solidFill>
-                <a:latin typeface="Helvetica Neue"/>
-                <a:ea typeface="Helvetica Neue"/>
-                <a:cs typeface="Helvetica Neue"/>
-              </a:defRPr>
-            </a:pPr>
-            <a:r>
-              <a:rPr sz="1725" b="1">
-                <a:solidFill>
-                  <a:srgbClr val="73C8FF"/>
-                </a:solidFill>
-                <a:latin typeface="Helvetica Neue"/>
-                <a:ea typeface="Helvetica Neue"/>
-                <a:cs typeface="Helvetica Neue"/>
-              </a:rPr>
-              <a:t>06</a:t>
-            </a:r>
-          </a:p>
-        </p:txBody>
-      </p:sp>
-      <p:sp>
-        <p:nvSpPr>
-          <p:cNvPr id="17" name="exam-question-6">
-            <a:extLst xmlns:a="http://schemas.openxmlformats.org/drawingml/2006/main">
-              <a:ext uri="{FF2B5EF4-FFF2-40B4-BE49-F238E27FC236}">
-                <a16:creationId xmlns:a16="http://schemas.microsoft.com/office/drawing/2014/main" id="{E2EBD6F6-B078-4B13-A3D0-27C39248A3AC}"/>
-              </a:ext>
-            </a:extLst>
-          </p:cNvPr>
-          <p:cNvSpPr>
-            <a:spLocks xmlns:a="http://schemas.openxmlformats.org/drawingml/2006/main" noGrp="1"/>
-          </p:cNvSpPr>
-          <p:nvPr/>
-        </p:nvSpPr>
-        <p:spPr>
-          <a:xfrm xmlns:a="http://schemas.openxmlformats.org/drawingml/2006/main">
-            <a:off x="6877050" y="4752975"/>
-            <a:ext cx="4762500" cy="895350"/>
-          </a:xfrm>
-          <a:prstGeom xmlns:a="http://schemas.openxmlformats.org/drawingml/2006/main" prst="rect">
-            <a:avLst/>
-          </a:prstGeom>
-          <a:noFill xmlns:a="http://schemas.openxmlformats.org/drawingml/2006/main"/>
-          <a:ln xmlns:a="http://schemas.openxmlformats.org/drawingml/2006/main" w="0">
-            <a:noFill/>
-            <a:prstDash val="solid"/>
-          </a:ln>
-        </p:spPr>
-        <p:txBody>
-          <a:bodyPr xmlns:a="http://schemas.openxmlformats.org/drawingml/2006/main" anchor="t">
-            <a:normAutofit fontScale="100000"/>
-          </a:bodyPr>
-          <a:lstStyle xmlns:a="http://schemas.openxmlformats.org/drawingml/2006/main"/>
-          <a:p xmlns:a="http://schemas.openxmlformats.org/drawingml/2006/main">
-            <a:pPr algn="l">
-              <a:defRPr sz="1575" b="1">
-                <a:solidFill>
-                  <a:srgbClr val="111111"/>
-                </a:solidFill>
-                <a:latin typeface="Helvetica Neue"/>
-                <a:ea typeface="Helvetica Neue"/>
-                <a:cs typeface="Helvetica Neue"/>
-              </a:defRPr>
-            </a:pPr>
-            <a:r>
-              <a:rPr sz="1575" b="1">
-                <a:solidFill>
-                  <a:srgbClr val="111111"/>
-                </a:solidFill>
-                <a:latin typeface="Helvetica Neue"/>
-                <a:ea typeface="Helvetica Neue"/>
-                <a:cs typeface="Helvetica Neue"/>
-              </a:rPr>
-              <a:t>When is a framework preferable to a raw model API?</a:t>
+                  <a:srgbClr val="111111"/>
+                </a:solidFill>
+                <a:latin typeface="Helvetica Neue"/>
+                <a:ea typeface="Helvetica Neue"/>
+                <a:cs typeface="Helvetica Neue"/>
+              </a:rPr>
+              <a:t>03  Check provider features rather than assuming parity.</a:t>
             </a:r>
           </a:p>
         </p:txBody>
@@ -8315,7 +10158,7 @@
     </p:spTree>
     <p:extLst>
       <p:ext uri="{BB962C8B-B14F-4D97-AF65-F5344CB8AC3E}">
-        <p14:creationId xmlns:p14="http://schemas.microsoft.com/office/powerpoint/2010/main" val="1293557605"/>
+        <p14:creationId xmlns:p14="http://schemas.microsoft.com/office/powerpoint/2010/main" val="738841901"/>
       </p:ext>
     </p:extLst>
   </p:cSld>
@@ -8323,9 +10166,9 @@
 </file>
 
 <file path=ppt/theme/theme1.xml><?xml version="1.0" encoding="utf-8"?>
-<a:theme xmlns:a="http://schemas.openxmlformats.org/drawingml/2006/main" name="ChatGPT">
+<a:theme xmlns:a="http://schemas.openxmlformats.org/drawingml/2006/main" name="Course">
   <a:themeElements>
-    <a:clrScheme name="ChatGPT">
+    <a:clrScheme name="Course">
       <a:dk1>
         <a:srgbClr val="000000"/>
       </a:dk1>
@@ -8375,7 +10218,7 @@
         <a:cs typeface="Calibri"/>
       </a:minorFont>
     </a:fontScheme>
-    <a:fmtScheme name="ChatGPT">
+    <a:fmtScheme name="Course">
       <a:fillStyleLst>
         <a:solidFill>
           <a:schemeClr val="phClr"/>
